--- a/diseno-plataformas/unidad-04/Unidad-4-2026-completa.pptx
+++ b/diseno-plataformas/unidad-04/Unidad-4-2026-completa.pptx
@@ -59,6 +59,15 @@
     <p:sldId id="307" r:id="rId59"/>
     <p:sldId id="308" r:id="rId60"/>
     <p:sldId id="309" r:id="rId61"/>
+    <p:sldId id="310" r:id="rId62"/>
+    <p:sldId id="311" r:id="rId63"/>
+    <p:sldId id="312" r:id="rId64"/>
+    <p:sldId id="313" r:id="rId65"/>
+    <p:sldId id="314" r:id="rId66"/>
+    <p:sldId id="315" r:id="rId67"/>
+    <p:sldId id="316" r:id="rId68"/>
+    <p:sldId id="317" r:id="rId69"/>
+    <p:sldId id="318" r:id="rId70"/>
   </p:sldIdLst>
   <p:sldSz cx="12191695" cy="6858000" type="screen4x3"/>
   <p:notesSz cx="6858000" cy="9144000"/>
@@ -1568,6 +1577,11 @@
               <a:t>No revelar todavía el problema del spawn: lo descubren en A4.2.</a:t>
             </a:r>
           </a:p>
+          <a:p>
+            <a:r>
+              <a:t>Cómo activarlo (captura real, Unity 6000.3.11f1): 1. abrir Scenes/Game (con una escena Untitled no se ve el juego); 2. en la pestaña Game, el desplegable de la izquierda cambia de Game a Simulator (o Window &gt; General &gt; Device Simulator); 3. elegir el dispositivo, por ejemplo Punch Hole Left (1080×2340); 4. Play y rotar desde la barra del Simulator. Si aparece "Simulator is currently not active" (marcado en la captura), el Game View sigue en modo Game. Paso a paso para los alumnos: anexo, paso 3.</a:t>
+            </a:r>
+          </a:p>
         </p:txBody>
       </p:sp>
       <p:sp>
@@ -2808,6 +2822,11 @@
               <a:t>Si no terminan: completan en casa y suben la captura al aula virtual. Avance del TP 3: sección 3 (control y HUD).</a:t>
             </a:r>
           </a:p>
+          <a:p>
+            <a:r>
+              <a:t>En el simulador el toque se hace con el mouse y es de un solo dedo. El Foldable Device del simulador sirve para ver que la relación de aspecto cambia en el mismo teléfono (plegado y desplegado). Paso a paso: anexo, paso 3.</a:t>
+            </a:r>
+          </a:p>
         </p:txBody>
       </p:sp>
       <p:sp>
@@ -3198,6 +3217,11 @@
               <a:t>Dato verificado (Unity 6.3 Manual, Build your application for Android): Build crea el archivo en la carpeta elegida; Build and Run además lo instala en el Run Device; por defecto Unity genera APK.</a:t>
             </a:r>
           </a:p>
+          <a:p>
+            <a:r>
+              <a:t>Switch Platform aparece abajo a la derecha mientras Android no sea la plataforma activa. Paso a paso con capturas: anexo, pasos 4 a 7.</a:t>
+            </a:r>
+          </a:p>
         </p:txBody>
       </p:sp>
       <p:sp>
@@ -3290,7 +3314,7 @@
           </a:p>
           <a:p>
             <a:r>
-              <a:t>1. Instalar Android Build Support (con OpenJDK, Android SDK y NDK) en Unity 6000.3.11f1 desde Unity Hub.</a:t>
+              <a:t>1. Instalar Android Build Support (con OpenJDK, Android SDK y NDK) en Unity 6000.3.11f1 desde Unity Hub, y verificar en Edit &gt; Preferences &gt; External Tools &gt; Android que JDK, Android SDK Tools, Android NDK y Gradle estén tildados como "Installed with Unity (recommended)" (captura de la slide; anexo, paso 1).</a:t>
             </a:r>
           </a:p>
           <a:p>
@@ -3693,6 +3717,11 @@
               <a:t>Orientación: la decide cada grupo según su esquema de A4.3 (Resolution and Presentation &gt; Default Orientation).</a:t>
             </a:r>
           </a:p>
+          <a:p>
+            <a:r>
+              <a:t>Paso a paso con capturas: anexo, pasos 5 y 6 (identidad, 64 bits, orientación, safe area e ícono). Dato real: en Edit &gt; Project Settings &gt; Player el proyecto sigue en DefaultCompany / UnityUnitTestingTutorial; los valores Unju / AsteroideTest solo existen dentro del Build Profile.</a:t>
+            </a:r>
+          </a:p>
         </p:txBody>
       </p:sp>
       <p:sp>
@@ -3798,6 +3827,11 @@
               <a:t>Respuesta a la pregunta: el primero es un aviso (deja seguir); el segundo frena Build and Run, pero no Build.</a:t>
             </a:r>
           </a:p>
+          <a:p>
+            <a:r>
+              <a:t>Tabla de diagnóstico completa (incluye adb unauthorized, ícono negro y adb logcat): anexo, paso 8.</a:t>
+            </a:r>
+          </a:p>
         </p:txBody>
       </p:sp>
       <p:sp>
@@ -3898,6 +3932,11 @@
               <a:t>Pasos con cable (para medir con el Profiler): en Build Profiles, Android activo; Development Build y Autoconnect Profiler tildados; teléfono conectado con la depuración activada; Build and Run. Según el manual de Unity 6.3, con Development Build y Build and Run Unity prepara el túnel del Profiler antes de abrir la app. Primero lo hace la docente; después cada grupo, con el teléfono de un integrante.</a:t>
             </a:r>
           </a:p>
+          <a:p>
+            <a:r>
+              <a:t>Paso a paso para los grupos: anexo, pasos 2 (teléfono), 4 (Build Profiles) y 7 (build e instalación).</a:t>
+            </a:r>
+          </a:p>
         </p:txBody>
       </p:sp>
       <p:sp>
@@ -5850,6 +5889,446 @@
 </p:notes>
 </file>
 
+<file path=ppt/notesSlides/notesSlide55.xml><?xml version="1.0" encoding="utf-8"?>
+<p:notes xmlns:a="http://schemas.openxmlformats.org/drawingml/2006/main" xmlns:p="http://schemas.openxmlformats.org/presentationml/2006/main" xmlns:r="http://schemas.openxmlformats.org/officeDocument/2006/relationships">
+  <p:cSld>
+    <p:spTree>
+      <p:nvGrpSpPr>
+        <p:cNvPr id="1" name=""/>
+        <p:cNvGrpSpPr/>
+        <p:nvPr/>
+      </p:nvGrpSpPr>
+      <p:grpSpPr>
+        <a:xfrm>
+          <a:off x="0" y="0"/>
+          <a:ext cx="0" cy="0"/>
+          <a:chOff x="0" y="0"/>
+          <a:chExt cx="0" cy="0"/>
+        </a:xfrm>
+      </p:grpSpPr>
+      <p:sp>
+        <p:nvSpPr>
+          <p:cNvPr id="2" name="Slide Image Placeholder 1"/>
+          <p:cNvSpPr>
+            <a:spLocks noGrp="1"/>
+          </p:cNvSpPr>
+          <p:nvPr>
+            <p:ph type="sldImg" idx="2"/>
+          </p:nvPr>
+        </p:nvSpPr>
+        <p:spPr/>
+      </p:sp>
+      <p:sp>
+        <p:nvSpPr>
+          <p:cNvPr id="3" name="Notes Placeholder 2"/>
+          <p:cNvSpPr>
+            <a:spLocks noGrp="1"/>
+          </p:cNvSpPr>
+          <p:nvPr>
+            <p:ph type="body" idx="3" sz="quarter"/>
+          </p:nvPr>
+        </p:nvSpPr>
+        <p:spPr/>
+        <p:txBody>
+          <a:bodyPr/>
+          <a:lstStyle/>
+          <a:p>
+            <a:r>
+              <a:t>Anexo de consulta: no ocupa tiempo de clase. Los alumnos lo usan para la tarea entre encuentros y durante la práctica en el teléfono. Las slides de clase remiten acá.</a:t>
+            </a:r>
+          </a:p>
+          <a:p>
+            <a:r>
+              <a:t>Todas las capturas son de Unity 6000.3.11f1 (Windows), tomadas por la docente el 2026-10-12 y el 2026-10-13. Las marcas rojas se agregaron después.</a:t>
+            </a:r>
+          </a:p>
+        </p:txBody>
+      </p:sp>
+      <p:sp>
+        <p:nvSpPr>
+          <p:cNvPr id="4" name="Slide Number Placeholder 3"/>
+          <p:cNvSpPr>
+            <a:spLocks noGrp="1"/>
+          </p:cNvSpPr>
+          <p:nvPr>
+            <p:ph type="sldNum" idx="5" sz="quarter"/>
+          </p:nvPr>
+        </p:nvSpPr>
+        <p:spPr/>
+      </p:sp>
+    </p:spTree>
+  </p:cSld>
+  <p:clrMapOvr>
+    <a:masterClrMapping/>
+  </p:clrMapOvr>
+</p:notes>
+</file>
+
+<file path=ppt/notesSlides/notesSlide56.xml><?xml version="1.0" encoding="utf-8"?>
+<p:notes xmlns:a="http://schemas.openxmlformats.org/drawingml/2006/main" xmlns:p="http://schemas.openxmlformats.org/presentationml/2006/main" xmlns:r="http://schemas.openxmlformats.org/officeDocument/2006/relationships">
+  <p:cSld>
+    <p:spTree>
+      <p:nvGrpSpPr>
+        <p:cNvPr id="1" name=""/>
+        <p:cNvGrpSpPr/>
+        <p:nvPr/>
+      </p:nvGrpSpPr>
+      <p:grpSpPr>
+        <a:xfrm>
+          <a:off x="0" y="0"/>
+          <a:ext cx="0" cy="0"/>
+          <a:chOff x="0" y="0"/>
+          <a:chExt cx="0" cy="0"/>
+        </a:xfrm>
+      </p:grpSpPr>
+      <p:sp>
+        <p:nvSpPr>
+          <p:cNvPr id="2" name="Slide Image Placeholder 1"/>
+          <p:cNvSpPr>
+            <a:spLocks noGrp="1"/>
+          </p:cNvSpPr>
+          <p:nvPr>
+            <p:ph type="sldImg" idx="2"/>
+          </p:nvPr>
+        </p:nvSpPr>
+        <p:spPr/>
+      </p:sp>
+      <p:sp>
+        <p:nvSpPr>
+          <p:cNvPr id="3" name="Notes Placeholder 2"/>
+          <p:cNvSpPr>
+            <a:spLocks noGrp="1"/>
+          </p:cNvSpPr>
+          <p:nvPr>
+            <p:ph type="body" idx="3" sz="quarter"/>
+          </p:nvPr>
+        </p:nvSpPr>
+        <p:spPr/>
+        <p:txBody>
+          <a:bodyPr/>
+          <a:lstStyle/>
+          <a:p>
+            <a:r>
+              <a:t>Glosario (conceptos cortos para la docente):</a:t>
+            </a:r>
+          </a:p>
+          <a:p>
+            <a:r>
+              <a:t>• JDK: kit de Java que usa la compilación de Android.</a:t>
+            </a:r>
+          </a:p>
+          <a:p>
+            <a:r>
+              <a:t>• SDK / NDK: herramientas de Android para compilar y para el código nativo.</a:t>
+            </a:r>
+          </a:p>
+          <a:p>
+            <a:r>
+              <a:t>• Gradle: sistema que arma el APK a partir de lo que exporta Unity.</a:t>
+            </a:r>
+          </a:p>
+          <a:p>
+            <a:r>
+              <a:t>• Preferences vs. Project Settings: Preferences son ajustes del editor en esta máquina; Project Settings son del proyecto y viajan con él.</a:t>
+            </a:r>
+          </a:p>
+          <a:p>
+            <a:r>
+              <a:t>Pasos: en Unity Hub, Installs, menú de la versión 6000.3.11f1 &gt; Add modules &gt; Android Build Support con OpenJDK y Android SDK &amp; NDK Tools. Después, en el editor: Edit &gt; Preferences &gt; External Tools, sección Android, al final de la página. Las cuatro casillas "… Installed with Unity (recommended)" (JDK, Android SDK Tools, Android NDK y Gradle) tienen que estar tildadas, con rutas dentro de la carpeta del editor (…/PlaybackEngines/AndroidPlayer).</a:t>
+            </a:r>
+          </a:p>
+          <a:p>
+            <a:r>
+              <a:t>Si una ruta aparece en rojo o vacía, reinstalar el módulo desde Unity Hub. No apuntar a otro JDK o SDK salvo que se sepa por qué.</a:t>
+            </a:r>
+          </a:p>
+        </p:txBody>
+      </p:sp>
+      <p:sp>
+        <p:nvSpPr>
+          <p:cNvPr id="4" name="Slide Number Placeholder 3"/>
+          <p:cNvSpPr>
+            <a:spLocks noGrp="1"/>
+          </p:cNvSpPr>
+          <p:nvPr>
+            <p:ph type="sldNum" idx="5" sz="quarter"/>
+          </p:nvPr>
+        </p:nvSpPr>
+        <p:spPr/>
+      </p:sp>
+    </p:spTree>
+  </p:cSld>
+  <p:clrMapOvr>
+    <a:masterClrMapping/>
+  </p:clrMapOvr>
+</p:notes>
+</file>
+
+<file path=ppt/notesSlides/notesSlide57.xml><?xml version="1.0" encoding="utf-8"?>
+<p:notes xmlns:a="http://schemas.openxmlformats.org/drawingml/2006/main" xmlns:p="http://schemas.openxmlformats.org/presentationml/2006/main" xmlns:r="http://schemas.openxmlformats.org/officeDocument/2006/relationships">
+  <p:cSld>
+    <p:spTree>
+      <p:nvGrpSpPr>
+        <p:cNvPr id="1" name=""/>
+        <p:cNvGrpSpPr/>
+        <p:nvPr/>
+      </p:nvGrpSpPr>
+      <p:grpSpPr>
+        <a:xfrm>
+          <a:off x="0" y="0"/>
+          <a:ext cx="0" cy="0"/>
+          <a:chOff x="0" y="0"/>
+          <a:chExt cx="0" cy="0"/>
+        </a:xfrm>
+      </p:grpSpPr>
+      <p:sp>
+        <p:nvSpPr>
+          <p:cNvPr id="2" name="Slide Image Placeholder 1"/>
+          <p:cNvSpPr>
+            <a:spLocks noGrp="1"/>
+          </p:cNvSpPr>
+          <p:nvPr>
+            <p:ph type="sldImg" idx="2"/>
+          </p:nvPr>
+        </p:nvSpPr>
+        <p:spPr/>
+      </p:sp>
+      <p:sp>
+        <p:nvSpPr>
+          <p:cNvPr id="3" name="Notes Placeholder 2"/>
+          <p:cNvSpPr>
+            <a:spLocks noGrp="1"/>
+          </p:cNvSpPr>
+          <p:nvPr>
+            <p:ph type="body" idx="3" sz="quarter"/>
+          </p:nvPr>
+        </p:nvSpPr>
+        <p:spPr/>
+        <p:txBody>
+          <a:bodyPr/>
+          <a:lstStyle/>
+          <a:p>
+            <a:r>
+              <a:t>Glosario (conceptos cortos para la docente):</a:t>
+            </a:r>
+          </a:p>
+          <a:p>
+            <a:r>
+              <a:t>• adb (Android Debug Bridge): herramienta de línea de comandos que conecta la PC con el teléfono.</a:t>
+            </a:r>
+          </a:p>
+          <a:p>
+            <a:r>
+              <a:t>Pasos: Ajustes &gt; Acerca del teléfono &gt; tocar 7 veces "Número de compilación"; en Android 9 o superior, las Opciones de desarrollador están en Ajustes &gt; Sistema &gt; Avanzado. Activar "Depuración USB". Conectar con un cable de datos (muchos cables solo cargan) y aceptar en el teléfono "¿Permitir depuración USB?".</a:t>
+            </a:r>
+          </a:p>
+          <a:p>
+            <a:r>
+              <a:t>Comprobar: en Unity, Build Profiles &gt; Android &gt; Run Device &gt; Refresh; o en una terminal, adb devices (adb está en la carpeta del editor: Data/PlaybackEngines/AndroidPlayer/SDK/platform-tools). "device" = listo; "unauthorized" = falta aceptar el diálogo; lista vacía = cable, puerto o driver USB del fabricante (el manual de Unity avisa que en Windows puede hacer falta).</a:t>
+            </a:r>
+          </a:p>
+        </p:txBody>
+      </p:sp>
+      <p:sp>
+        <p:nvSpPr>
+          <p:cNvPr id="4" name="Slide Number Placeholder 3"/>
+          <p:cNvSpPr>
+            <a:spLocks noGrp="1"/>
+          </p:cNvSpPr>
+          <p:nvPr>
+            <p:ph type="sldNum" idx="5" sz="quarter"/>
+          </p:nvPr>
+        </p:nvSpPr>
+        <p:spPr/>
+      </p:sp>
+    </p:spTree>
+  </p:cSld>
+  <p:clrMapOvr>
+    <a:masterClrMapping/>
+  </p:clrMapOvr>
+</p:notes>
+</file>
+
+<file path=ppt/notesSlides/notesSlide58.xml><?xml version="1.0" encoding="utf-8"?>
+<p:notes xmlns:a="http://schemas.openxmlformats.org/drawingml/2006/main" xmlns:p="http://schemas.openxmlformats.org/presentationml/2006/main" xmlns:r="http://schemas.openxmlformats.org/officeDocument/2006/relationships">
+  <p:cSld>
+    <p:spTree>
+      <p:nvGrpSpPr>
+        <p:cNvPr id="1" name=""/>
+        <p:cNvGrpSpPr/>
+        <p:nvPr/>
+      </p:nvGrpSpPr>
+      <p:grpSpPr>
+        <a:xfrm>
+          <a:off x="0" y="0"/>
+          <a:ext cx="0" cy="0"/>
+          <a:chOff x="0" y="0"/>
+          <a:chExt cx="0" cy="0"/>
+        </a:xfrm>
+      </p:grpSpPr>
+      <p:sp>
+        <p:nvSpPr>
+          <p:cNvPr id="2" name="Slide Image Placeholder 1"/>
+          <p:cNvSpPr>
+            <a:spLocks noGrp="1"/>
+          </p:cNvSpPr>
+          <p:nvPr>
+            <p:ph type="sldImg" idx="2"/>
+          </p:nvPr>
+        </p:nvSpPr>
+        <p:spPr/>
+      </p:sp>
+      <p:sp>
+        <p:nvSpPr>
+          <p:cNvPr id="3" name="Notes Placeholder 2"/>
+          <p:cNvSpPr>
+            <a:spLocks noGrp="1"/>
+          </p:cNvSpPr>
+          <p:nvPr>
+            <p:ph type="body" idx="3" sz="quarter"/>
+          </p:nvPr>
+        </p:nvSpPr>
+        <p:spPr/>
+        <p:txBody>
+          <a:bodyPr/>
+          <a:lstStyle/>
+          <a:p>
+            <a:r>
+              <a:t>Glosario (conceptos cortos para la docente):</a:t>
+            </a:r>
+          </a:p>
+          <a:p>
+            <a:r>
+              <a:t>• Device Simulator: vista de Unity que muestra el juego con la pantalla de un dispositivo real (muesca, safe area, rotación).</a:t>
+            </a:r>
+          </a:p>
+          <a:p>
+            <a:r>
+              <a:t>Pasos: abrir Scenes/Game (si la escena es Untitled, no se ve el juego). En la pestaña Game, el desplegable de la izquierda cambia entre Game y Simulator; también se abre como ventana desde Window &gt; General &gt; Device Simulator. Elegir el dispositivo en el desplegable (por ejemplo, Punch Hole Left 1080×2340 o el Foldable Device, que permite ver el mismo teléfono plegado y desplegado). Dar Play y rotar desde la barra del Simulator.</a:t>
+            </a:r>
+          </a:p>
+          <a:p>
+            <a:r>
+              <a:t>Si aparece "Simulator is currently not active", el Game View está en modo Game: elegir Simulator en el desplegable.</a:t>
+            </a:r>
+          </a:p>
+          <a:p>
+            <a:r>
+              <a:t>Qué NO simula: rendimiento, memoria, capacidades de render ni giroscopio. Simula un solo dedo (con el mouse): mover y disparar a la vez solo se prueba en el teléfono.</a:t>
+            </a:r>
+          </a:p>
+        </p:txBody>
+      </p:sp>
+      <p:sp>
+        <p:nvSpPr>
+          <p:cNvPr id="4" name="Slide Number Placeholder 3"/>
+          <p:cNvSpPr>
+            <a:spLocks noGrp="1"/>
+          </p:cNvSpPr>
+          <p:nvPr>
+            <p:ph type="sldNum" idx="5" sz="quarter"/>
+          </p:nvPr>
+        </p:nvSpPr>
+        <p:spPr/>
+      </p:sp>
+    </p:spTree>
+  </p:cSld>
+  <p:clrMapOvr>
+    <a:masterClrMapping/>
+  </p:clrMapOvr>
+</p:notes>
+</file>
+
+<file path=ppt/notesSlides/notesSlide59.xml><?xml version="1.0" encoding="utf-8"?>
+<p:notes xmlns:a="http://schemas.openxmlformats.org/drawingml/2006/main" xmlns:p="http://schemas.openxmlformats.org/presentationml/2006/main" xmlns:r="http://schemas.openxmlformats.org/officeDocument/2006/relationships">
+  <p:cSld>
+    <p:spTree>
+      <p:nvGrpSpPr>
+        <p:cNvPr id="1" name=""/>
+        <p:cNvGrpSpPr/>
+        <p:nvPr/>
+      </p:nvGrpSpPr>
+      <p:grpSpPr>
+        <a:xfrm>
+          <a:off x="0" y="0"/>
+          <a:ext cx="0" cy="0"/>
+          <a:chOff x="0" y="0"/>
+          <a:chExt cx="0" cy="0"/>
+        </a:xfrm>
+      </p:grpSpPr>
+      <p:sp>
+        <p:nvSpPr>
+          <p:cNvPr id="2" name="Slide Image Placeholder 1"/>
+          <p:cNvSpPr>
+            <a:spLocks noGrp="1"/>
+          </p:cNvSpPr>
+          <p:nvPr>
+            <p:ph type="sldImg" idx="2"/>
+          </p:nvPr>
+        </p:nvSpPr>
+        <p:spPr/>
+      </p:sp>
+      <p:sp>
+        <p:nvSpPr>
+          <p:cNvPr id="3" name="Notes Placeholder 2"/>
+          <p:cNvSpPr>
+            <a:spLocks noGrp="1"/>
+          </p:cNvSpPr>
+          <p:nvPr>
+            <p:ph type="body" idx="3" sz="quarter"/>
+          </p:nvPr>
+        </p:nvSpPr>
+        <p:spPr/>
+        <p:txBody>
+          <a:bodyPr/>
+          <a:lstStyle/>
+          <a:p>
+            <a:r>
+              <a:t>Glosario (conceptos cortos para la docente):</a:t>
+            </a:r>
+          </a:p>
+          <a:p>
+            <a:r>
+              <a:t>• Switch Platform: cambiar la plataforma activa; Unity reimporta los assets y la primera vez tarda.</a:t>
+            </a:r>
+          </a:p>
+          <a:p>
+            <a:r>
+              <a:t>• Run Device: el teléfono en el que Build and Run instala la app.</a:t>
+            </a:r>
+          </a:p>
+          <a:p>
+            <a:r>
+              <a:t>Pasos: File &gt; Build Profiles; en Platforms elegir Android; si todavía no es la plataforma activa, abajo a la derecha aparece Switch Platform. En Platform Settings: Build App Bundle (Google Play) destildado para obtener un .apk; Development Build y Autoconnect Profiler tildados si se va a medir con el Profiler; Run Device con el teléfono conectado (Refresh si no aparece).</a:t>
+            </a:r>
+          </a:p>
+          <a:p>
+            <a:r>
+              <a:t>El botón Player Settings (arriba a la derecha) abre los ajustes del proyecto. Cuidado: la sección Player Settings que aparece dentro del perfil crea una copia propia del perfil; para que haya una sola fuente, editar en Edit &gt; Project Settings &gt; Player.</a:t>
+            </a:r>
+          </a:p>
+        </p:txBody>
+      </p:sp>
+      <p:sp>
+        <p:nvSpPr>
+          <p:cNvPr id="4" name="Slide Number Placeholder 3"/>
+          <p:cNvSpPr>
+            <a:spLocks noGrp="1"/>
+          </p:cNvSpPr>
+          <p:nvPr>
+            <p:ph type="sldNum" idx="5" sz="quarter"/>
+          </p:nvPr>
+        </p:nvSpPr>
+        <p:spPr/>
+      </p:sp>
+    </p:spTree>
+  </p:cSld>
+  <p:clrMapOvr>
+    <a:masterClrMapping/>
+  </p:clrMapOvr>
+</p:notes>
+</file>
+
 <file path=ppt/notesSlides/notesSlide6.xml><?xml version="1.0" encoding="utf-8"?>
 <p:notes xmlns:a="http://schemas.openxmlformats.org/drawingml/2006/main" xmlns:p="http://schemas.openxmlformats.org/presentationml/2006/main" xmlns:r="http://schemas.openxmlformats.org/officeDocument/2006/relationships">
   <p:cSld>
@@ -5956,6 +6435,376 @@
           <a:p>
             <a:r>
               <a:t>No detenerse más de 3 minutos: es contexto, no contenido evaluable.</a:t>
+            </a:r>
+          </a:p>
+        </p:txBody>
+      </p:sp>
+      <p:sp>
+        <p:nvSpPr>
+          <p:cNvPr id="4" name="Slide Number Placeholder 3"/>
+          <p:cNvSpPr>
+            <a:spLocks noGrp="1"/>
+          </p:cNvSpPr>
+          <p:nvPr>
+            <p:ph type="sldNum" idx="5" sz="quarter"/>
+          </p:nvPr>
+        </p:nvSpPr>
+        <p:spPr/>
+      </p:sp>
+    </p:spTree>
+  </p:cSld>
+  <p:clrMapOvr>
+    <a:masterClrMapping/>
+  </p:clrMapOvr>
+</p:notes>
+</file>
+
+<file path=ppt/notesSlides/notesSlide60.xml><?xml version="1.0" encoding="utf-8"?>
+<p:notes xmlns:a="http://schemas.openxmlformats.org/drawingml/2006/main" xmlns:p="http://schemas.openxmlformats.org/presentationml/2006/main" xmlns:r="http://schemas.openxmlformats.org/officeDocument/2006/relationships">
+  <p:cSld>
+    <p:spTree>
+      <p:nvGrpSpPr>
+        <p:cNvPr id="1" name=""/>
+        <p:cNvGrpSpPr/>
+        <p:nvPr/>
+      </p:nvGrpSpPr>
+      <p:grpSpPr>
+        <a:xfrm>
+          <a:off x="0" y="0"/>
+          <a:ext cx="0" cy="0"/>
+          <a:chOff x="0" y="0"/>
+          <a:chExt cx="0" cy="0"/>
+        </a:xfrm>
+      </p:grpSpPr>
+      <p:sp>
+        <p:nvSpPr>
+          <p:cNvPr id="2" name="Slide Image Placeholder 1"/>
+          <p:cNvSpPr>
+            <a:spLocks noGrp="1"/>
+          </p:cNvSpPr>
+          <p:nvPr>
+            <p:ph type="sldImg" idx="2"/>
+          </p:nvPr>
+        </p:nvSpPr>
+        <p:spPr/>
+      </p:sp>
+      <p:sp>
+        <p:nvSpPr>
+          <p:cNvPr id="3" name="Notes Placeholder 2"/>
+          <p:cNvSpPr>
+            <a:spLocks noGrp="1"/>
+          </p:cNvSpPr>
+          <p:nvPr>
+            <p:ph type="body" idx="3" sz="quarter"/>
+          </p:nvPr>
+        </p:nvSpPr>
+        <p:spPr/>
+        <p:txBody>
+          <a:bodyPr/>
+          <a:lstStyle/>
+          <a:p>
+            <a:r>
+              <a:t>Glosario (conceptos cortos para la docente):</a:t>
+            </a:r>
+          </a:p>
+          <a:p>
+            <a:r>
+              <a:t>• IL2CPP: backend que compila el C# a código nativo; es el único que habilita ARM64.</a:t>
+            </a:r>
+          </a:p>
+          <a:p>
+            <a:r>
+              <a:t>• Package Name: identificador único de la app (com.empresa.juego).</a:t>
+            </a:r>
+          </a:p>
+          <a:p>
+            <a:r>
+              <a:t>Pasos: arriba, Company Name y Product Name (el nombre que se ve en el teléfono); en la pestaña de Android (ícono del robot) &gt; Other Settings: Scripting Backend = IL2CPP, tildar ARM64, Minimum API Level = Android 7.1 (API 25). El Package Name se arma con Company y Product mientras "Override Default Package Name" esté destildado.</a:t>
+            </a:r>
+          </a:p>
+          <a:p>
+            <a:r>
+              <a:t>Active Input Handling = Both: Unity 6.3 lo declara no soportado en Android; Asteroides lo mantiene por el menú (StandaloneInputModule) y al compilar aparece un aviso que se puede ignorar.</a:t>
+            </a:r>
+          </a:p>
+          <a:p>
+            <a:r>
+              <a:t>Comprobación automática: los tests de AndroidBuildConfigTests (A4.8) verifican IL2CPP, ARM64, API mínima y que la build sea .apk.</a:t>
+            </a:r>
+          </a:p>
+        </p:txBody>
+      </p:sp>
+      <p:sp>
+        <p:nvSpPr>
+          <p:cNvPr id="4" name="Slide Number Placeholder 3"/>
+          <p:cNvSpPr>
+            <a:spLocks noGrp="1"/>
+          </p:cNvSpPr>
+          <p:nvPr>
+            <p:ph type="sldNum" idx="5" sz="quarter"/>
+          </p:nvPr>
+        </p:nvSpPr>
+        <p:spPr/>
+      </p:sp>
+    </p:spTree>
+  </p:cSld>
+  <p:clrMapOvr>
+    <a:masterClrMapping/>
+  </p:clrMapOvr>
+</p:notes>
+</file>
+
+<file path=ppt/notesSlides/notesSlide61.xml><?xml version="1.0" encoding="utf-8"?>
+<p:notes xmlns:a="http://schemas.openxmlformats.org/drawingml/2006/main" xmlns:p="http://schemas.openxmlformats.org/presentationml/2006/main" xmlns:r="http://schemas.openxmlformats.org/officeDocument/2006/relationships">
+  <p:cSld>
+    <p:spTree>
+      <p:nvGrpSpPr>
+        <p:cNvPr id="1" name=""/>
+        <p:cNvGrpSpPr/>
+        <p:nvPr/>
+      </p:nvGrpSpPr>
+      <p:grpSpPr>
+        <a:xfrm>
+          <a:off x="0" y="0"/>
+          <a:ext cx="0" cy="0"/>
+          <a:chOff x="0" y="0"/>
+          <a:chExt cx="0" cy="0"/>
+        </a:xfrm>
+      </p:grpSpPr>
+      <p:sp>
+        <p:nvSpPr>
+          <p:cNvPr id="2" name="Slide Image Placeholder 1"/>
+          <p:cNvSpPr>
+            <a:spLocks noGrp="1"/>
+          </p:cNvSpPr>
+          <p:nvPr>
+            <p:ph type="sldImg" idx="2"/>
+          </p:nvPr>
+        </p:nvSpPr>
+        <p:spPr/>
+      </p:sp>
+      <p:sp>
+        <p:nvSpPr>
+          <p:cNvPr id="3" name="Notes Placeholder 2"/>
+          <p:cNvSpPr>
+            <a:spLocks noGrp="1"/>
+          </p:cNvSpPr>
+          <p:nvPr>
+            <p:ph type="body" idx="3" sz="quarter"/>
+          </p:nvPr>
+        </p:nvSpPr>
+        <p:spPr/>
+        <p:txBody>
+          <a:bodyPr/>
+          <a:lstStyle/>
+          <a:p>
+            <a:r>
+              <a:t>Glosario (conceptos cortos para la docente):</a:t>
+            </a:r>
+          </a:p>
+          <a:p>
+            <a:r>
+              <a:t>• Default Orientation: orientación con la que arranca el juego (fija o Auto Rotation).</a:t>
+            </a:r>
+          </a:p>
+          <a:p>
+            <a:r>
+              <a:t>• Render outside safe area: permite dibujar debajo de la muesca y las barras.</a:t>
+            </a:r>
+          </a:p>
+          <a:p>
+            <a:r>
+              <a:t>Así viene el proyecto: Default Orientation = Auto Rotation con las cuatro orientaciones permitidas, Hide Navigation Bar y Render outside safe area tildados.</a:t>
+            </a:r>
+          </a:p>
+          <a:p>
+            <a:r>
+              <a:t>Qué decidir: la orientación sale del esquema de control de A4.7. Si el juego es horizontal, dejar Landscape Left o Landscape Right (o Auto Rotation solo con esas dos). Recordar el hallazgo de A4.2: en vertical, la mayoría de los asteroides nace fuera de pantalla.</a:t>
+            </a:r>
+          </a:p>
+          <a:p>
+            <a:r>
+              <a:t>Render outside safe area: con target API 35 o superior, Android 15 dibuja de borde a borde de todos modos; por eso la UI esencial tiene que leer Screen.safeArea en lugar de confiar en esta casilla.</a:t>
+            </a:r>
+          </a:p>
+          <a:p>
+            <a:r>
+              <a:t>Ícono: en la sección Icon (o Default Icon, arriba) asignar una textura del juego. Cuidado con asignar sin querer otra textura desde el selector (en una prueba quedó un cuadro negro): si el ícono se ve negro en el teléfono, revisar este campo.</a:t>
+            </a:r>
+          </a:p>
+        </p:txBody>
+      </p:sp>
+      <p:sp>
+        <p:nvSpPr>
+          <p:cNvPr id="4" name="Slide Number Placeholder 3"/>
+          <p:cNvSpPr>
+            <a:spLocks noGrp="1"/>
+          </p:cNvSpPr>
+          <p:nvPr>
+            <p:ph type="sldNum" idx="5" sz="quarter"/>
+          </p:nvPr>
+        </p:nvSpPr>
+        <p:spPr/>
+      </p:sp>
+    </p:spTree>
+  </p:cSld>
+  <p:clrMapOvr>
+    <a:masterClrMapping/>
+  </p:clrMapOvr>
+</p:notes>
+</file>
+
+<file path=ppt/notesSlides/notesSlide62.xml><?xml version="1.0" encoding="utf-8"?>
+<p:notes xmlns:a="http://schemas.openxmlformats.org/drawingml/2006/main" xmlns:p="http://schemas.openxmlformats.org/presentationml/2006/main" xmlns:r="http://schemas.openxmlformats.org/officeDocument/2006/relationships">
+  <p:cSld>
+    <p:spTree>
+      <p:nvGrpSpPr>
+        <p:cNvPr id="1" name=""/>
+        <p:cNvGrpSpPr/>
+        <p:nvPr/>
+      </p:nvGrpSpPr>
+      <p:grpSpPr>
+        <a:xfrm>
+          <a:off x="0" y="0"/>
+          <a:ext cx="0" cy="0"/>
+          <a:chOff x="0" y="0"/>
+          <a:chExt cx="0" cy="0"/>
+        </a:xfrm>
+      </p:grpSpPr>
+      <p:sp>
+        <p:nvSpPr>
+          <p:cNvPr id="2" name="Slide Image Placeholder 1"/>
+          <p:cNvSpPr>
+            <a:spLocks noGrp="1"/>
+          </p:cNvSpPr>
+          <p:nvPr>
+            <p:ph type="sldImg" idx="2"/>
+          </p:nvPr>
+        </p:nvSpPr>
+        <p:spPr/>
+      </p:sp>
+      <p:sp>
+        <p:nvSpPr>
+          <p:cNvPr id="3" name="Notes Placeholder 2"/>
+          <p:cNvSpPr>
+            <a:spLocks noGrp="1"/>
+          </p:cNvSpPr>
+          <p:nvPr>
+            <p:ph type="body" idx="3" sz="quarter"/>
+          </p:nvPr>
+        </p:nvSpPr>
+        <p:spPr/>
+        <p:txBody>
+          <a:bodyPr/>
+          <a:lstStyle/>
+          <a:p>
+            <a:r>
+              <a:t>Glosario (conceptos cortos para la docente):</a:t>
+            </a:r>
+          </a:p>
+          <a:p>
+            <a:r>
+              <a:t>• Firma de depuración: firma automática de Unity para probar; no sirve para publicar en Google Play.</a:t>
+            </a:r>
+          </a:p>
+          <a:p>
+            <a:r>
+              <a:t>Pasos: botón Build (no Build And Run, que exige un teléfono conectado); carpeta Builds/ dentro del proyecto y fuera de Assets; nombre AsteroideTest.apk. Pasar el archivo al teléfono (cable, Drive o mensajería), abrirlo y aceptar "Instalar apps de fuentes desconocidas" para esa app. Con el teléfono conectado: adb install -r Builds/AsteroideTest.apk.</a:t>
+            </a:r>
+          </a:p>
+          <a:p>
+            <a:r>
+              <a:t>Alternativa desde código: Build &gt; Android APK (Assets/Editor/BuildAndroid.cs), también en batchmode con -executeMethod BuildAndroid.Build.</a:t>
+            </a:r>
+          </a:p>
+          <a:p>
+            <a:r>
+              <a:t>Tiempo de referencia: Mono + ARMv7, 42 s y 20 MB en la PC de la docente (2026-10-12). Con IL2CPP la primera build tarda bastante más (no medido todavía).</a:t>
+            </a:r>
+          </a:p>
+        </p:txBody>
+      </p:sp>
+      <p:sp>
+        <p:nvSpPr>
+          <p:cNvPr id="4" name="Slide Number Placeholder 3"/>
+          <p:cNvSpPr>
+            <a:spLocks noGrp="1"/>
+          </p:cNvSpPr>
+          <p:nvPr>
+            <p:ph type="sldNum" idx="5" sz="quarter"/>
+          </p:nvPr>
+        </p:nvSpPr>
+        <p:spPr/>
+      </p:sp>
+    </p:spTree>
+  </p:cSld>
+  <p:clrMapOvr>
+    <a:masterClrMapping/>
+  </p:clrMapOvr>
+</p:notes>
+</file>
+
+<file path=ppt/notesSlides/notesSlide63.xml><?xml version="1.0" encoding="utf-8"?>
+<p:notes xmlns:a="http://schemas.openxmlformats.org/drawingml/2006/main" xmlns:p="http://schemas.openxmlformats.org/presentationml/2006/main" xmlns:r="http://schemas.openxmlformats.org/officeDocument/2006/relationships">
+  <p:cSld>
+    <p:spTree>
+      <p:nvGrpSpPr>
+        <p:cNvPr id="1" name=""/>
+        <p:cNvGrpSpPr/>
+        <p:nvPr/>
+      </p:nvGrpSpPr>
+      <p:grpSpPr>
+        <a:xfrm>
+          <a:off x="0" y="0"/>
+          <a:ext cx="0" cy="0"/>
+          <a:chOff x="0" y="0"/>
+          <a:chExt cx="0" cy="0"/>
+        </a:xfrm>
+      </p:grpSpPr>
+      <p:sp>
+        <p:nvSpPr>
+          <p:cNvPr id="2" name="Slide Image Placeholder 1"/>
+          <p:cNvSpPr>
+            <a:spLocks noGrp="1"/>
+          </p:cNvSpPr>
+          <p:nvPr>
+            <p:ph type="sldImg" idx="2"/>
+          </p:nvPr>
+        </p:nvSpPr>
+        <p:spPr/>
+      </p:sp>
+      <p:sp>
+        <p:nvSpPr>
+          <p:cNvPr id="3" name="Notes Placeholder 2"/>
+          <p:cNvSpPr>
+            <a:spLocks noGrp="1"/>
+          </p:cNvSpPr>
+          <p:nvPr>
+            <p:ph type="body" idx="3" sz="quarter"/>
+          </p:nvPr>
+        </p:nvSpPr>
+        <p:spPr/>
+        <p:txBody>
+          <a:bodyPr/>
+          <a:lstStyle/>
+          <a:p>
+            <a:r>
+              <a:t>Glosario (conceptos cortos para la docente):</a:t>
+            </a:r>
+          </a:p>
+          <a:p>
+            <a:r>
+              <a:t>• Logcat: registro de mensajes del sistema Android; con -s Unity se filtran los del juego.</a:t>
+            </a:r>
+          </a:p>
+          <a:p>
+            <a:r>
+              <a:t>Detalle: el primer cartel es un aviso (deja seguir); el segundo frena Build and Run, pero no Build. "No se instala" en teléfonos que solo aceptan 64 bits: primera sospecha, falta ARM64 (documentado por Android; en el curso todavía no se vio).</a:t>
+            </a:r>
+          </a:p>
+          <a:p>
+            <a:r>
+              <a:t>Logs: con el teléfono conectado, adb logcat -s Unity muestra los mensajes de Debug.Log y los errores del juego. El paquete Android Logcat de Unity es una alternativa con ventana, pero instalarlo cambia el proyecto: no se usa sin autorización.</a:t>
             </a:r>
           </a:p>
         </p:txBody>
@@ -9489,7 +10338,7 @@
                 </a:solidFill>
                 <a:latin typeface="Calibri"/>
               </a:rPr>
-              <a:t>Unidad IV · Clase 1 · final (dada hasta la slide 15) · 1/54</a:t>
+              <a:t>Unidad IV · Clase 1 · final (dada hasta la slide 15) · 1/63</a:t>
             </a:r>
           </a:p>
         </p:txBody>
@@ -9770,7 +10619,7 @@
                 </a:solidFill>
                 <a:latin typeface="Calibri"/>
               </a:rPr>
-              <a:t>10/54</a:t>
+              <a:t>10/63</a:t>
             </a:r>
           </a:p>
         </p:txBody>
@@ -11801,7 +12650,7 @@
                 </a:solidFill>
                 <a:latin typeface="Calibri"/>
               </a:rPr>
-              <a:t>11/54</a:t>
+              <a:t>11/63</a:t>
             </a:r>
           </a:p>
         </p:txBody>
@@ -12830,7 +13679,7 @@
                 </a:solidFill>
                 <a:latin typeface="Calibri"/>
               </a:rPr>
-              <a:t>12/54</a:t>
+              <a:t>12/63</a:t>
             </a:r>
           </a:p>
         </p:txBody>
@@ -13252,7 +14101,7 @@
                 </a:solidFill>
                 <a:latin typeface="Calibri"/>
               </a:rPr>
-              <a:t>13/54</a:t>
+              <a:t>13/63</a:t>
             </a:r>
           </a:p>
         </p:txBody>
@@ -14094,7 +14943,7 @@
                 </a:solidFill>
                 <a:latin typeface="Calibri"/>
               </a:rPr>
-              <a:t>14/54</a:t>
+              <a:t>14/63</a:t>
             </a:r>
           </a:p>
         </p:txBody>
@@ -14541,7 +15390,7 @@
                 </a:solidFill>
                 <a:latin typeface="Calibri"/>
               </a:rPr>
-              <a:t>15/54</a:t>
+              <a:t>15/63</a:t>
             </a:r>
           </a:p>
         </p:txBody>
@@ -15486,7 +16335,7 @@
                 </a:solidFill>
                 <a:latin typeface="Calibri"/>
               </a:rPr>
-              <a:t>Unidad IV · Clase 2 · final · 16/54</a:t>
+              <a:t>Unidad IV · Clase 2 · final · 16/63</a:t>
             </a:r>
           </a:p>
         </p:txBody>
@@ -15767,7 +16616,7 @@
                 </a:solidFill>
                 <a:latin typeface="Calibri"/>
               </a:rPr>
-              <a:t>17/54</a:t>
+              <a:t>17/63</a:t>
             </a:r>
           </a:p>
         </p:txBody>
@@ -16252,7 +17101,7 @@
                 </a:solidFill>
                 <a:latin typeface="Calibri"/>
               </a:rPr>
-              <a:t>18/54</a:t>
+              <a:t>18/63</a:t>
             </a:r>
           </a:p>
         </p:txBody>
@@ -16300,16 +17149,80 @@
           </a:p>
         </p:txBody>
       </p:sp>
-      <p:sp>
-        <p:nvSpPr>
-          <p:cNvPr id="9" name="TextBox 8"/>
+      <p:pic>
+        <p:nvPicPr>
+          <p:cNvPr id="9" name="Picture 8" descr="u4-simulator-selector.png"/>
+          <p:cNvPicPr>
+            <a:picLocks noChangeAspect="1"/>
+          </p:cNvPicPr>
+          <p:nvPr/>
+        </p:nvPicPr>
+        <p:blipFill>
+          <a:blip r:embed="rId2"/>
+          <a:stretch>
+            <a:fillRect/>
+          </a:stretch>
+        </p:blipFill>
+        <p:spPr>
+          <a:xfrm>
+            <a:off x="6453419" y="1234440"/>
+            <a:ext cx="3521271" cy="4389120"/>
+          </a:xfrm>
+          <a:prstGeom prst="rect">
+            <a:avLst/>
+          </a:prstGeom>
+          <a:ln w="12700">
+            <a:solidFill>
+              <a:srgbClr val="E5E7EB"/>
+            </a:solidFill>
+          </a:ln>
+        </p:spPr>
+      </p:pic>
+      <p:sp>
+        <p:nvSpPr>
+          <p:cNvPr id="10" name="TextBox 9"/>
           <p:cNvSpPr txBox="1"/>
           <p:nvPr/>
         </p:nvSpPr>
         <p:spPr>
           <a:xfrm>
+            <a:off x="4739335" y="5623560"/>
+            <a:ext cx="6949440" cy="365760"/>
+          </a:xfrm>
+          <a:prstGeom prst="rect">
+            <a:avLst/>
+          </a:prstGeom>
+          <a:noFill/>
+        </p:spPr>
+        <p:txBody>
+          <a:bodyPr wrap="square" anchor="ctr" lIns="0" rIns="0" tIns="0" bIns="0">
+            <a:spAutoFit/>
+          </a:bodyPr>
+          <a:lstStyle/>
+          <a:p>
+            <a:pPr algn="ctr"/>
+            <a:r>
+              <a:rPr sz="1200" b="0" i="1">
+                <a:solidFill>
+                  <a:srgbClr val="6B7280"/>
+                </a:solidFill>
+                <a:latin typeface="Calibri"/>
+              </a:rPr>
+              <a:t>Pestaña Game: Game → Simulator, y la ventana Simulator con un teléfono</a:t>
+            </a:r>
+          </a:p>
+        </p:txBody>
+      </p:sp>
+      <p:sp>
+        <p:nvSpPr>
+          <p:cNvPr id="11" name="TextBox 10"/>
+          <p:cNvSpPr txBox="1"/>
+          <p:nvPr/>
+        </p:nvSpPr>
+        <p:spPr>
+          <a:xfrm>
             <a:off x="502920" y="1234440"/>
-            <a:ext cx="11185855" cy="4754880"/>
+            <a:ext cx="3962095" cy="4754880"/>
           </a:xfrm>
           <a:prstGeom prst="rect">
             <a:avLst/>
@@ -16699,7 +17612,7 @@
                 </a:solidFill>
                 <a:latin typeface="Calibri"/>
               </a:rPr>
-              <a:t>19/54</a:t>
+              <a:t>19/63</a:t>
             </a:r>
           </a:p>
         </p:txBody>
@@ -17559,7 +18472,7 @@
                 </a:solidFill>
                 <a:latin typeface="Calibri"/>
               </a:rPr>
-              <a:t>2/54</a:t>
+              <a:t>2/63</a:t>
             </a:r>
           </a:p>
         </p:txBody>
@@ -18069,7 +18982,7 @@
                 </a:solidFill>
                 <a:latin typeface="Calibri"/>
               </a:rPr>
-              <a:t>20/54</a:t>
+              <a:t>20/63</a:t>
             </a:r>
           </a:p>
         </p:txBody>
@@ -19070,7 +19983,7 @@
                 </a:solidFill>
                 <a:latin typeface="Calibri"/>
               </a:rPr>
-              <a:t>21/54</a:t>
+              <a:t>21/63</a:t>
             </a:r>
           </a:p>
         </p:txBody>
@@ -19648,7 +20561,7 @@
                 </a:solidFill>
                 <a:latin typeface="Calibri"/>
               </a:rPr>
-              <a:t>22/54</a:t>
+              <a:t>22/63</a:t>
             </a:r>
           </a:p>
         </p:txBody>
@@ -20276,7 +21189,7 @@
                 </a:solidFill>
                 <a:latin typeface="Calibri"/>
               </a:rPr>
-              <a:t>23/54</a:t>
+              <a:t>23/63</a:t>
             </a:r>
           </a:p>
         </p:txBody>
@@ -21002,7 +21915,7 @@
                 </a:solidFill>
                 <a:latin typeface="Calibri"/>
               </a:rPr>
-              <a:t>24/54</a:t>
+              <a:t>24/63</a:t>
             </a:r>
           </a:p>
         </p:txBody>
@@ -21555,7 +22468,7 @@
                 </a:solidFill>
                 <a:latin typeface="Calibri"/>
               </a:rPr>
-              <a:t>25/54</a:t>
+              <a:t>25/63</a:t>
             </a:r>
           </a:p>
         </p:txBody>
@@ -22354,7 +23267,7 @@
                 </a:solidFill>
                 <a:latin typeface="Calibri"/>
               </a:rPr>
-              <a:t>26/54</a:t>
+              <a:t>26/63</a:t>
             </a:r>
           </a:p>
         </p:txBody>
@@ -23569,7 +24482,7 @@
                 </a:solidFill>
                 <a:latin typeface="Calibri"/>
               </a:rPr>
-              <a:t>27/54</a:t>
+              <a:t>27/63</a:t>
             </a:r>
           </a:p>
         </p:txBody>
@@ -24278,7 +25191,7 @@
                 </a:solidFill>
                 <a:latin typeface="Calibri"/>
               </a:rPr>
-              <a:t>28/54</a:t>
+              <a:t>28/63</a:t>
             </a:r>
           </a:p>
         </p:txBody>
@@ -25092,7 +26005,7 @@
                 </a:solidFill>
                 <a:latin typeface="Calibri"/>
               </a:rPr>
-              <a:t>29/54</a:t>
+              <a:t>29/63</a:t>
             </a:r>
           </a:p>
         </p:txBody>
@@ -25577,7 +26490,7 @@
                 </a:solidFill>
                 <a:latin typeface="Calibri"/>
               </a:rPr>
-              <a:t>3/54</a:t>
+              <a:t>3/63</a:t>
             </a:r>
           </a:p>
         </p:txBody>
@@ -26842,7 +27755,7 @@
                 </a:solidFill>
                 <a:latin typeface="Calibri"/>
               </a:rPr>
-              <a:t>30/54</a:t>
+              <a:t>30/63</a:t>
             </a:r>
           </a:p>
         </p:txBody>
@@ -26906,8 +27819,8 @@
         </p:blipFill>
         <p:spPr>
           <a:xfrm>
-            <a:off x="4739335" y="1993790"/>
-            <a:ext cx="6949440" cy="2870420"/>
+            <a:off x="5640500" y="1234440"/>
+            <a:ext cx="5147109" cy="2125980"/>
           </a:xfrm>
           <a:prstGeom prst="rect">
             <a:avLst/>
@@ -26919,9 +27832,38 @@
           </a:ln>
         </p:spPr>
       </p:pic>
-      <p:sp>
-        <p:nvSpPr>
-          <p:cNvPr id="10" name="TextBox 9"/>
+      <p:pic>
+        <p:nvPicPr>
+          <p:cNvPr id="10" name="Picture 9" descr="u4-switch-platform.png"/>
+          <p:cNvPicPr>
+            <a:picLocks noChangeAspect="1"/>
+          </p:cNvPicPr>
+          <p:nvPr/>
+        </p:nvPicPr>
+        <p:blipFill>
+          <a:blip r:embed="rId3"/>
+          <a:stretch>
+            <a:fillRect/>
+          </a:stretch>
+        </p:blipFill>
+        <p:spPr>
+          <a:xfrm>
+            <a:off x="5986398" y="3497580"/>
+            <a:ext cx="4455314" cy="2125980"/>
+          </a:xfrm>
+          <a:prstGeom prst="rect">
+            <a:avLst/>
+          </a:prstGeom>
+          <a:ln w="12700">
+            <a:solidFill>
+              <a:srgbClr val="E5E7EB"/>
+            </a:solidFill>
+          </a:ln>
+        </p:spPr>
+      </p:pic>
+      <p:sp>
+        <p:nvSpPr>
+          <p:cNvPr id="11" name="TextBox 10"/>
           <p:cNvSpPr txBox="1"/>
           <p:nvPr/>
         </p:nvSpPr>
@@ -26949,14 +27891,14 @@
                 </a:solidFill>
                 <a:latin typeface="Calibri"/>
               </a:rPr>
-              <a:t>Build Profiles en Unity 6000.3.11f1: perfil Android activo</a:t>
-            </a:r>
-          </a:p>
-        </p:txBody>
-      </p:sp>
-      <p:sp>
-        <p:nvSpPr>
-          <p:cNvPr id="11" name="TextBox 10"/>
+              <a:t>Build Profiles: perfil Android activo y el botón Switch Platform</a:t>
+            </a:r>
+          </a:p>
+        </p:txBody>
+      </p:sp>
+      <p:sp>
+        <p:nvSpPr>
+          <p:cNvPr id="12" name="TextBox 11"/>
           <p:cNvSpPr txBox="1"/>
           <p:nvPr/>
         </p:nvSpPr>
@@ -26982,13 +27924,13 @@
               </a:spcAft>
             </a:pPr>
             <a:r>
-              <a:rPr sz="1600" b="1" i="0">
+              <a:rPr sz="2200" b="1" i="0">
                 <a:solidFill>
                   <a:srgbClr val="0D9488"/>
                 </a:solidFill>
                 <a:latin typeface="Calibri"/>
               </a:rPr>
-              <a:t>■  </a:t>
+              <a:t>1  </a:t>
             </a:r>
             <a:r>
               <a:rPr sz="2200" b="0" i="0">
@@ -26997,7 +27939,7 @@
                 </a:solidFill>
                 <a:latin typeface="Calibri"/>
               </a:rPr>
-              <a:t>Build Profiles → Android</a:t>
+              <a:t>File &gt; Build Profiles</a:t>
             </a:r>
           </a:p>
           <a:p>
@@ -27007,13 +27949,13 @@
               </a:spcAft>
             </a:pPr>
             <a:r>
-              <a:rPr sz="1600" b="1" i="0">
+              <a:rPr sz="2200" b="1" i="0">
                 <a:solidFill>
                   <a:srgbClr val="0D9488"/>
                 </a:solidFill>
                 <a:latin typeface="Calibri"/>
               </a:rPr>
-              <a:t>■  </a:t>
+              <a:t>2  </a:t>
             </a:r>
             <a:r>
               <a:rPr sz="2200" b="0" i="0">
@@ -27022,7 +27964,7 @@
                 </a:solidFill>
                 <a:latin typeface="Calibri"/>
               </a:rPr>
-              <a:t>Player Settings: identidad y 64 bits</a:t>
+              <a:t>Android → Switch Platform</a:t>
             </a:r>
           </a:p>
           <a:p>
@@ -27032,13 +27974,13 @@
               </a:spcAft>
             </a:pPr>
             <a:r>
-              <a:rPr sz="1600" b="1" i="0">
+              <a:rPr sz="2200" b="1" i="0">
                 <a:solidFill>
                   <a:srgbClr val="0D9488"/>
                 </a:solidFill>
                 <a:latin typeface="Calibri"/>
               </a:rPr>
-              <a:t>■  </a:t>
+              <a:t>3  </a:t>
             </a:r>
             <a:r>
               <a:rPr sz="2200" b="0" i="0">
@@ -27047,7 +27989,7 @@
                 </a:solidFill>
                 <a:latin typeface="Calibri"/>
               </a:rPr>
-              <a:t>Build genera un .apk</a:t>
+              <a:t>Botón Player Settings</a:t>
             </a:r>
           </a:p>
           <a:p>
@@ -27057,13 +27999,13 @@
               </a:spcAft>
             </a:pPr>
             <a:r>
-              <a:rPr sz="1600" b="1" i="0">
+              <a:rPr sz="2200" b="1" i="0">
                 <a:solidFill>
                   <a:srgbClr val="0D9488"/>
                 </a:solidFill>
                 <a:latin typeface="Calibri"/>
               </a:rPr>
-              <a:t>■  </a:t>
+              <a:t>4  </a:t>
             </a:r>
             <a:r>
               <a:rPr sz="2200" b="0" i="0">
@@ -27072,7 +28014,7 @@
                 </a:solidFill>
                 <a:latin typeface="Calibri"/>
               </a:rPr>
-              <a:t>Tarea: su primer APK en casa</a:t>
+              <a:t>Tarea: su primer APK</a:t>
             </a:r>
           </a:p>
         </p:txBody>
@@ -27353,7 +28295,7 @@
                 </a:solidFill>
                 <a:latin typeface="Calibri"/>
               </a:rPr>
-              <a:t>31/54</a:t>
+              <a:t>31/63</a:t>
             </a:r>
           </a:p>
         </p:txBody>
@@ -27401,16 +28343,80 @@
           </a:p>
         </p:txBody>
       </p:sp>
-      <p:sp>
-        <p:nvSpPr>
-          <p:cNvPr id="9" name="TextBox 8"/>
+      <p:pic>
+        <p:nvPicPr>
+          <p:cNvPr id="9" name="Picture 8" descr="u4-external-tools.png"/>
+          <p:cNvPicPr>
+            <a:picLocks noChangeAspect="1"/>
+          </p:cNvPicPr>
+          <p:nvPr/>
+        </p:nvPicPr>
+        <p:blipFill>
+          <a:blip r:embed="rId2"/>
+          <a:stretch>
+            <a:fillRect/>
+          </a:stretch>
+        </p:blipFill>
+        <p:spPr>
+          <a:xfrm>
+            <a:off x="4739335" y="2473452"/>
+            <a:ext cx="6949439" cy="1911095"/>
+          </a:xfrm>
+          <a:prstGeom prst="rect">
+            <a:avLst/>
+          </a:prstGeom>
+          <a:ln w="12700">
+            <a:solidFill>
+              <a:srgbClr val="E5E7EB"/>
+            </a:solidFill>
+          </a:ln>
+        </p:spPr>
+      </p:pic>
+      <p:sp>
+        <p:nvSpPr>
+          <p:cNvPr id="10" name="TextBox 9"/>
           <p:cNvSpPr txBox="1"/>
           <p:nvPr/>
         </p:nvSpPr>
         <p:spPr>
           <a:xfrm>
+            <a:off x="4739335" y="5623560"/>
+            <a:ext cx="6949440" cy="365760"/>
+          </a:xfrm>
+          <a:prstGeom prst="rect">
+            <a:avLst/>
+          </a:prstGeom>
+          <a:noFill/>
+        </p:spPr>
+        <p:txBody>
+          <a:bodyPr wrap="square" anchor="ctr" lIns="0" rIns="0" tIns="0" bIns="0">
+            <a:spAutoFit/>
+          </a:bodyPr>
+          <a:lstStyle/>
+          <a:p>
+            <a:pPr algn="ctr"/>
+            <a:r>
+              <a:rPr sz="1200" b="0" i="1">
+                <a:solidFill>
+                  <a:srgbClr val="6B7280"/>
+                </a:solidFill>
+                <a:latin typeface="Calibri"/>
+              </a:rPr>
+              <a:t>Edit &gt; Preferences &gt; External Tools &gt; Android: las 4 casillas tildadas</a:t>
+            </a:r>
+          </a:p>
+        </p:txBody>
+      </p:sp>
+      <p:sp>
+        <p:nvSpPr>
+          <p:cNvPr id="11" name="TextBox 10"/>
+          <p:cNvSpPr txBox="1"/>
+          <p:nvPr/>
+        </p:nvSpPr>
+        <p:spPr>
+          <a:xfrm>
             <a:off x="502920" y="1234440"/>
-            <a:ext cx="11185855" cy="4754880"/>
+            <a:ext cx="3962095" cy="4754880"/>
           </a:xfrm>
           <a:prstGeom prst="rect">
             <a:avLst/>
@@ -27700,7 +28706,7 @@
                 </a:solidFill>
                 <a:latin typeface="Calibri"/>
               </a:rPr>
-              <a:t>Unidad IV · Clase 3 · final · 32/54</a:t>
+              <a:t>Unidad IV · Clase 3 · final · 32/63</a:t>
             </a:r>
           </a:p>
         </p:txBody>
@@ -27981,7 +28987,7 @@
                 </a:solidFill>
                 <a:latin typeface="Calibri"/>
               </a:rPr>
-              <a:t>33/54</a:t>
+              <a:t>33/63</a:t>
             </a:r>
           </a:p>
         </p:txBody>
@@ -28466,7 +29472,7 @@
                 </a:solidFill>
                 <a:latin typeface="Calibri"/>
               </a:rPr>
-              <a:t>34/54</a:t>
+              <a:t>34/63</a:t>
             </a:r>
           </a:p>
         </p:txBody>
@@ -28917,7 +29923,7 @@
                 </a:solidFill>
                 <a:latin typeface="Calibri"/>
               </a:rPr>
-              <a:t>35/54</a:t>
+              <a:t>35/63</a:t>
             </a:r>
           </a:p>
         </p:txBody>
@@ -30465,7 +31471,7 @@
                 </a:solidFill>
                 <a:latin typeface="Calibri"/>
               </a:rPr>
-              <a:t>36/54</a:t>
+              <a:t>36/63</a:t>
             </a:r>
           </a:p>
         </p:txBody>
@@ -31043,7 +32049,7 @@
                 </a:solidFill>
                 <a:latin typeface="Calibri"/>
               </a:rPr>
-              <a:t>37/54</a:t>
+              <a:t>37/63</a:t>
             </a:r>
           </a:p>
         </p:txBody>
@@ -31926,7 +32932,7 @@
                 </a:solidFill>
                 <a:latin typeface="Calibri"/>
               </a:rPr>
-              <a:t>38/54</a:t>
+              <a:t>38/63</a:t>
             </a:r>
           </a:p>
         </p:txBody>
@@ -32454,7 +33460,7 @@
                 </a:solidFill>
                 <a:latin typeface="Calibri"/>
               </a:rPr>
-              <a:t>39/54</a:t>
+              <a:t>39/63</a:t>
             </a:r>
           </a:p>
         </p:txBody>
@@ -33208,7 +34214,7 @@
                 </a:solidFill>
                 <a:latin typeface="Calibri"/>
               </a:rPr>
-              <a:t>4/54</a:t>
+              <a:t>4/63</a:t>
             </a:r>
           </a:p>
         </p:txBody>
@@ -33637,7 +34643,7 @@
                 </a:solidFill>
                 <a:latin typeface="Calibri"/>
               </a:rPr>
-              <a:t>40/54</a:t>
+              <a:t>40/63</a:t>
             </a:r>
           </a:p>
         </p:txBody>
@@ -34122,7 +35128,7 @@
                 </a:solidFill>
                 <a:latin typeface="Calibri"/>
               </a:rPr>
-              <a:t>41/54</a:t>
+              <a:t>41/63</a:t>
             </a:r>
           </a:p>
         </p:txBody>
@@ -35194,7 +36200,7 @@
                 </a:solidFill>
                 <a:latin typeface="Calibri"/>
               </a:rPr>
-              <a:t>42/54</a:t>
+              <a:t>42/63</a:t>
             </a:r>
           </a:p>
         </p:txBody>
@@ -36279,7 +37285,7 @@
                 </a:solidFill>
                 <a:latin typeface="Calibri"/>
               </a:rPr>
-              <a:t>43/54</a:t>
+              <a:t>43/63</a:t>
             </a:r>
           </a:p>
         </p:txBody>
@@ -37106,7 +38112,7 @@
                 </a:solidFill>
                 <a:latin typeface="Calibri"/>
               </a:rPr>
-              <a:t>44/54</a:t>
+              <a:t>44/63</a:t>
             </a:r>
           </a:p>
         </p:txBody>
@@ -37591,7 +38597,7 @@
                 </a:solidFill>
                 <a:latin typeface="Calibri"/>
               </a:rPr>
-              <a:t>45/54</a:t>
+              <a:t>45/63</a:t>
             </a:r>
           </a:p>
         </p:txBody>
@@ -38365,7 +39371,7 @@
                 </a:solidFill>
                 <a:latin typeface="Calibri"/>
               </a:rPr>
-              <a:t>46/54</a:t>
+              <a:t>46/63</a:t>
             </a:r>
           </a:p>
         </p:txBody>
@@ -39081,7 +40087,7 @@
                 </a:solidFill>
                 <a:latin typeface="Calibri"/>
               </a:rPr>
-              <a:t>47/54</a:t>
+              <a:t>47/63</a:t>
             </a:r>
           </a:p>
         </p:txBody>
@@ -39591,7 +40597,7 @@
                 </a:solidFill>
                 <a:latin typeface="Calibri"/>
               </a:rPr>
-              <a:t>48/54</a:t>
+              <a:t>48/63</a:t>
             </a:r>
           </a:p>
         </p:txBody>
@@ -40119,7 +41125,7 @@
                 </a:solidFill>
                 <a:latin typeface="Calibri"/>
               </a:rPr>
-              <a:t>49/54</a:t>
+              <a:t>49/63</a:t>
             </a:r>
           </a:p>
         </p:txBody>
@@ -40810,7 +41816,7 @@
                 </a:solidFill>
                 <a:latin typeface="Calibri"/>
               </a:rPr>
-              <a:t>5/54</a:t>
+              <a:t>5/63</a:t>
             </a:r>
           </a:p>
         </p:txBody>
@@ -41607,7 +42613,7 @@
                 </a:solidFill>
                 <a:latin typeface="Calibri"/>
               </a:rPr>
-              <a:t>50/54</a:t>
+              <a:t>50/63</a:t>
             </a:r>
           </a:p>
         </p:txBody>
@@ -42160,7 +43166,7 @@
                 </a:solidFill>
                 <a:latin typeface="Calibri"/>
               </a:rPr>
-              <a:t>51/54</a:t>
+              <a:t>51/63</a:t>
             </a:r>
           </a:p>
         </p:txBody>
@@ -42713,7 +43719,7 @@
                 </a:solidFill>
                 <a:latin typeface="Calibri"/>
               </a:rPr>
-              <a:t>52/54</a:t>
+              <a:t>52/63</a:t>
             </a:r>
           </a:p>
         </p:txBody>
@@ -43310,7 +44316,7 @@
                 </a:solidFill>
                 <a:latin typeface="Calibri"/>
               </a:rPr>
-              <a:t>53/54</a:t>
+              <a:t>53/63</a:t>
             </a:r>
           </a:p>
         </p:txBody>
@@ -43924,7 +44930,7 @@
                 </a:solidFill>
                 <a:latin typeface="Calibri"/>
               </a:rPr>
-              <a:t>54/54</a:t>
+              <a:t>54/63</a:t>
             </a:r>
           </a:p>
         </p:txBody>
@@ -44154,6 +45160,2657 @@
                 <a:latin typeface="Calibri"/>
               </a:rPr>
               <a:t>Consolas: el límite lo pone el fabricante</a:t>
+            </a:r>
+          </a:p>
+        </p:txBody>
+      </p:sp>
+    </p:spTree>
+  </p:cSld>
+  <p:clrMapOvr>
+    <a:masterClrMapping/>
+  </p:clrMapOvr>
+</p:sld>
+</file>
+
+<file path=ppt/slides/slide55.xml><?xml version="1.0" encoding="utf-8"?>
+<p:sld xmlns:a="http://schemas.openxmlformats.org/drawingml/2006/main" xmlns:p="http://schemas.openxmlformats.org/presentationml/2006/main" xmlns:r="http://schemas.openxmlformats.org/officeDocument/2006/relationships">
+  <p:cSld>
+    <p:bg>
+      <p:bgPr>
+        <a:solidFill>
+          <a:srgbClr val="1F2A44"/>
+        </a:solidFill>
+        <a:effectLst/>
+      </p:bgPr>
+    </p:bg>
+    <p:spTree>
+      <p:nvGrpSpPr>
+        <p:cNvPr id="1" name=""/>
+        <p:cNvGrpSpPr/>
+        <p:nvPr/>
+      </p:nvGrpSpPr>
+      <p:grpSpPr/>
+      <p:sp>
+        <p:nvSpPr>
+          <p:cNvPr id="2" name="Rectangle 1"/>
+          <p:cNvSpPr/>
+          <p:nvPr/>
+        </p:nvSpPr>
+        <p:spPr>
+          <a:xfrm>
+            <a:off x="0" y="4754880"/>
+            <a:ext cx="12191695" cy="50800"/>
+          </a:xfrm>
+          <a:prstGeom prst="rect">
+            <a:avLst/>
+          </a:prstGeom>
+          <a:solidFill>
+            <a:srgbClr val="0D9488"/>
+          </a:solidFill>
+          <a:ln>
+            <a:noFill/>
+          </a:ln>
+          <a:effectLst/>
+        </p:spPr>
+        <p:style>
+          <a:lnRef idx="1">
+            <a:schemeClr val="accent1"/>
+          </a:lnRef>
+          <a:fillRef idx="3">
+            <a:schemeClr val="accent1"/>
+          </a:fillRef>
+          <a:effectRef idx="2">
+            <a:schemeClr val="accent1"/>
+          </a:effectRef>
+          <a:fontRef idx="minor">
+            <a:schemeClr val="lt1"/>
+          </a:fontRef>
+        </p:style>
+        <p:txBody>
+          <a:bodyPr rtlCol="0" anchor="ctr"/>
+          <a:lstStyle/>
+          <a:p>
+            <a:pPr algn="ctr"/>
+          </a:p>
+        </p:txBody>
+      </p:sp>
+      <p:sp>
+        <p:nvSpPr>
+          <p:cNvPr id="3" name="TextBox 2"/>
+          <p:cNvSpPr txBox="1"/>
+          <p:nvPr/>
+        </p:nvSpPr>
+        <p:spPr>
+          <a:xfrm>
+            <a:off x="502920" y="1280160"/>
+            <a:ext cx="11185855" cy="3291840"/>
+          </a:xfrm>
+          <a:prstGeom prst="rect">
+            <a:avLst/>
+          </a:prstGeom>
+          <a:noFill/>
+        </p:spPr>
+        <p:txBody>
+          <a:bodyPr wrap="square" anchor="b" lIns="0" rIns="0" tIns="0" bIns="0">
+            <a:spAutoFit/>
+          </a:bodyPr>
+          <a:lstStyle/>
+          <a:p>
+            <a:r>
+              <a:rPr sz="1400" b="1" i="0">
+                <a:solidFill>
+                  <a:srgbClr val="99F6E4"/>
+                </a:solidFill>
+                <a:latin typeface="Calibri"/>
+              </a:rPr>
+              <a:t>UNIDAD IV · ANEXO DE CONSULTA · NO SE EXPONE</a:t>
+            </a:r>
+          </a:p>
+          <a:p>
+            <a:r>
+              <a:rPr sz="4000" b="1" i="0">
+                <a:solidFill>
+                  <a:srgbClr val="FFFFFF"/>
+                </a:solidFill>
+                <a:latin typeface="Calibri"/>
+              </a:rPr>
+              <a:t>Anexo: Android en Unity 6</a:t>
+            </a:r>
+          </a:p>
+          <a:p>
+            <a:pPr>
+              <a:spcBef>
+                <a:spcPts val="600"/>
+              </a:spcBef>
+            </a:pPr>
+            <a:r>
+              <a:rPr sz="2000" b="0" i="0">
+                <a:solidFill>
+                  <a:srgbClr val="CBD5E1"/>
+                </a:solidFill>
+                <a:latin typeface="Calibri"/>
+              </a:rPr>
+              <a:t>Paso a paso con capturas de Unity 6000.3.11f1</a:t>
+            </a:r>
+          </a:p>
+          <a:p>
+            <a:pPr>
+              <a:spcBef>
+                <a:spcPts val="600"/>
+              </a:spcBef>
+            </a:pPr>
+            <a:r>
+              <a:rPr sz="2000" b="0" i="0">
+                <a:solidFill>
+                  <a:srgbClr val="CBD5E1"/>
+                </a:solidFill>
+                <a:latin typeface="Calibri"/>
+              </a:rPr>
+              <a:t>Para la tarea y la práctica en el teléfono</a:t>
+            </a:r>
+          </a:p>
+        </p:txBody>
+      </p:sp>
+      <p:sp>
+        <p:nvSpPr>
+          <p:cNvPr id="4" name="TextBox 3"/>
+          <p:cNvSpPr txBox="1"/>
+          <p:nvPr/>
+        </p:nvSpPr>
+        <p:spPr>
+          <a:xfrm>
+            <a:off x="502920" y="6035040"/>
+            <a:ext cx="11185855" cy="365760"/>
+          </a:xfrm>
+          <a:prstGeom prst="rect">
+            <a:avLst/>
+          </a:prstGeom>
+          <a:noFill/>
+        </p:spPr>
+        <p:txBody>
+          <a:bodyPr wrap="square" anchor="t" lIns="0" rIns="0" tIns="0" bIns="0">
+            <a:spAutoFit/>
+          </a:bodyPr>
+          <a:lstStyle/>
+          <a:p>
+            <a:r>
+              <a:rPr sz="1200" b="0" i="0">
+                <a:solidFill>
+                  <a:srgbClr val="CBD5E1"/>
+                </a:solidFill>
+                <a:latin typeface="Calibri"/>
+              </a:rPr>
+              <a:t>Unidad IV · Anexo de consulta · 55/63</a:t>
+            </a:r>
+          </a:p>
+        </p:txBody>
+      </p:sp>
+    </p:spTree>
+  </p:cSld>
+  <p:clrMapOvr>
+    <a:masterClrMapping/>
+  </p:clrMapOvr>
+</p:sld>
+</file>
+
+<file path=ppt/slides/slide56.xml><?xml version="1.0" encoding="utf-8"?>
+<p:sld xmlns:a="http://schemas.openxmlformats.org/drawingml/2006/main" xmlns:p="http://schemas.openxmlformats.org/presentationml/2006/main" xmlns:r="http://schemas.openxmlformats.org/officeDocument/2006/relationships">
+  <p:cSld>
+    <p:bg>
+      <p:bgPr>
+        <a:solidFill>
+          <a:srgbClr val="FFFFFF"/>
+        </a:solidFill>
+        <a:effectLst/>
+      </p:bgPr>
+    </p:bg>
+    <p:spTree>
+      <p:nvGrpSpPr>
+        <p:cNvPr id="1" name=""/>
+        <p:cNvGrpSpPr/>
+        <p:nvPr/>
+      </p:nvGrpSpPr>
+      <p:grpSpPr/>
+      <p:sp>
+        <p:nvSpPr>
+          <p:cNvPr id="2" name="Rectangle 1"/>
+          <p:cNvSpPr/>
+          <p:nvPr/>
+        </p:nvSpPr>
+        <p:spPr>
+          <a:xfrm>
+            <a:off x="0" y="0"/>
+            <a:ext cx="12191695" cy="960120"/>
+          </a:xfrm>
+          <a:prstGeom prst="rect">
+            <a:avLst/>
+          </a:prstGeom>
+          <a:solidFill>
+            <a:srgbClr val="1F2A44"/>
+          </a:solidFill>
+          <a:ln>
+            <a:noFill/>
+          </a:ln>
+          <a:effectLst/>
+        </p:spPr>
+        <p:style>
+          <a:lnRef idx="1">
+            <a:schemeClr val="accent1"/>
+          </a:lnRef>
+          <a:fillRef idx="3">
+            <a:schemeClr val="accent1"/>
+          </a:fillRef>
+          <a:effectRef idx="2">
+            <a:schemeClr val="accent1"/>
+          </a:effectRef>
+          <a:fontRef idx="minor">
+            <a:schemeClr val="lt1"/>
+          </a:fontRef>
+        </p:style>
+        <p:txBody>
+          <a:bodyPr rtlCol="0" anchor="ctr"/>
+          <a:lstStyle/>
+          <a:p>
+            <a:pPr algn="ctr"/>
+          </a:p>
+        </p:txBody>
+      </p:sp>
+      <p:sp>
+        <p:nvSpPr>
+          <p:cNvPr id="3" name="Rectangle 2"/>
+          <p:cNvSpPr/>
+          <p:nvPr/>
+        </p:nvSpPr>
+        <p:spPr>
+          <a:xfrm>
+            <a:off x="0" y="960120"/>
+            <a:ext cx="12191695" cy="38100"/>
+          </a:xfrm>
+          <a:prstGeom prst="rect">
+            <a:avLst/>
+          </a:prstGeom>
+          <a:solidFill>
+            <a:srgbClr val="0D9488"/>
+          </a:solidFill>
+          <a:ln>
+            <a:noFill/>
+          </a:ln>
+          <a:effectLst/>
+        </p:spPr>
+        <p:style>
+          <a:lnRef idx="1">
+            <a:schemeClr val="accent1"/>
+          </a:lnRef>
+          <a:fillRef idx="3">
+            <a:schemeClr val="accent1"/>
+          </a:fillRef>
+          <a:effectRef idx="2">
+            <a:schemeClr val="accent1"/>
+          </a:effectRef>
+          <a:fontRef idx="minor">
+            <a:schemeClr val="lt1"/>
+          </a:fontRef>
+        </p:style>
+        <p:txBody>
+          <a:bodyPr rtlCol="0" anchor="ctr"/>
+          <a:lstStyle/>
+          <a:p>
+            <a:pPr algn="ctr"/>
+          </a:p>
+        </p:txBody>
+      </p:sp>
+      <p:sp>
+        <p:nvSpPr>
+          <p:cNvPr id="4" name="Oval 3"/>
+          <p:cNvSpPr/>
+          <p:nvPr/>
+        </p:nvSpPr>
+        <p:spPr>
+          <a:xfrm>
+            <a:off x="274320" y="219456"/>
+            <a:ext cx="530352" cy="530352"/>
+          </a:xfrm>
+          <a:prstGeom prst="ellipse">
+            <a:avLst/>
+          </a:prstGeom>
+          <a:solidFill>
+            <a:srgbClr val="0D9488"/>
+          </a:solidFill>
+          <a:ln>
+            <a:noFill/>
+          </a:ln>
+          <a:effectLst/>
+        </p:spPr>
+        <p:style>
+          <a:lnRef idx="1">
+            <a:schemeClr val="accent1"/>
+          </a:lnRef>
+          <a:fillRef idx="3">
+            <a:schemeClr val="accent1"/>
+          </a:fillRef>
+          <a:effectRef idx="2">
+            <a:schemeClr val="accent1"/>
+          </a:effectRef>
+          <a:fontRef idx="minor">
+            <a:schemeClr val="lt1"/>
+          </a:fontRef>
+        </p:style>
+        <p:txBody>
+          <a:bodyPr rtlCol="0" anchor="ctr" lIns="0" rIns="0" tIns="0" bIns="0"/>
+          <a:lstStyle/>
+          <a:p>
+            <a:pPr algn="ctr"/>
+            <a:r>
+              <a:rPr sz="1600" b="1" i="0">
+                <a:solidFill>
+                  <a:srgbClr val="FFFFFF"/>
+                </a:solidFill>
+                <a:latin typeface="Calibri"/>
+              </a:rPr>
+              <a:t>56</a:t>
+            </a:r>
+          </a:p>
+        </p:txBody>
+      </p:sp>
+      <p:sp>
+        <p:nvSpPr>
+          <p:cNvPr id="5" name="TextBox 4"/>
+          <p:cNvSpPr txBox="1"/>
+          <p:nvPr/>
+        </p:nvSpPr>
+        <p:spPr>
+          <a:xfrm>
+            <a:off x="1005840" y="109728"/>
+            <a:ext cx="10728655" cy="777240"/>
+          </a:xfrm>
+          <a:prstGeom prst="rect">
+            <a:avLst/>
+          </a:prstGeom>
+          <a:noFill/>
+        </p:spPr>
+        <p:txBody>
+          <a:bodyPr wrap="square" anchor="ctr" lIns="0" rIns="0" tIns="0" bIns="0">
+            <a:spAutoFit/>
+          </a:bodyPr>
+          <a:lstStyle/>
+          <a:p>
+            <a:r>
+              <a:rPr sz="1100" b="1" i="0">
+                <a:solidFill>
+                  <a:srgbClr val="99F6E4"/>
+                </a:solidFill>
+                <a:latin typeface="Calibri"/>
+              </a:rPr>
+              <a:t>ANEXO · PASO 1 · INSTALAR</a:t>
+            </a:r>
+          </a:p>
+          <a:p>
+            <a:r>
+              <a:rPr sz="2600" b="1" i="0">
+                <a:solidFill>
+                  <a:srgbClr val="FFFFFF"/>
+                </a:solidFill>
+                <a:latin typeface="Calibri"/>
+              </a:rPr>
+              <a:t>Build Support y External Tools</a:t>
+            </a:r>
+          </a:p>
+        </p:txBody>
+      </p:sp>
+      <p:sp>
+        <p:nvSpPr>
+          <p:cNvPr id="6" name="TextBox 5"/>
+          <p:cNvSpPr txBox="1"/>
+          <p:nvPr/>
+        </p:nvSpPr>
+        <p:spPr>
+          <a:xfrm>
+            <a:off x="502920" y="6473952"/>
+            <a:ext cx="11185855" cy="274320"/>
+          </a:xfrm>
+          <a:prstGeom prst="rect">
+            <a:avLst/>
+          </a:prstGeom>
+          <a:noFill/>
+        </p:spPr>
+        <p:txBody>
+          <a:bodyPr wrap="square" anchor="ctr" lIns="0" rIns="0" tIns="0" bIns="0">
+            <a:spAutoFit/>
+          </a:bodyPr>
+          <a:lstStyle/>
+          <a:p>
+            <a:r>
+              <a:rPr sz="1000" b="0" i="0">
+                <a:solidFill>
+                  <a:srgbClr val="6B7280"/>
+                </a:solidFill>
+                <a:latin typeface="Calibri"/>
+              </a:rPr>
+              <a:t>Diseño según Plataformas de Juego · Unidad IV · Anexo · Anexo: Android en Unity 6</a:t>
+            </a:r>
+          </a:p>
+        </p:txBody>
+      </p:sp>
+      <p:sp>
+        <p:nvSpPr>
+          <p:cNvPr id="7" name="TextBox 6"/>
+          <p:cNvSpPr txBox="1"/>
+          <p:nvPr/>
+        </p:nvSpPr>
+        <p:spPr>
+          <a:xfrm>
+            <a:off x="10774375" y="6473952"/>
+            <a:ext cx="914400" cy="274320"/>
+          </a:xfrm>
+          <a:prstGeom prst="rect">
+            <a:avLst/>
+          </a:prstGeom>
+          <a:noFill/>
+        </p:spPr>
+        <p:txBody>
+          <a:bodyPr wrap="square" anchor="ctr" lIns="0" rIns="0" tIns="0" bIns="0">
+            <a:spAutoFit/>
+          </a:bodyPr>
+          <a:lstStyle/>
+          <a:p>
+            <a:pPr algn="r"/>
+            <a:r>
+              <a:rPr sz="1000" b="0" i="0">
+                <a:solidFill>
+                  <a:srgbClr val="6B7280"/>
+                </a:solidFill>
+                <a:latin typeface="Calibri"/>
+              </a:rPr>
+              <a:t>56/63</a:t>
+            </a:r>
+          </a:p>
+        </p:txBody>
+      </p:sp>
+      <p:sp>
+        <p:nvSpPr>
+          <p:cNvPr id="8" name="TextBox 7"/>
+          <p:cNvSpPr txBox="1"/>
+          <p:nvPr/>
+        </p:nvSpPr>
+        <p:spPr>
+          <a:xfrm>
+            <a:off x="502920" y="6126480"/>
+            <a:ext cx="11185855" cy="292608"/>
+          </a:xfrm>
+          <a:prstGeom prst="rect">
+            <a:avLst/>
+          </a:prstGeom>
+          <a:noFill/>
+        </p:spPr>
+        <p:txBody>
+          <a:bodyPr wrap="square" anchor="ctr" lIns="0" rIns="0" tIns="0" bIns="0">
+            <a:spAutoFit/>
+          </a:bodyPr>
+          <a:lstStyle/>
+          <a:p>
+            <a:r>
+              <a:rPr sz="1000" b="1" i="0">
+                <a:solidFill>
+                  <a:srgbClr val="6B7280"/>
+                </a:solidFill>
+                <a:latin typeface="Calibri"/>
+              </a:rPr>
+              <a:t>Fuente: </a:t>
+            </a:r>
+            <a:r>
+              <a:rPr sz="1000" b="0" i="0">
+                <a:solidFill>
+                  <a:srgbClr val="6B7280"/>
+                </a:solidFill>
+                <a:latin typeface="Calibri"/>
+              </a:rPr>
+              <a:t>Unity 6.3 Manual — Android environment setup</a:t>
+            </a:r>
+          </a:p>
+        </p:txBody>
+      </p:sp>
+      <p:pic>
+        <p:nvPicPr>
+          <p:cNvPr id="9" name="Picture 8" descr="u4-external-tools.png"/>
+          <p:cNvPicPr>
+            <a:picLocks noChangeAspect="1"/>
+          </p:cNvPicPr>
+          <p:nvPr/>
+        </p:nvPicPr>
+        <p:blipFill>
+          <a:blip r:embed="rId2"/>
+          <a:stretch>
+            <a:fillRect/>
+          </a:stretch>
+        </p:blipFill>
+        <p:spPr>
+          <a:xfrm>
+            <a:off x="4739335" y="2473452"/>
+            <a:ext cx="6949439" cy="1911095"/>
+          </a:xfrm>
+          <a:prstGeom prst="rect">
+            <a:avLst/>
+          </a:prstGeom>
+          <a:ln w="12700">
+            <a:solidFill>
+              <a:srgbClr val="E5E7EB"/>
+            </a:solidFill>
+          </a:ln>
+        </p:spPr>
+      </p:pic>
+      <p:sp>
+        <p:nvSpPr>
+          <p:cNvPr id="10" name="TextBox 9"/>
+          <p:cNvSpPr txBox="1"/>
+          <p:nvPr/>
+        </p:nvSpPr>
+        <p:spPr>
+          <a:xfrm>
+            <a:off x="4739335" y="5623560"/>
+            <a:ext cx="6949440" cy="365760"/>
+          </a:xfrm>
+          <a:prstGeom prst="rect">
+            <a:avLst/>
+          </a:prstGeom>
+          <a:noFill/>
+        </p:spPr>
+        <p:txBody>
+          <a:bodyPr wrap="square" anchor="ctr" lIns="0" rIns="0" tIns="0" bIns="0">
+            <a:spAutoFit/>
+          </a:bodyPr>
+          <a:lstStyle/>
+          <a:p>
+            <a:pPr algn="ctr"/>
+            <a:r>
+              <a:rPr sz="1200" b="0" i="1">
+                <a:solidFill>
+                  <a:srgbClr val="6B7280"/>
+                </a:solidFill>
+                <a:latin typeface="Calibri"/>
+              </a:rPr>
+              <a:t>Edit &gt; Preferences &gt; External Tools &gt; Android (Unity 6000.3.11f1)</a:t>
+            </a:r>
+          </a:p>
+        </p:txBody>
+      </p:sp>
+      <p:sp>
+        <p:nvSpPr>
+          <p:cNvPr id="11" name="TextBox 10"/>
+          <p:cNvSpPr txBox="1"/>
+          <p:nvPr/>
+        </p:nvSpPr>
+        <p:spPr>
+          <a:xfrm>
+            <a:off x="502920" y="1234440"/>
+            <a:ext cx="3962095" cy="4754880"/>
+          </a:xfrm>
+          <a:prstGeom prst="rect">
+            <a:avLst/>
+          </a:prstGeom>
+          <a:noFill/>
+        </p:spPr>
+        <p:txBody>
+          <a:bodyPr wrap="square" anchor="t" lIns="0" rIns="0" tIns="0" bIns="0">
+            <a:spAutoFit/>
+          </a:bodyPr>
+          <a:lstStyle/>
+          <a:p>
+            <a:pPr>
+              <a:spcAft>
+                <a:spcPts val="800"/>
+              </a:spcAft>
+            </a:pPr>
+            <a:r>
+              <a:rPr sz="2200" b="1" i="0">
+                <a:solidFill>
+                  <a:srgbClr val="0D9488"/>
+                </a:solidFill>
+                <a:latin typeface="Calibri"/>
+              </a:rPr>
+              <a:t>1  </a:t>
+            </a:r>
+            <a:r>
+              <a:rPr sz="2200" b="0" i="0">
+                <a:solidFill>
+                  <a:srgbClr val="1F2937"/>
+                </a:solidFill>
+                <a:latin typeface="Calibri"/>
+              </a:rPr>
+              <a:t>Unity Hub &gt; Installs &gt; Add modules</a:t>
+            </a:r>
+          </a:p>
+          <a:p>
+            <a:pPr>
+              <a:spcAft>
+                <a:spcPts val="800"/>
+              </a:spcAft>
+            </a:pPr>
+            <a:r>
+              <a:rPr sz="2200" b="1" i="0">
+                <a:solidFill>
+                  <a:srgbClr val="0D9488"/>
+                </a:solidFill>
+                <a:latin typeface="Calibri"/>
+              </a:rPr>
+              <a:t>2  </a:t>
+            </a:r>
+            <a:r>
+              <a:rPr sz="2200" b="0" i="0">
+                <a:solidFill>
+                  <a:srgbClr val="1F2937"/>
+                </a:solidFill>
+                <a:latin typeface="Calibri"/>
+              </a:rPr>
+              <a:t>Android Build Support (+ OpenJDK, SDK, NDK)</a:t>
+            </a:r>
+          </a:p>
+          <a:p>
+            <a:pPr>
+              <a:spcAft>
+                <a:spcPts val="800"/>
+              </a:spcAft>
+            </a:pPr>
+            <a:r>
+              <a:rPr sz="2200" b="1" i="0">
+                <a:solidFill>
+                  <a:srgbClr val="0D9488"/>
+                </a:solidFill>
+                <a:latin typeface="Calibri"/>
+              </a:rPr>
+              <a:t>3  </a:t>
+            </a:r>
+            <a:r>
+              <a:rPr sz="2200" b="0" i="0">
+                <a:solidFill>
+                  <a:srgbClr val="1F2937"/>
+                </a:solidFill>
+                <a:latin typeface="Calibri"/>
+              </a:rPr>
+              <a:t>Edit &gt; Preferences &gt; External Tools</a:t>
+            </a:r>
+          </a:p>
+          <a:p>
+            <a:pPr>
+              <a:spcAft>
+                <a:spcPts val="800"/>
+              </a:spcAft>
+            </a:pPr>
+            <a:r>
+              <a:rPr sz="2200" b="1" i="0">
+                <a:solidFill>
+                  <a:srgbClr val="0D9488"/>
+                </a:solidFill>
+                <a:latin typeface="Calibri"/>
+              </a:rPr>
+              <a:t>4  </a:t>
+            </a:r>
+            <a:r>
+              <a:rPr sz="2200" b="0" i="0">
+                <a:solidFill>
+                  <a:srgbClr val="1F2937"/>
+                </a:solidFill>
+                <a:latin typeface="Calibri"/>
+              </a:rPr>
+              <a:t>Android: las 4 casillas tildadas</a:t>
+            </a:r>
+          </a:p>
+        </p:txBody>
+      </p:sp>
+    </p:spTree>
+  </p:cSld>
+  <p:clrMapOvr>
+    <a:masterClrMapping/>
+  </p:clrMapOvr>
+</p:sld>
+</file>
+
+<file path=ppt/slides/slide57.xml><?xml version="1.0" encoding="utf-8"?>
+<p:sld xmlns:a="http://schemas.openxmlformats.org/drawingml/2006/main" xmlns:p="http://schemas.openxmlformats.org/presentationml/2006/main" xmlns:r="http://schemas.openxmlformats.org/officeDocument/2006/relationships">
+  <p:cSld>
+    <p:bg>
+      <p:bgPr>
+        <a:solidFill>
+          <a:srgbClr val="FFFFFF"/>
+        </a:solidFill>
+        <a:effectLst/>
+      </p:bgPr>
+    </p:bg>
+    <p:spTree>
+      <p:nvGrpSpPr>
+        <p:cNvPr id="1" name=""/>
+        <p:cNvGrpSpPr/>
+        <p:nvPr/>
+      </p:nvGrpSpPr>
+      <p:grpSpPr/>
+      <p:sp>
+        <p:nvSpPr>
+          <p:cNvPr id="2" name="Rectangle 1"/>
+          <p:cNvSpPr/>
+          <p:nvPr/>
+        </p:nvSpPr>
+        <p:spPr>
+          <a:xfrm>
+            <a:off x="0" y="0"/>
+            <a:ext cx="12191695" cy="960120"/>
+          </a:xfrm>
+          <a:prstGeom prst="rect">
+            <a:avLst/>
+          </a:prstGeom>
+          <a:solidFill>
+            <a:srgbClr val="1F2A44"/>
+          </a:solidFill>
+          <a:ln>
+            <a:noFill/>
+          </a:ln>
+          <a:effectLst/>
+        </p:spPr>
+        <p:style>
+          <a:lnRef idx="1">
+            <a:schemeClr val="accent1"/>
+          </a:lnRef>
+          <a:fillRef idx="3">
+            <a:schemeClr val="accent1"/>
+          </a:fillRef>
+          <a:effectRef idx="2">
+            <a:schemeClr val="accent1"/>
+          </a:effectRef>
+          <a:fontRef idx="minor">
+            <a:schemeClr val="lt1"/>
+          </a:fontRef>
+        </p:style>
+        <p:txBody>
+          <a:bodyPr rtlCol="0" anchor="ctr"/>
+          <a:lstStyle/>
+          <a:p>
+            <a:pPr algn="ctr"/>
+          </a:p>
+        </p:txBody>
+      </p:sp>
+      <p:sp>
+        <p:nvSpPr>
+          <p:cNvPr id="3" name="Rectangle 2"/>
+          <p:cNvSpPr/>
+          <p:nvPr/>
+        </p:nvSpPr>
+        <p:spPr>
+          <a:xfrm>
+            <a:off x="0" y="960120"/>
+            <a:ext cx="12191695" cy="38100"/>
+          </a:xfrm>
+          <a:prstGeom prst="rect">
+            <a:avLst/>
+          </a:prstGeom>
+          <a:solidFill>
+            <a:srgbClr val="0D9488"/>
+          </a:solidFill>
+          <a:ln>
+            <a:noFill/>
+          </a:ln>
+          <a:effectLst/>
+        </p:spPr>
+        <p:style>
+          <a:lnRef idx="1">
+            <a:schemeClr val="accent1"/>
+          </a:lnRef>
+          <a:fillRef idx="3">
+            <a:schemeClr val="accent1"/>
+          </a:fillRef>
+          <a:effectRef idx="2">
+            <a:schemeClr val="accent1"/>
+          </a:effectRef>
+          <a:fontRef idx="minor">
+            <a:schemeClr val="lt1"/>
+          </a:fontRef>
+        </p:style>
+        <p:txBody>
+          <a:bodyPr rtlCol="0" anchor="ctr"/>
+          <a:lstStyle/>
+          <a:p>
+            <a:pPr algn="ctr"/>
+          </a:p>
+        </p:txBody>
+      </p:sp>
+      <p:sp>
+        <p:nvSpPr>
+          <p:cNvPr id="4" name="Oval 3"/>
+          <p:cNvSpPr/>
+          <p:nvPr/>
+        </p:nvSpPr>
+        <p:spPr>
+          <a:xfrm>
+            <a:off x="274320" y="219456"/>
+            <a:ext cx="530352" cy="530352"/>
+          </a:xfrm>
+          <a:prstGeom prst="ellipse">
+            <a:avLst/>
+          </a:prstGeom>
+          <a:solidFill>
+            <a:srgbClr val="0D9488"/>
+          </a:solidFill>
+          <a:ln>
+            <a:noFill/>
+          </a:ln>
+          <a:effectLst/>
+        </p:spPr>
+        <p:style>
+          <a:lnRef idx="1">
+            <a:schemeClr val="accent1"/>
+          </a:lnRef>
+          <a:fillRef idx="3">
+            <a:schemeClr val="accent1"/>
+          </a:fillRef>
+          <a:effectRef idx="2">
+            <a:schemeClr val="accent1"/>
+          </a:effectRef>
+          <a:fontRef idx="minor">
+            <a:schemeClr val="lt1"/>
+          </a:fontRef>
+        </p:style>
+        <p:txBody>
+          <a:bodyPr rtlCol="0" anchor="ctr" lIns="0" rIns="0" tIns="0" bIns="0"/>
+          <a:lstStyle/>
+          <a:p>
+            <a:pPr algn="ctr"/>
+            <a:r>
+              <a:rPr sz="1600" b="1" i="0">
+                <a:solidFill>
+                  <a:srgbClr val="FFFFFF"/>
+                </a:solidFill>
+                <a:latin typeface="Calibri"/>
+              </a:rPr>
+              <a:t>57</a:t>
+            </a:r>
+          </a:p>
+        </p:txBody>
+      </p:sp>
+      <p:sp>
+        <p:nvSpPr>
+          <p:cNvPr id="5" name="TextBox 4"/>
+          <p:cNvSpPr txBox="1"/>
+          <p:nvPr/>
+        </p:nvSpPr>
+        <p:spPr>
+          <a:xfrm>
+            <a:off x="1005840" y="109728"/>
+            <a:ext cx="10728655" cy="777240"/>
+          </a:xfrm>
+          <a:prstGeom prst="rect">
+            <a:avLst/>
+          </a:prstGeom>
+          <a:noFill/>
+        </p:spPr>
+        <p:txBody>
+          <a:bodyPr wrap="square" anchor="ctr" lIns="0" rIns="0" tIns="0" bIns="0">
+            <a:spAutoFit/>
+          </a:bodyPr>
+          <a:lstStyle/>
+          <a:p>
+            <a:r>
+              <a:rPr sz="1100" b="1" i="0">
+                <a:solidFill>
+                  <a:srgbClr val="99F6E4"/>
+                </a:solidFill>
+                <a:latin typeface="Calibri"/>
+              </a:rPr>
+              <a:t>ANEXO · PASO 2 · TELÉFONO</a:t>
+            </a:r>
+          </a:p>
+          <a:p>
+            <a:r>
+              <a:rPr sz="2600" b="1" i="0">
+                <a:solidFill>
+                  <a:srgbClr val="FFFFFF"/>
+                </a:solidFill>
+                <a:latin typeface="Calibri"/>
+              </a:rPr>
+              <a:t>El teléfono listo para probar</a:t>
+            </a:r>
+          </a:p>
+        </p:txBody>
+      </p:sp>
+      <p:sp>
+        <p:nvSpPr>
+          <p:cNvPr id="6" name="TextBox 5"/>
+          <p:cNvSpPr txBox="1"/>
+          <p:nvPr/>
+        </p:nvSpPr>
+        <p:spPr>
+          <a:xfrm>
+            <a:off x="502920" y="6473952"/>
+            <a:ext cx="11185855" cy="274320"/>
+          </a:xfrm>
+          <a:prstGeom prst="rect">
+            <a:avLst/>
+          </a:prstGeom>
+          <a:noFill/>
+        </p:spPr>
+        <p:txBody>
+          <a:bodyPr wrap="square" anchor="ctr" lIns="0" rIns="0" tIns="0" bIns="0">
+            <a:spAutoFit/>
+          </a:bodyPr>
+          <a:lstStyle/>
+          <a:p>
+            <a:r>
+              <a:rPr sz="1000" b="0" i="0">
+                <a:solidFill>
+                  <a:srgbClr val="6B7280"/>
+                </a:solidFill>
+                <a:latin typeface="Calibri"/>
+              </a:rPr>
+              <a:t>Diseño según Plataformas de Juego · Unidad IV · Anexo · Anexo: Android en Unity 6</a:t>
+            </a:r>
+          </a:p>
+        </p:txBody>
+      </p:sp>
+      <p:sp>
+        <p:nvSpPr>
+          <p:cNvPr id="7" name="TextBox 6"/>
+          <p:cNvSpPr txBox="1"/>
+          <p:nvPr/>
+        </p:nvSpPr>
+        <p:spPr>
+          <a:xfrm>
+            <a:off x="10774375" y="6473952"/>
+            <a:ext cx="914400" cy="274320"/>
+          </a:xfrm>
+          <a:prstGeom prst="rect">
+            <a:avLst/>
+          </a:prstGeom>
+          <a:noFill/>
+        </p:spPr>
+        <p:txBody>
+          <a:bodyPr wrap="square" anchor="ctr" lIns="0" rIns="0" tIns="0" bIns="0">
+            <a:spAutoFit/>
+          </a:bodyPr>
+          <a:lstStyle/>
+          <a:p>
+            <a:pPr algn="r"/>
+            <a:r>
+              <a:rPr sz="1000" b="0" i="0">
+                <a:solidFill>
+                  <a:srgbClr val="6B7280"/>
+                </a:solidFill>
+                <a:latin typeface="Calibri"/>
+              </a:rPr>
+              <a:t>57/63</a:t>
+            </a:r>
+          </a:p>
+        </p:txBody>
+      </p:sp>
+      <p:sp>
+        <p:nvSpPr>
+          <p:cNvPr id="8" name="TextBox 7"/>
+          <p:cNvSpPr txBox="1"/>
+          <p:nvPr/>
+        </p:nvSpPr>
+        <p:spPr>
+          <a:xfrm>
+            <a:off x="502920" y="6126480"/>
+            <a:ext cx="11185855" cy="292608"/>
+          </a:xfrm>
+          <a:prstGeom prst="rect">
+            <a:avLst/>
+          </a:prstGeom>
+          <a:noFill/>
+        </p:spPr>
+        <p:txBody>
+          <a:bodyPr wrap="square" anchor="ctr" lIns="0" rIns="0" tIns="0" bIns="0">
+            <a:spAutoFit/>
+          </a:bodyPr>
+          <a:lstStyle/>
+          <a:p>
+            <a:r>
+              <a:rPr sz="1000" b="1" i="0">
+                <a:solidFill>
+                  <a:srgbClr val="6B7280"/>
+                </a:solidFill>
+                <a:latin typeface="Calibri"/>
+              </a:rPr>
+              <a:t>Fuente: </a:t>
+            </a:r>
+            <a:r>
+              <a:rPr sz="1000" b="0" i="0">
+                <a:solidFill>
+                  <a:srgbClr val="6B7280"/>
+                </a:solidFill>
+                <a:latin typeface="Calibri"/>
+              </a:rPr>
+              <a:t>Android — Configure on-device developer options; Unity 6.3 Manual — Debug on Android devices</a:t>
+            </a:r>
+          </a:p>
+        </p:txBody>
+      </p:sp>
+      <p:sp>
+        <p:nvSpPr>
+          <p:cNvPr id="9" name="Rounded Rectangle 8"/>
+          <p:cNvSpPr/>
+          <p:nvPr/>
+        </p:nvSpPr>
+        <p:spPr>
+          <a:xfrm>
+            <a:off x="7116775" y="1234441"/>
+            <a:ext cx="4572000" cy="672998"/>
+          </a:xfrm>
+          <a:prstGeom prst="roundRect">
+            <a:avLst>
+              <a:gd name="adj" fmla="val 20000"/>
+            </a:avLst>
+          </a:prstGeom>
+          <a:solidFill>
+            <a:srgbClr val="F3F4F6"/>
+          </a:solidFill>
+          <a:ln w="25400">
+            <a:solidFill>
+              <a:srgbClr val="0D9488"/>
+            </a:solidFill>
+          </a:ln>
+          <a:effectLst/>
+        </p:spPr>
+        <p:style>
+          <a:lnRef idx="1">
+            <a:schemeClr val="accent1"/>
+          </a:lnRef>
+          <a:fillRef idx="3">
+            <a:schemeClr val="accent1"/>
+          </a:fillRef>
+          <a:effectRef idx="2">
+            <a:schemeClr val="accent1"/>
+          </a:effectRef>
+          <a:fontRef idx="minor">
+            <a:schemeClr val="lt1"/>
+          </a:fontRef>
+        </p:style>
+        <p:txBody>
+          <a:bodyPr rtlCol="0" anchor="ctr" wrap="square"/>
+          <a:lstStyle/>
+          <a:p>
+            <a:pPr algn="ctr"/>
+            <a:r>
+              <a:rPr sz="1700" b="1" i="0">
+                <a:solidFill>
+                  <a:srgbClr val="1F2937"/>
+                </a:solidFill>
+                <a:latin typeface="Calibri"/>
+              </a:rPr>
+              <a:t>Número de compilación × 7</a:t>
+            </a:r>
+          </a:p>
+        </p:txBody>
+      </p:sp>
+      <p:sp>
+        <p:nvSpPr>
+          <p:cNvPr id="10" name="Down Arrow 9"/>
+          <p:cNvSpPr/>
+          <p:nvPr/>
+        </p:nvSpPr>
+        <p:spPr>
+          <a:xfrm>
+            <a:off x="9201607" y="1944015"/>
+            <a:ext cx="402336" cy="274320"/>
+          </a:xfrm>
+          <a:prstGeom prst="downArrow">
+            <a:avLst/>
+          </a:prstGeom>
+          <a:solidFill>
+            <a:srgbClr val="6B7280"/>
+          </a:solidFill>
+          <a:ln>
+            <a:noFill/>
+          </a:ln>
+          <a:effectLst/>
+        </p:spPr>
+        <p:style>
+          <a:lnRef idx="1">
+            <a:schemeClr val="accent1"/>
+          </a:lnRef>
+          <a:fillRef idx="3">
+            <a:schemeClr val="accent1"/>
+          </a:fillRef>
+          <a:effectRef idx="2">
+            <a:schemeClr val="accent1"/>
+          </a:effectRef>
+          <a:fontRef idx="minor">
+            <a:schemeClr val="lt1"/>
+          </a:fontRef>
+        </p:style>
+        <p:txBody>
+          <a:bodyPr rtlCol="0" anchor="ctr"/>
+          <a:lstStyle/>
+          <a:p>
+            <a:pPr algn="ctr"/>
+          </a:p>
+        </p:txBody>
+      </p:sp>
+      <p:sp>
+        <p:nvSpPr>
+          <p:cNvPr id="11" name="Rounded Rectangle 10"/>
+          <p:cNvSpPr/>
+          <p:nvPr/>
+        </p:nvSpPr>
+        <p:spPr>
+          <a:xfrm>
+            <a:off x="7116775" y="2254911"/>
+            <a:ext cx="4572000" cy="672998"/>
+          </a:xfrm>
+          <a:prstGeom prst="roundRect">
+            <a:avLst>
+              <a:gd name="adj" fmla="val 20000"/>
+            </a:avLst>
+          </a:prstGeom>
+          <a:solidFill>
+            <a:srgbClr val="F3F4F6"/>
+          </a:solidFill>
+          <a:ln w="25400">
+            <a:solidFill>
+              <a:srgbClr val="0D9488"/>
+            </a:solidFill>
+          </a:ln>
+          <a:effectLst/>
+        </p:spPr>
+        <p:style>
+          <a:lnRef idx="1">
+            <a:schemeClr val="accent1"/>
+          </a:lnRef>
+          <a:fillRef idx="3">
+            <a:schemeClr val="accent1"/>
+          </a:fillRef>
+          <a:effectRef idx="2">
+            <a:schemeClr val="accent1"/>
+          </a:effectRef>
+          <a:fontRef idx="minor">
+            <a:schemeClr val="lt1"/>
+          </a:fontRef>
+        </p:style>
+        <p:txBody>
+          <a:bodyPr rtlCol="0" anchor="ctr" wrap="square"/>
+          <a:lstStyle/>
+          <a:p>
+            <a:pPr algn="ctr"/>
+            <a:r>
+              <a:rPr sz="1700" b="1" i="0">
+                <a:solidFill>
+                  <a:srgbClr val="1F2937"/>
+                </a:solidFill>
+                <a:latin typeface="Calibri"/>
+              </a:rPr>
+              <a:t>Opciones de desarrollador</a:t>
+            </a:r>
+          </a:p>
+        </p:txBody>
+      </p:sp>
+      <p:sp>
+        <p:nvSpPr>
+          <p:cNvPr id="12" name="Down Arrow 11"/>
+          <p:cNvSpPr/>
+          <p:nvPr/>
+        </p:nvSpPr>
+        <p:spPr>
+          <a:xfrm>
+            <a:off x="9201607" y="2964485"/>
+            <a:ext cx="402336" cy="274320"/>
+          </a:xfrm>
+          <a:prstGeom prst="downArrow">
+            <a:avLst/>
+          </a:prstGeom>
+          <a:solidFill>
+            <a:srgbClr val="6B7280"/>
+          </a:solidFill>
+          <a:ln>
+            <a:noFill/>
+          </a:ln>
+          <a:effectLst/>
+        </p:spPr>
+        <p:style>
+          <a:lnRef idx="1">
+            <a:schemeClr val="accent1"/>
+          </a:lnRef>
+          <a:fillRef idx="3">
+            <a:schemeClr val="accent1"/>
+          </a:fillRef>
+          <a:effectRef idx="2">
+            <a:schemeClr val="accent1"/>
+          </a:effectRef>
+          <a:fontRef idx="minor">
+            <a:schemeClr val="lt1"/>
+          </a:fontRef>
+        </p:style>
+        <p:txBody>
+          <a:bodyPr rtlCol="0" anchor="ctr"/>
+          <a:lstStyle/>
+          <a:p>
+            <a:pPr algn="ctr"/>
+          </a:p>
+        </p:txBody>
+      </p:sp>
+      <p:sp>
+        <p:nvSpPr>
+          <p:cNvPr id="13" name="Rounded Rectangle 12"/>
+          <p:cNvSpPr/>
+          <p:nvPr/>
+        </p:nvSpPr>
+        <p:spPr>
+          <a:xfrm>
+            <a:off x="7116775" y="3275381"/>
+            <a:ext cx="4572000" cy="672998"/>
+          </a:xfrm>
+          <a:prstGeom prst="roundRect">
+            <a:avLst>
+              <a:gd name="adj" fmla="val 20000"/>
+            </a:avLst>
+          </a:prstGeom>
+          <a:solidFill>
+            <a:srgbClr val="F3F4F6"/>
+          </a:solidFill>
+          <a:ln w="25400">
+            <a:solidFill>
+              <a:srgbClr val="0D9488"/>
+            </a:solidFill>
+          </a:ln>
+          <a:effectLst/>
+        </p:spPr>
+        <p:style>
+          <a:lnRef idx="1">
+            <a:schemeClr val="accent1"/>
+          </a:lnRef>
+          <a:fillRef idx="3">
+            <a:schemeClr val="accent1"/>
+          </a:fillRef>
+          <a:effectRef idx="2">
+            <a:schemeClr val="accent1"/>
+          </a:effectRef>
+          <a:fontRef idx="minor">
+            <a:schemeClr val="lt1"/>
+          </a:fontRef>
+        </p:style>
+        <p:txBody>
+          <a:bodyPr rtlCol="0" anchor="ctr" wrap="square"/>
+          <a:lstStyle/>
+          <a:p>
+            <a:pPr algn="ctr"/>
+            <a:r>
+              <a:rPr sz="1700" b="1" i="0">
+                <a:solidFill>
+                  <a:srgbClr val="1F2937"/>
+                </a:solidFill>
+                <a:latin typeface="Calibri"/>
+              </a:rPr>
+              <a:t>Depuración USB</a:t>
+            </a:r>
+          </a:p>
+        </p:txBody>
+      </p:sp>
+      <p:sp>
+        <p:nvSpPr>
+          <p:cNvPr id="14" name="Down Arrow 13"/>
+          <p:cNvSpPr/>
+          <p:nvPr/>
+        </p:nvSpPr>
+        <p:spPr>
+          <a:xfrm>
+            <a:off x="9201607" y="3984955"/>
+            <a:ext cx="402336" cy="274320"/>
+          </a:xfrm>
+          <a:prstGeom prst="downArrow">
+            <a:avLst/>
+          </a:prstGeom>
+          <a:solidFill>
+            <a:srgbClr val="6B7280"/>
+          </a:solidFill>
+          <a:ln>
+            <a:noFill/>
+          </a:ln>
+          <a:effectLst/>
+        </p:spPr>
+        <p:style>
+          <a:lnRef idx="1">
+            <a:schemeClr val="accent1"/>
+          </a:lnRef>
+          <a:fillRef idx="3">
+            <a:schemeClr val="accent1"/>
+          </a:fillRef>
+          <a:effectRef idx="2">
+            <a:schemeClr val="accent1"/>
+          </a:effectRef>
+          <a:fontRef idx="minor">
+            <a:schemeClr val="lt1"/>
+          </a:fontRef>
+        </p:style>
+        <p:txBody>
+          <a:bodyPr rtlCol="0" anchor="ctr"/>
+          <a:lstStyle/>
+          <a:p>
+            <a:pPr algn="ctr"/>
+          </a:p>
+        </p:txBody>
+      </p:sp>
+      <p:sp>
+        <p:nvSpPr>
+          <p:cNvPr id="15" name="Rounded Rectangle 14"/>
+          <p:cNvSpPr/>
+          <p:nvPr/>
+        </p:nvSpPr>
+        <p:spPr>
+          <a:xfrm>
+            <a:off x="7116775" y="4295851"/>
+            <a:ext cx="4572000" cy="672998"/>
+          </a:xfrm>
+          <a:prstGeom prst="roundRect">
+            <a:avLst>
+              <a:gd name="adj" fmla="val 20000"/>
+            </a:avLst>
+          </a:prstGeom>
+          <a:solidFill>
+            <a:srgbClr val="F3F4F6"/>
+          </a:solidFill>
+          <a:ln w="25400">
+            <a:solidFill>
+              <a:srgbClr val="0D9488"/>
+            </a:solidFill>
+          </a:ln>
+          <a:effectLst/>
+        </p:spPr>
+        <p:style>
+          <a:lnRef idx="1">
+            <a:schemeClr val="accent1"/>
+          </a:lnRef>
+          <a:fillRef idx="3">
+            <a:schemeClr val="accent1"/>
+          </a:fillRef>
+          <a:effectRef idx="2">
+            <a:schemeClr val="accent1"/>
+          </a:effectRef>
+          <a:fontRef idx="minor">
+            <a:schemeClr val="lt1"/>
+          </a:fontRef>
+        </p:style>
+        <p:txBody>
+          <a:bodyPr rtlCol="0" anchor="ctr" wrap="square"/>
+          <a:lstStyle/>
+          <a:p>
+            <a:pPr algn="ctr"/>
+            <a:r>
+              <a:rPr sz="1700" b="1" i="0">
+                <a:solidFill>
+                  <a:srgbClr val="1F2937"/>
+                </a:solidFill>
+                <a:latin typeface="Calibri"/>
+              </a:rPr>
+              <a:t>Cable de datos + "¿Permitir depuración USB?"</a:t>
+            </a:r>
+          </a:p>
+        </p:txBody>
+      </p:sp>
+      <p:sp>
+        <p:nvSpPr>
+          <p:cNvPr id="16" name="Down Arrow 15"/>
+          <p:cNvSpPr/>
+          <p:nvPr/>
+        </p:nvSpPr>
+        <p:spPr>
+          <a:xfrm>
+            <a:off x="9201607" y="5005425"/>
+            <a:ext cx="402336" cy="274320"/>
+          </a:xfrm>
+          <a:prstGeom prst="downArrow">
+            <a:avLst/>
+          </a:prstGeom>
+          <a:solidFill>
+            <a:srgbClr val="6B7280"/>
+          </a:solidFill>
+          <a:ln>
+            <a:noFill/>
+          </a:ln>
+          <a:effectLst/>
+        </p:spPr>
+        <p:style>
+          <a:lnRef idx="1">
+            <a:schemeClr val="accent1"/>
+          </a:lnRef>
+          <a:fillRef idx="3">
+            <a:schemeClr val="accent1"/>
+          </a:fillRef>
+          <a:effectRef idx="2">
+            <a:schemeClr val="accent1"/>
+          </a:effectRef>
+          <a:fontRef idx="minor">
+            <a:schemeClr val="lt1"/>
+          </a:fontRef>
+        </p:style>
+        <p:txBody>
+          <a:bodyPr rtlCol="0" anchor="ctr"/>
+          <a:lstStyle/>
+          <a:p>
+            <a:pPr algn="ctr"/>
+          </a:p>
+        </p:txBody>
+      </p:sp>
+      <p:sp>
+        <p:nvSpPr>
+          <p:cNvPr id="17" name="Rounded Rectangle 16"/>
+          <p:cNvSpPr/>
+          <p:nvPr/>
+        </p:nvSpPr>
+        <p:spPr>
+          <a:xfrm>
+            <a:off x="7116775" y="5316321"/>
+            <a:ext cx="4572000" cy="672998"/>
+          </a:xfrm>
+          <a:prstGeom prst="roundRect">
+            <a:avLst>
+              <a:gd name="adj" fmla="val 20000"/>
+            </a:avLst>
+          </a:prstGeom>
+          <a:solidFill>
+            <a:srgbClr val="F3F4F6"/>
+          </a:solidFill>
+          <a:ln w="25400">
+            <a:solidFill>
+              <a:srgbClr val="0D9488"/>
+            </a:solidFill>
+          </a:ln>
+          <a:effectLst/>
+        </p:spPr>
+        <p:style>
+          <a:lnRef idx="1">
+            <a:schemeClr val="accent1"/>
+          </a:lnRef>
+          <a:fillRef idx="3">
+            <a:schemeClr val="accent1"/>
+          </a:fillRef>
+          <a:effectRef idx="2">
+            <a:schemeClr val="accent1"/>
+          </a:effectRef>
+          <a:fontRef idx="minor">
+            <a:schemeClr val="lt1"/>
+          </a:fontRef>
+        </p:style>
+        <p:txBody>
+          <a:bodyPr rtlCol="0" anchor="ctr" wrap="square"/>
+          <a:lstStyle/>
+          <a:p>
+            <a:pPr algn="ctr"/>
+            <a:r>
+              <a:rPr sz="1700" b="1" i="0">
+                <a:solidFill>
+                  <a:srgbClr val="1F2937"/>
+                </a:solidFill>
+                <a:latin typeface="Calibri"/>
+              </a:rPr>
+              <a:t>adb devices → device</a:t>
+            </a:r>
+          </a:p>
+        </p:txBody>
+      </p:sp>
+      <p:sp>
+        <p:nvSpPr>
+          <p:cNvPr id="18" name="TextBox 17"/>
+          <p:cNvSpPr txBox="1"/>
+          <p:nvPr/>
+        </p:nvSpPr>
+        <p:spPr>
+          <a:xfrm>
+            <a:off x="502920" y="1234440"/>
+            <a:ext cx="6339535" cy="4754880"/>
+          </a:xfrm>
+          <a:prstGeom prst="rect">
+            <a:avLst/>
+          </a:prstGeom>
+          <a:noFill/>
+        </p:spPr>
+        <p:txBody>
+          <a:bodyPr wrap="square" anchor="t" lIns="0" rIns="0" tIns="0" bIns="0">
+            <a:spAutoFit/>
+          </a:bodyPr>
+          <a:lstStyle/>
+          <a:p>
+            <a:pPr>
+              <a:spcAft>
+                <a:spcPts val="800"/>
+              </a:spcAft>
+            </a:pPr>
+            <a:r>
+              <a:rPr sz="2200" b="1" i="0">
+                <a:solidFill>
+                  <a:srgbClr val="0D9488"/>
+                </a:solidFill>
+                <a:latin typeface="Calibri"/>
+              </a:rPr>
+              <a:t>1  </a:t>
+            </a:r>
+            <a:r>
+              <a:rPr sz="2200" b="0" i="0">
+                <a:solidFill>
+                  <a:srgbClr val="1F2937"/>
+                </a:solidFill>
+                <a:latin typeface="Calibri"/>
+              </a:rPr>
+              <a:t>7 toques en "Número de compilación"</a:t>
+            </a:r>
+          </a:p>
+          <a:p>
+            <a:pPr>
+              <a:spcAft>
+                <a:spcPts val="800"/>
+              </a:spcAft>
+            </a:pPr>
+            <a:r>
+              <a:rPr sz="2200" b="1" i="0">
+                <a:solidFill>
+                  <a:srgbClr val="0D9488"/>
+                </a:solidFill>
+                <a:latin typeface="Calibri"/>
+              </a:rPr>
+              <a:t>2  </a:t>
+            </a:r>
+            <a:r>
+              <a:rPr sz="2200" b="0" i="0">
+                <a:solidFill>
+                  <a:srgbClr val="1F2937"/>
+                </a:solidFill>
+                <a:latin typeface="Calibri"/>
+              </a:rPr>
+              <a:t>Opciones de desarrollador &gt; Depuración USB</a:t>
+            </a:r>
+          </a:p>
+          <a:p>
+            <a:pPr>
+              <a:spcAft>
+                <a:spcPts val="800"/>
+              </a:spcAft>
+            </a:pPr>
+            <a:r>
+              <a:rPr sz="2200" b="1" i="0">
+                <a:solidFill>
+                  <a:srgbClr val="0D9488"/>
+                </a:solidFill>
+                <a:latin typeface="Calibri"/>
+              </a:rPr>
+              <a:t>3  </a:t>
+            </a:r>
+            <a:r>
+              <a:rPr sz="2200" b="0" i="0">
+                <a:solidFill>
+                  <a:srgbClr val="1F2937"/>
+                </a:solidFill>
+                <a:latin typeface="Calibri"/>
+              </a:rPr>
+              <a:t>Cable de datos y aceptar el diálogo</a:t>
+            </a:r>
+          </a:p>
+          <a:p>
+            <a:pPr>
+              <a:spcAft>
+                <a:spcPts val="800"/>
+              </a:spcAft>
+            </a:pPr>
+            <a:r>
+              <a:rPr sz="2200" b="1" i="0">
+                <a:solidFill>
+                  <a:srgbClr val="0D9488"/>
+                </a:solidFill>
+                <a:latin typeface="Calibri"/>
+              </a:rPr>
+              <a:t>4  </a:t>
+            </a:r>
+            <a:r>
+              <a:rPr sz="2200" b="0" i="0">
+                <a:solidFill>
+                  <a:srgbClr val="1F2937"/>
+                </a:solidFill>
+                <a:latin typeface="Calibri"/>
+              </a:rPr>
+              <a:t>adb devices: tiene que decir "device"</a:t>
+            </a:r>
+          </a:p>
+        </p:txBody>
+      </p:sp>
+    </p:spTree>
+  </p:cSld>
+  <p:clrMapOvr>
+    <a:masterClrMapping/>
+  </p:clrMapOvr>
+</p:sld>
+</file>
+
+<file path=ppt/slides/slide58.xml><?xml version="1.0" encoding="utf-8"?>
+<p:sld xmlns:a="http://schemas.openxmlformats.org/drawingml/2006/main" xmlns:p="http://schemas.openxmlformats.org/presentationml/2006/main" xmlns:r="http://schemas.openxmlformats.org/officeDocument/2006/relationships">
+  <p:cSld>
+    <p:bg>
+      <p:bgPr>
+        <a:solidFill>
+          <a:srgbClr val="FFFFFF"/>
+        </a:solidFill>
+        <a:effectLst/>
+      </p:bgPr>
+    </p:bg>
+    <p:spTree>
+      <p:nvGrpSpPr>
+        <p:cNvPr id="1" name=""/>
+        <p:cNvGrpSpPr/>
+        <p:nvPr/>
+      </p:nvGrpSpPr>
+      <p:grpSpPr/>
+      <p:sp>
+        <p:nvSpPr>
+          <p:cNvPr id="2" name="Rectangle 1"/>
+          <p:cNvSpPr/>
+          <p:nvPr/>
+        </p:nvSpPr>
+        <p:spPr>
+          <a:xfrm>
+            <a:off x="0" y="0"/>
+            <a:ext cx="12191695" cy="960120"/>
+          </a:xfrm>
+          <a:prstGeom prst="rect">
+            <a:avLst/>
+          </a:prstGeom>
+          <a:solidFill>
+            <a:srgbClr val="1F2A44"/>
+          </a:solidFill>
+          <a:ln>
+            <a:noFill/>
+          </a:ln>
+          <a:effectLst/>
+        </p:spPr>
+        <p:style>
+          <a:lnRef idx="1">
+            <a:schemeClr val="accent1"/>
+          </a:lnRef>
+          <a:fillRef idx="3">
+            <a:schemeClr val="accent1"/>
+          </a:fillRef>
+          <a:effectRef idx="2">
+            <a:schemeClr val="accent1"/>
+          </a:effectRef>
+          <a:fontRef idx="minor">
+            <a:schemeClr val="lt1"/>
+          </a:fontRef>
+        </p:style>
+        <p:txBody>
+          <a:bodyPr rtlCol="0" anchor="ctr"/>
+          <a:lstStyle/>
+          <a:p>
+            <a:pPr algn="ctr"/>
+          </a:p>
+        </p:txBody>
+      </p:sp>
+      <p:sp>
+        <p:nvSpPr>
+          <p:cNvPr id="3" name="Rectangle 2"/>
+          <p:cNvSpPr/>
+          <p:nvPr/>
+        </p:nvSpPr>
+        <p:spPr>
+          <a:xfrm>
+            <a:off x="0" y="960120"/>
+            <a:ext cx="12191695" cy="38100"/>
+          </a:xfrm>
+          <a:prstGeom prst="rect">
+            <a:avLst/>
+          </a:prstGeom>
+          <a:solidFill>
+            <a:srgbClr val="0D9488"/>
+          </a:solidFill>
+          <a:ln>
+            <a:noFill/>
+          </a:ln>
+          <a:effectLst/>
+        </p:spPr>
+        <p:style>
+          <a:lnRef idx="1">
+            <a:schemeClr val="accent1"/>
+          </a:lnRef>
+          <a:fillRef idx="3">
+            <a:schemeClr val="accent1"/>
+          </a:fillRef>
+          <a:effectRef idx="2">
+            <a:schemeClr val="accent1"/>
+          </a:effectRef>
+          <a:fontRef idx="minor">
+            <a:schemeClr val="lt1"/>
+          </a:fontRef>
+        </p:style>
+        <p:txBody>
+          <a:bodyPr rtlCol="0" anchor="ctr"/>
+          <a:lstStyle/>
+          <a:p>
+            <a:pPr algn="ctr"/>
+          </a:p>
+        </p:txBody>
+      </p:sp>
+      <p:sp>
+        <p:nvSpPr>
+          <p:cNvPr id="4" name="Oval 3"/>
+          <p:cNvSpPr/>
+          <p:nvPr/>
+        </p:nvSpPr>
+        <p:spPr>
+          <a:xfrm>
+            <a:off x="274320" y="219456"/>
+            <a:ext cx="530352" cy="530352"/>
+          </a:xfrm>
+          <a:prstGeom prst="ellipse">
+            <a:avLst/>
+          </a:prstGeom>
+          <a:solidFill>
+            <a:srgbClr val="0D9488"/>
+          </a:solidFill>
+          <a:ln>
+            <a:noFill/>
+          </a:ln>
+          <a:effectLst/>
+        </p:spPr>
+        <p:style>
+          <a:lnRef idx="1">
+            <a:schemeClr val="accent1"/>
+          </a:lnRef>
+          <a:fillRef idx="3">
+            <a:schemeClr val="accent1"/>
+          </a:fillRef>
+          <a:effectRef idx="2">
+            <a:schemeClr val="accent1"/>
+          </a:effectRef>
+          <a:fontRef idx="minor">
+            <a:schemeClr val="lt1"/>
+          </a:fontRef>
+        </p:style>
+        <p:txBody>
+          <a:bodyPr rtlCol="0" anchor="ctr" lIns="0" rIns="0" tIns="0" bIns="0"/>
+          <a:lstStyle/>
+          <a:p>
+            <a:pPr algn="ctr"/>
+            <a:r>
+              <a:rPr sz="1600" b="1" i="0">
+                <a:solidFill>
+                  <a:srgbClr val="FFFFFF"/>
+                </a:solidFill>
+                <a:latin typeface="Calibri"/>
+              </a:rPr>
+              <a:t>58</a:t>
+            </a:r>
+          </a:p>
+        </p:txBody>
+      </p:sp>
+      <p:sp>
+        <p:nvSpPr>
+          <p:cNvPr id="5" name="TextBox 4"/>
+          <p:cNvSpPr txBox="1"/>
+          <p:nvPr/>
+        </p:nvSpPr>
+        <p:spPr>
+          <a:xfrm>
+            <a:off x="1005840" y="109728"/>
+            <a:ext cx="10728655" cy="777240"/>
+          </a:xfrm>
+          <a:prstGeom prst="rect">
+            <a:avLst/>
+          </a:prstGeom>
+          <a:noFill/>
+        </p:spPr>
+        <p:txBody>
+          <a:bodyPr wrap="square" anchor="ctr" lIns="0" rIns="0" tIns="0" bIns="0">
+            <a:spAutoFit/>
+          </a:bodyPr>
+          <a:lstStyle/>
+          <a:p>
+            <a:r>
+              <a:rPr sz="1100" b="1" i="0">
+                <a:solidFill>
+                  <a:srgbClr val="99F6E4"/>
+                </a:solidFill>
+                <a:latin typeface="Calibri"/>
+              </a:rPr>
+              <a:t>ANEXO · PASO 3 · SIMULAR</a:t>
+            </a:r>
+          </a:p>
+          <a:p>
+            <a:r>
+              <a:rPr sz="2600" b="1" i="0">
+                <a:solidFill>
+                  <a:srgbClr val="FFFFFF"/>
+                </a:solidFill>
+                <a:latin typeface="Calibri"/>
+              </a:rPr>
+              <a:t>Device Simulator</a:t>
+            </a:r>
+          </a:p>
+        </p:txBody>
+      </p:sp>
+      <p:sp>
+        <p:nvSpPr>
+          <p:cNvPr id="6" name="TextBox 5"/>
+          <p:cNvSpPr txBox="1"/>
+          <p:nvPr/>
+        </p:nvSpPr>
+        <p:spPr>
+          <a:xfrm>
+            <a:off x="502920" y="6473952"/>
+            <a:ext cx="11185855" cy="274320"/>
+          </a:xfrm>
+          <a:prstGeom prst="rect">
+            <a:avLst/>
+          </a:prstGeom>
+          <a:noFill/>
+        </p:spPr>
+        <p:txBody>
+          <a:bodyPr wrap="square" anchor="ctr" lIns="0" rIns="0" tIns="0" bIns="0">
+            <a:spAutoFit/>
+          </a:bodyPr>
+          <a:lstStyle/>
+          <a:p>
+            <a:r>
+              <a:rPr sz="1000" b="0" i="0">
+                <a:solidFill>
+                  <a:srgbClr val="6B7280"/>
+                </a:solidFill>
+                <a:latin typeface="Calibri"/>
+              </a:rPr>
+              <a:t>Diseño según Plataformas de Juego · Unidad IV · Anexo · Anexo: Android en Unity 6</a:t>
+            </a:r>
+          </a:p>
+        </p:txBody>
+      </p:sp>
+      <p:sp>
+        <p:nvSpPr>
+          <p:cNvPr id="7" name="TextBox 6"/>
+          <p:cNvSpPr txBox="1"/>
+          <p:nvPr/>
+        </p:nvSpPr>
+        <p:spPr>
+          <a:xfrm>
+            <a:off x="10774375" y="6473952"/>
+            <a:ext cx="914400" cy="274320"/>
+          </a:xfrm>
+          <a:prstGeom prst="rect">
+            <a:avLst/>
+          </a:prstGeom>
+          <a:noFill/>
+        </p:spPr>
+        <p:txBody>
+          <a:bodyPr wrap="square" anchor="ctr" lIns="0" rIns="0" tIns="0" bIns="0">
+            <a:spAutoFit/>
+          </a:bodyPr>
+          <a:lstStyle/>
+          <a:p>
+            <a:pPr algn="r"/>
+            <a:r>
+              <a:rPr sz="1000" b="0" i="0">
+                <a:solidFill>
+                  <a:srgbClr val="6B7280"/>
+                </a:solidFill>
+                <a:latin typeface="Calibri"/>
+              </a:rPr>
+              <a:t>58/63</a:t>
+            </a:r>
+          </a:p>
+        </p:txBody>
+      </p:sp>
+      <p:sp>
+        <p:nvSpPr>
+          <p:cNvPr id="8" name="TextBox 7"/>
+          <p:cNvSpPr txBox="1"/>
+          <p:nvPr/>
+        </p:nvSpPr>
+        <p:spPr>
+          <a:xfrm>
+            <a:off x="502920" y="6126480"/>
+            <a:ext cx="11185855" cy="292608"/>
+          </a:xfrm>
+          <a:prstGeom prst="rect">
+            <a:avLst/>
+          </a:prstGeom>
+          <a:noFill/>
+        </p:spPr>
+        <p:txBody>
+          <a:bodyPr wrap="square" anchor="ctr" lIns="0" rIns="0" tIns="0" bIns="0">
+            <a:spAutoFit/>
+          </a:bodyPr>
+          <a:lstStyle/>
+          <a:p>
+            <a:r>
+              <a:rPr sz="1000" b="1" i="0">
+                <a:solidFill>
+                  <a:srgbClr val="6B7280"/>
+                </a:solidFill>
+                <a:latin typeface="Calibri"/>
+              </a:rPr>
+              <a:t>Fuente: </a:t>
+            </a:r>
+            <a:r>
+              <a:rPr sz="1000" b="0" i="0">
+                <a:solidFill>
+                  <a:srgbClr val="6B7280"/>
+                </a:solidFill>
+                <a:latin typeface="Calibri"/>
+              </a:rPr>
+              <a:t>Unity 6.3 Manual — Device Simulator introduction</a:t>
+            </a:r>
+          </a:p>
+        </p:txBody>
+      </p:sp>
+      <p:pic>
+        <p:nvPicPr>
+          <p:cNvPr id="9" name="Picture 8" descr="u4-simulator-plegable.png"/>
+          <p:cNvPicPr>
+            <a:picLocks noChangeAspect="1"/>
+          </p:cNvPicPr>
+          <p:nvPr/>
+        </p:nvPicPr>
+        <p:blipFill>
+          <a:blip r:embed="rId2"/>
+          <a:stretch>
+            <a:fillRect/>
+          </a:stretch>
+        </p:blipFill>
+        <p:spPr>
+          <a:xfrm>
+            <a:off x="6935060" y="1234440"/>
+            <a:ext cx="2557990" cy="4389120"/>
+          </a:xfrm>
+          <a:prstGeom prst="rect">
+            <a:avLst/>
+          </a:prstGeom>
+          <a:ln w="12700">
+            <a:solidFill>
+              <a:srgbClr val="E5E7EB"/>
+            </a:solidFill>
+          </a:ln>
+        </p:spPr>
+      </p:pic>
+      <p:sp>
+        <p:nvSpPr>
+          <p:cNvPr id="10" name="TextBox 9"/>
+          <p:cNvSpPr txBox="1"/>
+          <p:nvPr/>
+        </p:nvSpPr>
+        <p:spPr>
+          <a:xfrm>
+            <a:off x="4739335" y="5623560"/>
+            <a:ext cx="6949440" cy="365760"/>
+          </a:xfrm>
+          <a:prstGeom prst="rect">
+            <a:avLst/>
+          </a:prstGeom>
+          <a:noFill/>
+        </p:spPr>
+        <p:txBody>
+          <a:bodyPr wrap="square" anchor="ctr" lIns="0" rIns="0" tIns="0" bIns="0">
+            <a:spAutoFit/>
+          </a:bodyPr>
+          <a:lstStyle/>
+          <a:p>
+            <a:pPr algn="ctr"/>
+            <a:r>
+              <a:rPr sz="1200" b="0" i="1">
+                <a:solidFill>
+                  <a:srgbClr val="6B7280"/>
+                </a:solidFill>
+                <a:latin typeface="Calibri"/>
+              </a:rPr>
+              <a:t>Simulator con el Foldable Device (960×2658)</a:t>
+            </a:r>
+          </a:p>
+        </p:txBody>
+      </p:sp>
+      <p:sp>
+        <p:nvSpPr>
+          <p:cNvPr id="11" name="TextBox 10"/>
+          <p:cNvSpPr txBox="1"/>
+          <p:nvPr/>
+        </p:nvSpPr>
+        <p:spPr>
+          <a:xfrm>
+            <a:off x="502920" y="1234440"/>
+            <a:ext cx="3962095" cy="4754880"/>
+          </a:xfrm>
+          <a:prstGeom prst="rect">
+            <a:avLst/>
+          </a:prstGeom>
+          <a:noFill/>
+        </p:spPr>
+        <p:txBody>
+          <a:bodyPr wrap="square" anchor="t" lIns="0" rIns="0" tIns="0" bIns="0">
+            <a:spAutoFit/>
+          </a:bodyPr>
+          <a:lstStyle/>
+          <a:p>
+            <a:pPr>
+              <a:spcAft>
+                <a:spcPts val="800"/>
+              </a:spcAft>
+            </a:pPr>
+            <a:r>
+              <a:rPr sz="2200" b="1" i="0">
+                <a:solidFill>
+                  <a:srgbClr val="0D9488"/>
+                </a:solidFill>
+                <a:latin typeface="Calibri"/>
+              </a:rPr>
+              <a:t>1  </a:t>
+            </a:r>
+            <a:r>
+              <a:rPr sz="2200" b="0" i="0">
+                <a:solidFill>
+                  <a:srgbClr val="1F2937"/>
+                </a:solidFill>
+                <a:latin typeface="Calibri"/>
+              </a:rPr>
+              <a:t>Abrir la escena Scenes/Game</a:t>
+            </a:r>
+          </a:p>
+          <a:p>
+            <a:pPr>
+              <a:spcAft>
+                <a:spcPts val="800"/>
+              </a:spcAft>
+            </a:pPr>
+            <a:r>
+              <a:rPr sz="2200" b="1" i="0">
+                <a:solidFill>
+                  <a:srgbClr val="0D9488"/>
+                </a:solidFill>
+                <a:latin typeface="Calibri"/>
+              </a:rPr>
+              <a:t>2  </a:t>
+            </a:r>
+            <a:r>
+              <a:rPr sz="2200" b="0" i="0">
+                <a:solidFill>
+                  <a:srgbClr val="1F2937"/>
+                </a:solidFill>
+                <a:latin typeface="Calibri"/>
+              </a:rPr>
+              <a:t>Game → Simulator</a:t>
+            </a:r>
+          </a:p>
+          <a:p>
+            <a:pPr>
+              <a:spcAft>
+                <a:spcPts val="800"/>
+              </a:spcAft>
+            </a:pPr>
+            <a:r>
+              <a:rPr sz="2200" b="1" i="0">
+                <a:solidFill>
+                  <a:srgbClr val="0D9488"/>
+                </a:solidFill>
+                <a:latin typeface="Calibri"/>
+              </a:rPr>
+              <a:t>3  </a:t>
+            </a:r>
+            <a:r>
+              <a:rPr sz="2200" b="0" i="0">
+                <a:solidFill>
+                  <a:srgbClr val="1F2937"/>
+                </a:solidFill>
+                <a:latin typeface="Calibri"/>
+              </a:rPr>
+              <a:t>Elegir el dispositivo</a:t>
+            </a:r>
+          </a:p>
+          <a:p>
+            <a:pPr>
+              <a:spcAft>
+                <a:spcPts val="800"/>
+              </a:spcAft>
+            </a:pPr>
+            <a:r>
+              <a:rPr sz="2200" b="1" i="0">
+                <a:solidFill>
+                  <a:srgbClr val="0D9488"/>
+                </a:solidFill>
+                <a:latin typeface="Calibri"/>
+              </a:rPr>
+              <a:t>4  </a:t>
+            </a:r>
+            <a:r>
+              <a:rPr sz="2200" b="0" i="0">
+                <a:solidFill>
+                  <a:srgbClr val="1F2937"/>
+                </a:solidFill>
+                <a:latin typeface="Calibri"/>
+              </a:rPr>
+              <a:t>Play y rotar</a:t>
+            </a:r>
+          </a:p>
+        </p:txBody>
+      </p:sp>
+    </p:spTree>
+  </p:cSld>
+  <p:clrMapOvr>
+    <a:masterClrMapping/>
+  </p:clrMapOvr>
+</p:sld>
+</file>
+
+<file path=ppt/slides/slide59.xml><?xml version="1.0" encoding="utf-8"?>
+<p:sld xmlns:a="http://schemas.openxmlformats.org/drawingml/2006/main" xmlns:p="http://schemas.openxmlformats.org/presentationml/2006/main" xmlns:r="http://schemas.openxmlformats.org/officeDocument/2006/relationships">
+  <p:cSld>
+    <p:bg>
+      <p:bgPr>
+        <a:solidFill>
+          <a:srgbClr val="FFFFFF"/>
+        </a:solidFill>
+        <a:effectLst/>
+      </p:bgPr>
+    </p:bg>
+    <p:spTree>
+      <p:nvGrpSpPr>
+        <p:cNvPr id="1" name=""/>
+        <p:cNvGrpSpPr/>
+        <p:nvPr/>
+      </p:nvGrpSpPr>
+      <p:grpSpPr/>
+      <p:sp>
+        <p:nvSpPr>
+          <p:cNvPr id="2" name="Rectangle 1"/>
+          <p:cNvSpPr/>
+          <p:nvPr/>
+        </p:nvSpPr>
+        <p:spPr>
+          <a:xfrm>
+            <a:off x="0" y="0"/>
+            <a:ext cx="12191695" cy="960120"/>
+          </a:xfrm>
+          <a:prstGeom prst="rect">
+            <a:avLst/>
+          </a:prstGeom>
+          <a:solidFill>
+            <a:srgbClr val="1F2A44"/>
+          </a:solidFill>
+          <a:ln>
+            <a:noFill/>
+          </a:ln>
+          <a:effectLst/>
+        </p:spPr>
+        <p:style>
+          <a:lnRef idx="1">
+            <a:schemeClr val="accent1"/>
+          </a:lnRef>
+          <a:fillRef idx="3">
+            <a:schemeClr val="accent1"/>
+          </a:fillRef>
+          <a:effectRef idx="2">
+            <a:schemeClr val="accent1"/>
+          </a:effectRef>
+          <a:fontRef idx="minor">
+            <a:schemeClr val="lt1"/>
+          </a:fontRef>
+        </p:style>
+        <p:txBody>
+          <a:bodyPr rtlCol="0" anchor="ctr"/>
+          <a:lstStyle/>
+          <a:p>
+            <a:pPr algn="ctr"/>
+          </a:p>
+        </p:txBody>
+      </p:sp>
+      <p:sp>
+        <p:nvSpPr>
+          <p:cNvPr id="3" name="Rectangle 2"/>
+          <p:cNvSpPr/>
+          <p:nvPr/>
+        </p:nvSpPr>
+        <p:spPr>
+          <a:xfrm>
+            <a:off x="0" y="960120"/>
+            <a:ext cx="12191695" cy="38100"/>
+          </a:xfrm>
+          <a:prstGeom prst="rect">
+            <a:avLst/>
+          </a:prstGeom>
+          <a:solidFill>
+            <a:srgbClr val="0D9488"/>
+          </a:solidFill>
+          <a:ln>
+            <a:noFill/>
+          </a:ln>
+          <a:effectLst/>
+        </p:spPr>
+        <p:style>
+          <a:lnRef idx="1">
+            <a:schemeClr val="accent1"/>
+          </a:lnRef>
+          <a:fillRef idx="3">
+            <a:schemeClr val="accent1"/>
+          </a:fillRef>
+          <a:effectRef idx="2">
+            <a:schemeClr val="accent1"/>
+          </a:effectRef>
+          <a:fontRef idx="minor">
+            <a:schemeClr val="lt1"/>
+          </a:fontRef>
+        </p:style>
+        <p:txBody>
+          <a:bodyPr rtlCol="0" anchor="ctr"/>
+          <a:lstStyle/>
+          <a:p>
+            <a:pPr algn="ctr"/>
+          </a:p>
+        </p:txBody>
+      </p:sp>
+      <p:sp>
+        <p:nvSpPr>
+          <p:cNvPr id="4" name="Oval 3"/>
+          <p:cNvSpPr/>
+          <p:nvPr/>
+        </p:nvSpPr>
+        <p:spPr>
+          <a:xfrm>
+            <a:off x="274320" y="219456"/>
+            <a:ext cx="530352" cy="530352"/>
+          </a:xfrm>
+          <a:prstGeom prst="ellipse">
+            <a:avLst/>
+          </a:prstGeom>
+          <a:solidFill>
+            <a:srgbClr val="0D9488"/>
+          </a:solidFill>
+          <a:ln>
+            <a:noFill/>
+          </a:ln>
+          <a:effectLst/>
+        </p:spPr>
+        <p:style>
+          <a:lnRef idx="1">
+            <a:schemeClr val="accent1"/>
+          </a:lnRef>
+          <a:fillRef idx="3">
+            <a:schemeClr val="accent1"/>
+          </a:fillRef>
+          <a:effectRef idx="2">
+            <a:schemeClr val="accent1"/>
+          </a:effectRef>
+          <a:fontRef idx="minor">
+            <a:schemeClr val="lt1"/>
+          </a:fontRef>
+        </p:style>
+        <p:txBody>
+          <a:bodyPr rtlCol="0" anchor="ctr" lIns="0" rIns="0" tIns="0" bIns="0"/>
+          <a:lstStyle/>
+          <a:p>
+            <a:pPr algn="ctr"/>
+            <a:r>
+              <a:rPr sz="1600" b="1" i="0">
+                <a:solidFill>
+                  <a:srgbClr val="FFFFFF"/>
+                </a:solidFill>
+                <a:latin typeface="Calibri"/>
+              </a:rPr>
+              <a:t>59</a:t>
+            </a:r>
+          </a:p>
+        </p:txBody>
+      </p:sp>
+      <p:sp>
+        <p:nvSpPr>
+          <p:cNvPr id="5" name="TextBox 4"/>
+          <p:cNvSpPr txBox="1"/>
+          <p:nvPr/>
+        </p:nvSpPr>
+        <p:spPr>
+          <a:xfrm>
+            <a:off x="1005840" y="109728"/>
+            <a:ext cx="10728655" cy="777240"/>
+          </a:xfrm>
+          <a:prstGeom prst="rect">
+            <a:avLst/>
+          </a:prstGeom>
+          <a:noFill/>
+        </p:spPr>
+        <p:txBody>
+          <a:bodyPr wrap="square" anchor="ctr" lIns="0" rIns="0" tIns="0" bIns="0">
+            <a:spAutoFit/>
+          </a:bodyPr>
+          <a:lstStyle/>
+          <a:p>
+            <a:r>
+              <a:rPr sz="1100" b="1" i="0">
+                <a:solidFill>
+                  <a:srgbClr val="99F6E4"/>
+                </a:solidFill>
+                <a:latin typeface="Calibri"/>
+              </a:rPr>
+              <a:t>ANEXO · PASO 4 · PLATAFORMA</a:t>
+            </a:r>
+          </a:p>
+          <a:p>
+            <a:r>
+              <a:rPr sz="2600" b="1" i="0">
+                <a:solidFill>
+                  <a:srgbClr val="FFFFFF"/>
+                </a:solidFill>
+                <a:latin typeface="Calibri"/>
+              </a:rPr>
+              <a:t>Build Profiles</a:t>
+            </a:r>
+          </a:p>
+        </p:txBody>
+      </p:sp>
+      <p:sp>
+        <p:nvSpPr>
+          <p:cNvPr id="6" name="TextBox 5"/>
+          <p:cNvSpPr txBox="1"/>
+          <p:nvPr/>
+        </p:nvSpPr>
+        <p:spPr>
+          <a:xfrm>
+            <a:off x="502920" y="6473952"/>
+            <a:ext cx="11185855" cy="274320"/>
+          </a:xfrm>
+          <a:prstGeom prst="rect">
+            <a:avLst/>
+          </a:prstGeom>
+          <a:noFill/>
+        </p:spPr>
+        <p:txBody>
+          <a:bodyPr wrap="square" anchor="ctr" lIns="0" rIns="0" tIns="0" bIns="0">
+            <a:spAutoFit/>
+          </a:bodyPr>
+          <a:lstStyle/>
+          <a:p>
+            <a:r>
+              <a:rPr sz="1000" b="0" i="0">
+                <a:solidFill>
+                  <a:srgbClr val="6B7280"/>
+                </a:solidFill>
+                <a:latin typeface="Calibri"/>
+              </a:rPr>
+              <a:t>Diseño según Plataformas de Juego · Unidad IV · Anexo · Anexo: Android en Unity 6</a:t>
+            </a:r>
+          </a:p>
+        </p:txBody>
+      </p:sp>
+      <p:sp>
+        <p:nvSpPr>
+          <p:cNvPr id="7" name="TextBox 6"/>
+          <p:cNvSpPr txBox="1"/>
+          <p:nvPr/>
+        </p:nvSpPr>
+        <p:spPr>
+          <a:xfrm>
+            <a:off x="10774375" y="6473952"/>
+            <a:ext cx="914400" cy="274320"/>
+          </a:xfrm>
+          <a:prstGeom prst="rect">
+            <a:avLst/>
+          </a:prstGeom>
+          <a:noFill/>
+        </p:spPr>
+        <p:txBody>
+          <a:bodyPr wrap="square" anchor="ctr" lIns="0" rIns="0" tIns="0" bIns="0">
+            <a:spAutoFit/>
+          </a:bodyPr>
+          <a:lstStyle/>
+          <a:p>
+            <a:pPr algn="r"/>
+            <a:r>
+              <a:rPr sz="1000" b="0" i="0">
+                <a:solidFill>
+                  <a:srgbClr val="6B7280"/>
+                </a:solidFill>
+                <a:latin typeface="Calibri"/>
+              </a:rPr>
+              <a:t>59/63</a:t>
+            </a:r>
+          </a:p>
+        </p:txBody>
+      </p:sp>
+      <p:sp>
+        <p:nvSpPr>
+          <p:cNvPr id="8" name="TextBox 7"/>
+          <p:cNvSpPr txBox="1"/>
+          <p:nvPr/>
+        </p:nvSpPr>
+        <p:spPr>
+          <a:xfrm>
+            <a:off x="502920" y="6126480"/>
+            <a:ext cx="11185855" cy="292608"/>
+          </a:xfrm>
+          <a:prstGeom prst="rect">
+            <a:avLst/>
+          </a:prstGeom>
+          <a:noFill/>
+        </p:spPr>
+        <p:txBody>
+          <a:bodyPr wrap="square" anchor="ctr" lIns="0" rIns="0" tIns="0" bIns="0">
+            <a:spAutoFit/>
+          </a:bodyPr>
+          <a:lstStyle/>
+          <a:p>
+            <a:r>
+              <a:rPr sz="1000" b="1" i="0">
+                <a:solidFill>
+                  <a:srgbClr val="6B7280"/>
+                </a:solidFill>
+                <a:latin typeface="Calibri"/>
+              </a:rPr>
+              <a:t>Fuente: </a:t>
+            </a:r>
+            <a:r>
+              <a:rPr sz="1000" b="0" i="0">
+                <a:solidFill>
+                  <a:srgbClr val="6B7280"/>
+                </a:solidFill>
+                <a:latin typeface="Calibri"/>
+              </a:rPr>
+              <a:t>Unity 6.3 Manual — Build your application for Android</a:t>
+            </a:r>
+          </a:p>
+        </p:txBody>
+      </p:sp>
+      <p:pic>
+        <p:nvPicPr>
+          <p:cNvPr id="9" name="Picture 8" descr="u4-build-profiles-android.png"/>
+          <p:cNvPicPr>
+            <a:picLocks noChangeAspect="1"/>
+          </p:cNvPicPr>
+          <p:nvPr/>
+        </p:nvPicPr>
+        <p:blipFill>
+          <a:blip r:embed="rId2"/>
+          <a:stretch>
+            <a:fillRect/>
+          </a:stretch>
+        </p:blipFill>
+        <p:spPr>
+          <a:xfrm>
+            <a:off x="5640500" y="1234440"/>
+            <a:ext cx="5147109" cy="2125980"/>
+          </a:xfrm>
+          <a:prstGeom prst="rect">
+            <a:avLst/>
+          </a:prstGeom>
+          <a:ln w="12700">
+            <a:solidFill>
+              <a:srgbClr val="E5E7EB"/>
+            </a:solidFill>
+          </a:ln>
+        </p:spPr>
+      </p:pic>
+      <p:pic>
+        <p:nvPicPr>
+          <p:cNvPr id="10" name="Picture 9" descr="u4-switch-platform.png"/>
+          <p:cNvPicPr>
+            <a:picLocks noChangeAspect="1"/>
+          </p:cNvPicPr>
+          <p:nvPr/>
+        </p:nvPicPr>
+        <p:blipFill>
+          <a:blip r:embed="rId3"/>
+          <a:stretch>
+            <a:fillRect/>
+          </a:stretch>
+        </p:blipFill>
+        <p:spPr>
+          <a:xfrm>
+            <a:off x="5986398" y="3497580"/>
+            <a:ext cx="4455314" cy="2125980"/>
+          </a:xfrm>
+          <a:prstGeom prst="rect">
+            <a:avLst/>
+          </a:prstGeom>
+          <a:ln w="12700">
+            <a:solidFill>
+              <a:srgbClr val="E5E7EB"/>
+            </a:solidFill>
+          </a:ln>
+        </p:spPr>
+      </p:pic>
+      <p:sp>
+        <p:nvSpPr>
+          <p:cNvPr id="11" name="TextBox 10"/>
+          <p:cNvSpPr txBox="1"/>
+          <p:nvPr/>
+        </p:nvSpPr>
+        <p:spPr>
+          <a:xfrm>
+            <a:off x="4739335" y="5623560"/>
+            <a:ext cx="6949440" cy="365760"/>
+          </a:xfrm>
+          <a:prstGeom prst="rect">
+            <a:avLst/>
+          </a:prstGeom>
+          <a:noFill/>
+        </p:spPr>
+        <p:txBody>
+          <a:bodyPr wrap="square" anchor="ctr" lIns="0" rIns="0" tIns="0" bIns="0">
+            <a:spAutoFit/>
+          </a:bodyPr>
+          <a:lstStyle/>
+          <a:p>
+            <a:pPr algn="ctr"/>
+            <a:r>
+              <a:rPr sz="1200" b="0" i="1">
+                <a:solidFill>
+                  <a:srgbClr val="6B7280"/>
+                </a:solidFill>
+                <a:latin typeface="Calibri"/>
+              </a:rPr>
+              <a:t>Build Profiles con el perfil Android activo y el botón Switch Platform</a:t>
+            </a:r>
+          </a:p>
+        </p:txBody>
+      </p:sp>
+      <p:sp>
+        <p:nvSpPr>
+          <p:cNvPr id="12" name="TextBox 11"/>
+          <p:cNvSpPr txBox="1"/>
+          <p:nvPr/>
+        </p:nvSpPr>
+        <p:spPr>
+          <a:xfrm>
+            <a:off x="502920" y="1234440"/>
+            <a:ext cx="3962095" cy="4754880"/>
+          </a:xfrm>
+          <a:prstGeom prst="rect">
+            <a:avLst/>
+          </a:prstGeom>
+          <a:noFill/>
+        </p:spPr>
+        <p:txBody>
+          <a:bodyPr wrap="square" anchor="t" lIns="0" rIns="0" tIns="0" bIns="0">
+            <a:spAutoFit/>
+          </a:bodyPr>
+          <a:lstStyle/>
+          <a:p>
+            <a:pPr>
+              <a:spcAft>
+                <a:spcPts val="800"/>
+              </a:spcAft>
+            </a:pPr>
+            <a:r>
+              <a:rPr sz="2200" b="1" i="0">
+                <a:solidFill>
+                  <a:srgbClr val="0D9488"/>
+                </a:solidFill>
+                <a:latin typeface="Calibri"/>
+              </a:rPr>
+              <a:t>1  </a:t>
+            </a:r>
+            <a:r>
+              <a:rPr sz="2200" b="0" i="0">
+                <a:solidFill>
+                  <a:srgbClr val="1F2937"/>
+                </a:solidFill>
+                <a:latin typeface="Calibri"/>
+              </a:rPr>
+              <a:t>File &gt; Build Profiles</a:t>
+            </a:r>
+          </a:p>
+          <a:p>
+            <a:pPr>
+              <a:spcAft>
+                <a:spcPts val="800"/>
+              </a:spcAft>
+            </a:pPr>
+            <a:r>
+              <a:rPr sz="2200" b="1" i="0">
+                <a:solidFill>
+                  <a:srgbClr val="0D9488"/>
+                </a:solidFill>
+                <a:latin typeface="Calibri"/>
+              </a:rPr>
+              <a:t>2  </a:t>
+            </a:r>
+            <a:r>
+              <a:rPr sz="2200" b="0" i="0">
+                <a:solidFill>
+                  <a:srgbClr val="1F2937"/>
+                </a:solidFill>
+                <a:latin typeface="Calibri"/>
+              </a:rPr>
+              <a:t>Android → Switch Platform</a:t>
+            </a:r>
+          </a:p>
+          <a:p>
+            <a:pPr>
+              <a:spcAft>
+                <a:spcPts val="800"/>
+              </a:spcAft>
+            </a:pPr>
+            <a:r>
+              <a:rPr sz="2200" b="1" i="0">
+                <a:solidFill>
+                  <a:srgbClr val="0D9488"/>
+                </a:solidFill>
+                <a:latin typeface="Calibri"/>
+              </a:rPr>
+              <a:t>3  </a:t>
+            </a:r>
+            <a:r>
+              <a:rPr sz="2200" b="0" i="0">
+                <a:solidFill>
+                  <a:srgbClr val="1F2937"/>
+                </a:solidFill>
+                <a:latin typeface="Calibri"/>
+              </a:rPr>
+              <a:t>Build App Bundle: destildado</a:t>
+            </a:r>
+          </a:p>
+          <a:p>
+            <a:pPr>
+              <a:spcAft>
+                <a:spcPts val="800"/>
+              </a:spcAft>
+            </a:pPr>
+            <a:r>
+              <a:rPr sz="2200" b="1" i="0">
+                <a:solidFill>
+                  <a:srgbClr val="0D9488"/>
+                </a:solidFill>
+                <a:latin typeface="Calibri"/>
+              </a:rPr>
+              <a:t>4  </a:t>
+            </a:r>
+            <a:r>
+              <a:rPr sz="2200" b="0" i="0">
+                <a:solidFill>
+                  <a:srgbClr val="1F2937"/>
+                </a:solidFill>
+                <a:latin typeface="Calibri"/>
+              </a:rPr>
+              <a:t>Development Build: para el Profiler</a:t>
             </a:r>
           </a:p>
         </p:txBody>
@@ -44434,7 +48091,7 @@
                 </a:solidFill>
                 <a:latin typeface="Calibri"/>
               </a:rPr>
-              <a:t>6/54</a:t>
+              <a:t>6/63</a:t>
             </a:r>
           </a:p>
         </p:txBody>
@@ -45795,6 +49452,2211 @@
           </a:p>
         </p:txBody>
       </p:sp>
+    </p:spTree>
+  </p:cSld>
+  <p:clrMapOvr>
+    <a:masterClrMapping/>
+  </p:clrMapOvr>
+</p:sld>
+</file>
+
+<file path=ppt/slides/slide60.xml><?xml version="1.0" encoding="utf-8"?>
+<p:sld xmlns:a="http://schemas.openxmlformats.org/drawingml/2006/main" xmlns:p="http://schemas.openxmlformats.org/presentationml/2006/main" xmlns:r="http://schemas.openxmlformats.org/officeDocument/2006/relationships">
+  <p:cSld>
+    <p:bg>
+      <p:bgPr>
+        <a:solidFill>
+          <a:srgbClr val="FFFFFF"/>
+        </a:solidFill>
+        <a:effectLst/>
+      </p:bgPr>
+    </p:bg>
+    <p:spTree>
+      <p:nvGrpSpPr>
+        <p:cNvPr id="1" name=""/>
+        <p:cNvGrpSpPr/>
+        <p:nvPr/>
+      </p:nvGrpSpPr>
+      <p:grpSpPr/>
+      <p:sp>
+        <p:nvSpPr>
+          <p:cNvPr id="2" name="Rectangle 1"/>
+          <p:cNvSpPr/>
+          <p:nvPr/>
+        </p:nvSpPr>
+        <p:spPr>
+          <a:xfrm>
+            <a:off x="0" y="0"/>
+            <a:ext cx="12191695" cy="960120"/>
+          </a:xfrm>
+          <a:prstGeom prst="rect">
+            <a:avLst/>
+          </a:prstGeom>
+          <a:solidFill>
+            <a:srgbClr val="1F2A44"/>
+          </a:solidFill>
+          <a:ln>
+            <a:noFill/>
+          </a:ln>
+          <a:effectLst/>
+        </p:spPr>
+        <p:style>
+          <a:lnRef idx="1">
+            <a:schemeClr val="accent1"/>
+          </a:lnRef>
+          <a:fillRef idx="3">
+            <a:schemeClr val="accent1"/>
+          </a:fillRef>
+          <a:effectRef idx="2">
+            <a:schemeClr val="accent1"/>
+          </a:effectRef>
+          <a:fontRef idx="minor">
+            <a:schemeClr val="lt1"/>
+          </a:fontRef>
+        </p:style>
+        <p:txBody>
+          <a:bodyPr rtlCol="0" anchor="ctr"/>
+          <a:lstStyle/>
+          <a:p>
+            <a:pPr algn="ctr"/>
+          </a:p>
+        </p:txBody>
+      </p:sp>
+      <p:sp>
+        <p:nvSpPr>
+          <p:cNvPr id="3" name="Rectangle 2"/>
+          <p:cNvSpPr/>
+          <p:nvPr/>
+        </p:nvSpPr>
+        <p:spPr>
+          <a:xfrm>
+            <a:off x="0" y="960120"/>
+            <a:ext cx="12191695" cy="38100"/>
+          </a:xfrm>
+          <a:prstGeom prst="rect">
+            <a:avLst/>
+          </a:prstGeom>
+          <a:solidFill>
+            <a:srgbClr val="0D9488"/>
+          </a:solidFill>
+          <a:ln>
+            <a:noFill/>
+          </a:ln>
+          <a:effectLst/>
+        </p:spPr>
+        <p:style>
+          <a:lnRef idx="1">
+            <a:schemeClr val="accent1"/>
+          </a:lnRef>
+          <a:fillRef idx="3">
+            <a:schemeClr val="accent1"/>
+          </a:fillRef>
+          <a:effectRef idx="2">
+            <a:schemeClr val="accent1"/>
+          </a:effectRef>
+          <a:fontRef idx="minor">
+            <a:schemeClr val="lt1"/>
+          </a:fontRef>
+        </p:style>
+        <p:txBody>
+          <a:bodyPr rtlCol="0" anchor="ctr"/>
+          <a:lstStyle/>
+          <a:p>
+            <a:pPr algn="ctr"/>
+          </a:p>
+        </p:txBody>
+      </p:sp>
+      <p:sp>
+        <p:nvSpPr>
+          <p:cNvPr id="4" name="Oval 3"/>
+          <p:cNvSpPr/>
+          <p:nvPr/>
+        </p:nvSpPr>
+        <p:spPr>
+          <a:xfrm>
+            <a:off x="274320" y="219456"/>
+            <a:ext cx="530352" cy="530352"/>
+          </a:xfrm>
+          <a:prstGeom prst="ellipse">
+            <a:avLst/>
+          </a:prstGeom>
+          <a:solidFill>
+            <a:srgbClr val="0D9488"/>
+          </a:solidFill>
+          <a:ln>
+            <a:noFill/>
+          </a:ln>
+          <a:effectLst/>
+        </p:spPr>
+        <p:style>
+          <a:lnRef idx="1">
+            <a:schemeClr val="accent1"/>
+          </a:lnRef>
+          <a:fillRef idx="3">
+            <a:schemeClr val="accent1"/>
+          </a:fillRef>
+          <a:effectRef idx="2">
+            <a:schemeClr val="accent1"/>
+          </a:effectRef>
+          <a:fontRef idx="minor">
+            <a:schemeClr val="lt1"/>
+          </a:fontRef>
+        </p:style>
+        <p:txBody>
+          <a:bodyPr rtlCol="0" anchor="ctr" lIns="0" rIns="0" tIns="0" bIns="0"/>
+          <a:lstStyle/>
+          <a:p>
+            <a:pPr algn="ctr"/>
+            <a:r>
+              <a:rPr sz="1600" b="1" i="0">
+                <a:solidFill>
+                  <a:srgbClr val="FFFFFF"/>
+                </a:solidFill>
+                <a:latin typeface="Calibri"/>
+              </a:rPr>
+              <a:t>60</a:t>
+            </a:r>
+          </a:p>
+        </p:txBody>
+      </p:sp>
+      <p:sp>
+        <p:nvSpPr>
+          <p:cNvPr id="5" name="TextBox 4"/>
+          <p:cNvSpPr txBox="1"/>
+          <p:nvPr/>
+        </p:nvSpPr>
+        <p:spPr>
+          <a:xfrm>
+            <a:off x="1005840" y="109728"/>
+            <a:ext cx="10728655" cy="777240"/>
+          </a:xfrm>
+          <a:prstGeom prst="rect">
+            <a:avLst/>
+          </a:prstGeom>
+          <a:noFill/>
+        </p:spPr>
+        <p:txBody>
+          <a:bodyPr wrap="square" anchor="ctr" lIns="0" rIns="0" tIns="0" bIns="0">
+            <a:spAutoFit/>
+          </a:bodyPr>
+          <a:lstStyle/>
+          <a:p>
+            <a:r>
+              <a:rPr sz="1100" b="1" i="0">
+                <a:solidFill>
+                  <a:srgbClr val="99F6E4"/>
+                </a:solidFill>
+                <a:latin typeface="Calibri"/>
+              </a:rPr>
+              <a:t>ANEXO · PASO 5 · CONFIGURAR</a:t>
+            </a:r>
+          </a:p>
+          <a:p>
+            <a:r>
+              <a:rPr sz="2600" b="1" i="0">
+                <a:solidFill>
+                  <a:srgbClr val="FFFFFF"/>
+                </a:solidFill>
+                <a:latin typeface="Calibri"/>
+              </a:rPr>
+              <a:t>Player Settings: identidad y 64 bits</a:t>
+            </a:r>
+          </a:p>
+        </p:txBody>
+      </p:sp>
+      <p:sp>
+        <p:nvSpPr>
+          <p:cNvPr id="6" name="TextBox 5"/>
+          <p:cNvSpPr txBox="1"/>
+          <p:nvPr/>
+        </p:nvSpPr>
+        <p:spPr>
+          <a:xfrm>
+            <a:off x="502920" y="6473952"/>
+            <a:ext cx="11185855" cy="274320"/>
+          </a:xfrm>
+          <a:prstGeom prst="rect">
+            <a:avLst/>
+          </a:prstGeom>
+          <a:noFill/>
+        </p:spPr>
+        <p:txBody>
+          <a:bodyPr wrap="square" anchor="ctr" lIns="0" rIns="0" tIns="0" bIns="0">
+            <a:spAutoFit/>
+          </a:bodyPr>
+          <a:lstStyle/>
+          <a:p>
+            <a:r>
+              <a:rPr sz="1000" b="0" i="0">
+                <a:solidFill>
+                  <a:srgbClr val="6B7280"/>
+                </a:solidFill>
+                <a:latin typeface="Calibri"/>
+              </a:rPr>
+              <a:t>Diseño según Plataformas de Juego · Unidad IV · Anexo · Anexo: Android en Unity 6</a:t>
+            </a:r>
+          </a:p>
+        </p:txBody>
+      </p:sp>
+      <p:sp>
+        <p:nvSpPr>
+          <p:cNvPr id="7" name="TextBox 6"/>
+          <p:cNvSpPr txBox="1"/>
+          <p:nvPr/>
+        </p:nvSpPr>
+        <p:spPr>
+          <a:xfrm>
+            <a:off x="10774375" y="6473952"/>
+            <a:ext cx="914400" cy="274320"/>
+          </a:xfrm>
+          <a:prstGeom prst="rect">
+            <a:avLst/>
+          </a:prstGeom>
+          <a:noFill/>
+        </p:spPr>
+        <p:txBody>
+          <a:bodyPr wrap="square" anchor="ctr" lIns="0" rIns="0" tIns="0" bIns="0">
+            <a:spAutoFit/>
+          </a:bodyPr>
+          <a:lstStyle/>
+          <a:p>
+            <a:pPr algn="r"/>
+            <a:r>
+              <a:rPr sz="1000" b="0" i="0">
+                <a:solidFill>
+                  <a:srgbClr val="6B7280"/>
+                </a:solidFill>
+                <a:latin typeface="Calibri"/>
+              </a:rPr>
+              <a:t>60/63</a:t>
+            </a:r>
+          </a:p>
+        </p:txBody>
+      </p:sp>
+      <p:sp>
+        <p:nvSpPr>
+          <p:cNvPr id="8" name="TextBox 7"/>
+          <p:cNvSpPr txBox="1"/>
+          <p:nvPr/>
+        </p:nvSpPr>
+        <p:spPr>
+          <a:xfrm>
+            <a:off x="502920" y="6126480"/>
+            <a:ext cx="11185855" cy="292608"/>
+          </a:xfrm>
+          <a:prstGeom prst="rect">
+            <a:avLst/>
+          </a:prstGeom>
+          <a:noFill/>
+        </p:spPr>
+        <p:txBody>
+          <a:bodyPr wrap="square" anchor="ctr" lIns="0" rIns="0" tIns="0" bIns="0">
+            <a:spAutoFit/>
+          </a:bodyPr>
+          <a:lstStyle/>
+          <a:p>
+            <a:r>
+              <a:rPr sz="1000" b="1" i="0">
+                <a:solidFill>
+                  <a:srgbClr val="6B7280"/>
+                </a:solidFill>
+                <a:latin typeface="Calibri"/>
+              </a:rPr>
+              <a:t>Fuente: </a:t>
+            </a:r>
+            <a:r>
+              <a:rPr sz="1000" b="0" i="0">
+                <a:solidFill>
+                  <a:srgbClr val="6B7280"/>
+                </a:solidFill>
+                <a:latin typeface="Calibri"/>
+              </a:rPr>
+              <a:t>Unity 6.3 Manual — Android Player settings</a:t>
+            </a:r>
+          </a:p>
+        </p:txBody>
+      </p:sp>
+      <p:pic>
+        <p:nvPicPr>
+          <p:cNvPr id="9" name="Picture 8" descr="u4-player-settings-android.png"/>
+          <p:cNvPicPr>
+            <a:picLocks noChangeAspect="1"/>
+          </p:cNvPicPr>
+          <p:nvPr/>
+        </p:nvPicPr>
+        <p:blipFill>
+          <a:blip r:embed="rId2"/>
+          <a:stretch>
+            <a:fillRect/>
+          </a:stretch>
+        </p:blipFill>
+        <p:spPr>
+          <a:xfrm>
+            <a:off x="4739335" y="2227646"/>
+            <a:ext cx="6949440" cy="2402708"/>
+          </a:xfrm>
+          <a:prstGeom prst="rect">
+            <a:avLst/>
+          </a:prstGeom>
+          <a:ln w="12700">
+            <a:solidFill>
+              <a:srgbClr val="E5E7EB"/>
+            </a:solidFill>
+          </a:ln>
+        </p:spPr>
+      </p:pic>
+      <p:sp>
+        <p:nvSpPr>
+          <p:cNvPr id="10" name="TextBox 9"/>
+          <p:cNvSpPr txBox="1"/>
+          <p:nvPr/>
+        </p:nvSpPr>
+        <p:spPr>
+          <a:xfrm>
+            <a:off x="4739335" y="5623560"/>
+            <a:ext cx="6949440" cy="365760"/>
+          </a:xfrm>
+          <a:prstGeom prst="rect">
+            <a:avLst/>
+          </a:prstGeom>
+          <a:noFill/>
+        </p:spPr>
+        <p:txBody>
+          <a:bodyPr wrap="square" anchor="ctr" lIns="0" rIns="0" tIns="0" bIns="0">
+            <a:spAutoFit/>
+          </a:bodyPr>
+          <a:lstStyle/>
+          <a:p>
+            <a:pPr algn="ctr"/>
+            <a:r>
+              <a:rPr sz="1200" b="0" i="1">
+                <a:solidFill>
+                  <a:srgbClr val="6B7280"/>
+                </a:solidFill>
+                <a:latin typeface="Calibri"/>
+              </a:rPr>
+              <a:t>Other Settings antes de cambiar: Mono y ARM64 en gris</a:t>
+            </a:r>
+          </a:p>
+        </p:txBody>
+      </p:sp>
+      <p:sp>
+        <p:nvSpPr>
+          <p:cNvPr id="11" name="TextBox 10"/>
+          <p:cNvSpPr txBox="1"/>
+          <p:nvPr/>
+        </p:nvSpPr>
+        <p:spPr>
+          <a:xfrm>
+            <a:off x="502920" y="1234440"/>
+            <a:ext cx="3962095" cy="4754880"/>
+          </a:xfrm>
+          <a:prstGeom prst="rect">
+            <a:avLst/>
+          </a:prstGeom>
+          <a:noFill/>
+        </p:spPr>
+        <p:txBody>
+          <a:bodyPr wrap="square" anchor="t" lIns="0" rIns="0" tIns="0" bIns="0">
+            <a:spAutoFit/>
+          </a:bodyPr>
+          <a:lstStyle/>
+          <a:p>
+            <a:pPr>
+              <a:spcAft>
+                <a:spcPts val="800"/>
+              </a:spcAft>
+            </a:pPr>
+            <a:r>
+              <a:rPr sz="2200" b="1" i="0">
+                <a:solidFill>
+                  <a:srgbClr val="0D9488"/>
+                </a:solidFill>
+                <a:latin typeface="Calibri"/>
+              </a:rPr>
+              <a:t>1  </a:t>
+            </a:r>
+            <a:r>
+              <a:rPr sz="2200" b="0" i="0">
+                <a:solidFill>
+                  <a:srgbClr val="1F2937"/>
+                </a:solidFill>
+                <a:latin typeface="Calibri"/>
+              </a:rPr>
+              <a:t>Edit &gt; Project Settings &gt; Player</a:t>
+            </a:r>
+          </a:p>
+          <a:p>
+            <a:pPr>
+              <a:spcAft>
+                <a:spcPts val="800"/>
+              </a:spcAft>
+            </a:pPr>
+            <a:r>
+              <a:rPr sz="2200" b="1" i="0">
+                <a:solidFill>
+                  <a:srgbClr val="0D9488"/>
+                </a:solidFill>
+                <a:latin typeface="Calibri"/>
+              </a:rPr>
+              <a:t>2  </a:t>
+            </a:r>
+            <a:r>
+              <a:rPr sz="2200" b="0" i="0">
+                <a:solidFill>
+                  <a:srgbClr val="1F2937"/>
+                </a:solidFill>
+                <a:latin typeface="Calibri"/>
+              </a:rPr>
+              <a:t>Pestaña Android &gt; Other Settings</a:t>
+            </a:r>
+          </a:p>
+          <a:p>
+            <a:pPr>
+              <a:spcAft>
+                <a:spcPts val="800"/>
+              </a:spcAft>
+            </a:pPr>
+            <a:r>
+              <a:rPr sz="2200" b="1" i="0">
+                <a:solidFill>
+                  <a:srgbClr val="0D9488"/>
+                </a:solidFill>
+                <a:latin typeface="Calibri"/>
+              </a:rPr>
+              <a:t>3  </a:t>
+            </a:r>
+            <a:r>
+              <a:rPr sz="2200" b="0" i="0">
+                <a:solidFill>
+                  <a:srgbClr val="1F2937"/>
+                </a:solidFill>
+                <a:latin typeface="Calibri"/>
+              </a:rPr>
+              <a:t>Scripting Backend: IL2CPP</a:t>
+            </a:r>
+          </a:p>
+          <a:p>
+            <a:pPr>
+              <a:spcAft>
+                <a:spcPts val="800"/>
+              </a:spcAft>
+            </a:pPr>
+            <a:r>
+              <a:rPr sz="2200" b="1" i="0">
+                <a:solidFill>
+                  <a:srgbClr val="0D9488"/>
+                </a:solidFill>
+                <a:latin typeface="Calibri"/>
+              </a:rPr>
+              <a:t>4  </a:t>
+            </a:r>
+            <a:r>
+              <a:rPr sz="2200" b="0" i="0">
+                <a:solidFill>
+                  <a:srgbClr val="1F2937"/>
+                </a:solidFill>
+                <a:latin typeface="Calibri"/>
+              </a:rPr>
+              <a:t>Target Architectures: ARM64</a:t>
+            </a:r>
+          </a:p>
+        </p:txBody>
+      </p:sp>
+    </p:spTree>
+  </p:cSld>
+  <p:clrMapOvr>
+    <a:masterClrMapping/>
+  </p:clrMapOvr>
+</p:sld>
+</file>
+
+<file path=ppt/slides/slide61.xml><?xml version="1.0" encoding="utf-8"?>
+<p:sld xmlns:a="http://schemas.openxmlformats.org/drawingml/2006/main" xmlns:p="http://schemas.openxmlformats.org/presentationml/2006/main" xmlns:r="http://schemas.openxmlformats.org/officeDocument/2006/relationships">
+  <p:cSld>
+    <p:bg>
+      <p:bgPr>
+        <a:solidFill>
+          <a:srgbClr val="FFFFFF"/>
+        </a:solidFill>
+        <a:effectLst/>
+      </p:bgPr>
+    </p:bg>
+    <p:spTree>
+      <p:nvGrpSpPr>
+        <p:cNvPr id="1" name=""/>
+        <p:cNvGrpSpPr/>
+        <p:nvPr/>
+      </p:nvGrpSpPr>
+      <p:grpSpPr/>
+      <p:sp>
+        <p:nvSpPr>
+          <p:cNvPr id="2" name="Rectangle 1"/>
+          <p:cNvSpPr/>
+          <p:nvPr/>
+        </p:nvSpPr>
+        <p:spPr>
+          <a:xfrm>
+            <a:off x="0" y="0"/>
+            <a:ext cx="12191695" cy="960120"/>
+          </a:xfrm>
+          <a:prstGeom prst="rect">
+            <a:avLst/>
+          </a:prstGeom>
+          <a:solidFill>
+            <a:srgbClr val="1F2A44"/>
+          </a:solidFill>
+          <a:ln>
+            <a:noFill/>
+          </a:ln>
+          <a:effectLst/>
+        </p:spPr>
+        <p:style>
+          <a:lnRef idx="1">
+            <a:schemeClr val="accent1"/>
+          </a:lnRef>
+          <a:fillRef idx="3">
+            <a:schemeClr val="accent1"/>
+          </a:fillRef>
+          <a:effectRef idx="2">
+            <a:schemeClr val="accent1"/>
+          </a:effectRef>
+          <a:fontRef idx="minor">
+            <a:schemeClr val="lt1"/>
+          </a:fontRef>
+        </p:style>
+        <p:txBody>
+          <a:bodyPr rtlCol="0" anchor="ctr"/>
+          <a:lstStyle/>
+          <a:p>
+            <a:pPr algn="ctr"/>
+          </a:p>
+        </p:txBody>
+      </p:sp>
+      <p:sp>
+        <p:nvSpPr>
+          <p:cNvPr id="3" name="Rectangle 2"/>
+          <p:cNvSpPr/>
+          <p:nvPr/>
+        </p:nvSpPr>
+        <p:spPr>
+          <a:xfrm>
+            <a:off x="0" y="960120"/>
+            <a:ext cx="12191695" cy="38100"/>
+          </a:xfrm>
+          <a:prstGeom prst="rect">
+            <a:avLst/>
+          </a:prstGeom>
+          <a:solidFill>
+            <a:srgbClr val="0D9488"/>
+          </a:solidFill>
+          <a:ln>
+            <a:noFill/>
+          </a:ln>
+          <a:effectLst/>
+        </p:spPr>
+        <p:style>
+          <a:lnRef idx="1">
+            <a:schemeClr val="accent1"/>
+          </a:lnRef>
+          <a:fillRef idx="3">
+            <a:schemeClr val="accent1"/>
+          </a:fillRef>
+          <a:effectRef idx="2">
+            <a:schemeClr val="accent1"/>
+          </a:effectRef>
+          <a:fontRef idx="minor">
+            <a:schemeClr val="lt1"/>
+          </a:fontRef>
+        </p:style>
+        <p:txBody>
+          <a:bodyPr rtlCol="0" anchor="ctr"/>
+          <a:lstStyle/>
+          <a:p>
+            <a:pPr algn="ctr"/>
+          </a:p>
+        </p:txBody>
+      </p:sp>
+      <p:sp>
+        <p:nvSpPr>
+          <p:cNvPr id="4" name="Oval 3"/>
+          <p:cNvSpPr/>
+          <p:nvPr/>
+        </p:nvSpPr>
+        <p:spPr>
+          <a:xfrm>
+            <a:off x="274320" y="219456"/>
+            <a:ext cx="530352" cy="530352"/>
+          </a:xfrm>
+          <a:prstGeom prst="ellipse">
+            <a:avLst/>
+          </a:prstGeom>
+          <a:solidFill>
+            <a:srgbClr val="0D9488"/>
+          </a:solidFill>
+          <a:ln>
+            <a:noFill/>
+          </a:ln>
+          <a:effectLst/>
+        </p:spPr>
+        <p:style>
+          <a:lnRef idx="1">
+            <a:schemeClr val="accent1"/>
+          </a:lnRef>
+          <a:fillRef idx="3">
+            <a:schemeClr val="accent1"/>
+          </a:fillRef>
+          <a:effectRef idx="2">
+            <a:schemeClr val="accent1"/>
+          </a:effectRef>
+          <a:fontRef idx="minor">
+            <a:schemeClr val="lt1"/>
+          </a:fontRef>
+        </p:style>
+        <p:txBody>
+          <a:bodyPr rtlCol="0" anchor="ctr" lIns="0" rIns="0" tIns="0" bIns="0"/>
+          <a:lstStyle/>
+          <a:p>
+            <a:pPr algn="ctr"/>
+            <a:r>
+              <a:rPr sz="1600" b="1" i="0">
+                <a:solidFill>
+                  <a:srgbClr val="FFFFFF"/>
+                </a:solidFill>
+                <a:latin typeface="Calibri"/>
+              </a:rPr>
+              <a:t>61</a:t>
+            </a:r>
+          </a:p>
+        </p:txBody>
+      </p:sp>
+      <p:sp>
+        <p:nvSpPr>
+          <p:cNvPr id="5" name="TextBox 4"/>
+          <p:cNvSpPr txBox="1"/>
+          <p:nvPr/>
+        </p:nvSpPr>
+        <p:spPr>
+          <a:xfrm>
+            <a:off x="1005840" y="109728"/>
+            <a:ext cx="10728655" cy="777240"/>
+          </a:xfrm>
+          <a:prstGeom prst="rect">
+            <a:avLst/>
+          </a:prstGeom>
+          <a:noFill/>
+        </p:spPr>
+        <p:txBody>
+          <a:bodyPr wrap="square" anchor="ctr" lIns="0" rIns="0" tIns="0" bIns="0">
+            <a:spAutoFit/>
+          </a:bodyPr>
+          <a:lstStyle/>
+          <a:p>
+            <a:r>
+              <a:rPr sz="1100" b="1" i="0">
+                <a:solidFill>
+                  <a:srgbClr val="99F6E4"/>
+                </a:solidFill>
+                <a:latin typeface="Calibri"/>
+              </a:rPr>
+              <a:t>ANEXO · PASO 6 · PANTALLA</a:t>
+            </a:r>
+          </a:p>
+          <a:p>
+            <a:r>
+              <a:rPr sz="2600" b="1" i="0">
+                <a:solidFill>
+                  <a:srgbClr val="FFFFFF"/>
+                </a:solidFill>
+                <a:latin typeface="Calibri"/>
+              </a:rPr>
+              <a:t>Player Settings: pantalla</a:t>
+            </a:r>
+          </a:p>
+        </p:txBody>
+      </p:sp>
+      <p:sp>
+        <p:nvSpPr>
+          <p:cNvPr id="6" name="TextBox 5"/>
+          <p:cNvSpPr txBox="1"/>
+          <p:nvPr/>
+        </p:nvSpPr>
+        <p:spPr>
+          <a:xfrm>
+            <a:off x="502920" y="6473952"/>
+            <a:ext cx="11185855" cy="274320"/>
+          </a:xfrm>
+          <a:prstGeom prst="rect">
+            <a:avLst/>
+          </a:prstGeom>
+          <a:noFill/>
+        </p:spPr>
+        <p:txBody>
+          <a:bodyPr wrap="square" anchor="ctr" lIns="0" rIns="0" tIns="0" bIns="0">
+            <a:spAutoFit/>
+          </a:bodyPr>
+          <a:lstStyle/>
+          <a:p>
+            <a:r>
+              <a:rPr sz="1000" b="0" i="0">
+                <a:solidFill>
+                  <a:srgbClr val="6B7280"/>
+                </a:solidFill>
+                <a:latin typeface="Calibri"/>
+              </a:rPr>
+              <a:t>Diseño según Plataformas de Juego · Unidad IV · Anexo · Anexo: Android en Unity 6</a:t>
+            </a:r>
+          </a:p>
+        </p:txBody>
+      </p:sp>
+      <p:sp>
+        <p:nvSpPr>
+          <p:cNvPr id="7" name="TextBox 6"/>
+          <p:cNvSpPr txBox="1"/>
+          <p:nvPr/>
+        </p:nvSpPr>
+        <p:spPr>
+          <a:xfrm>
+            <a:off x="10774375" y="6473952"/>
+            <a:ext cx="914400" cy="274320"/>
+          </a:xfrm>
+          <a:prstGeom prst="rect">
+            <a:avLst/>
+          </a:prstGeom>
+          <a:noFill/>
+        </p:spPr>
+        <p:txBody>
+          <a:bodyPr wrap="square" anchor="ctr" lIns="0" rIns="0" tIns="0" bIns="0">
+            <a:spAutoFit/>
+          </a:bodyPr>
+          <a:lstStyle/>
+          <a:p>
+            <a:pPr algn="r"/>
+            <a:r>
+              <a:rPr sz="1000" b="0" i="0">
+                <a:solidFill>
+                  <a:srgbClr val="6B7280"/>
+                </a:solidFill>
+                <a:latin typeface="Calibri"/>
+              </a:rPr>
+              <a:t>61/63</a:t>
+            </a:r>
+          </a:p>
+        </p:txBody>
+      </p:sp>
+      <p:sp>
+        <p:nvSpPr>
+          <p:cNvPr id="8" name="TextBox 7"/>
+          <p:cNvSpPr txBox="1"/>
+          <p:nvPr/>
+        </p:nvSpPr>
+        <p:spPr>
+          <a:xfrm>
+            <a:off x="502920" y="6126480"/>
+            <a:ext cx="11185855" cy="292608"/>
+          </a:xfrm>
+          <a:prstGeom prst="rect">
+            <a:avLst/>
+          </a:prstGeom>
+          <a:noFill/>
+        </p:spPr>
+        <p:txBody>
+          <a:bodyPr wrap="square" anchor="ctr" lIns="0" rIns="0" tIns="0" bIns="0">
+            <a:spAutoFit/>
+          </a:bodyPr>
+          <a:lstStyle/>
+          <a:p>
+            <a:r>
+              <a:rPr sz="1000" b="1" i="0">
+                <a:solidFill>
+                  <a:srgbClr val="6B7280"/>
+                </a:solidFill>
+                <a:latin typeface="Calibri"/>
+              </a:rPr>
+              <a:t>Fuente: </a:t>
+            </a:r>
+            <a:r>
+              <a:rPr sz="1000" b="0" i="0">
+                <a:solidFill>
+                  <a:srgbClr val="6B7280"/>
+                </a:solidFill>
+                <a:latin typeface="Calibri"/>
+              </a:rPr>
+              <a:t>Unity 6.3 Manual — Android Player settings; Unity 6.3 — Screen.safeArea</a:t>
+            </a:r>
+          </a:p>
+        </p:txBody>
+      </p:sp>
+      <p:pic>
+        <p:nvPicPr>
+          <p:cNvPr id="9" name="Picture 8" descr="u4-resolution-presentation.png"/>
+          <p:cNvPicPr>
+            <a:picLocks noChangeAspect="1"/>
+          </p:cNvPicPr>
+          <p:nvPr/>
+        </p:nvPicPr>
+        <p:blipFill>
+          <a:blip r:embed="rId2"/>
+          <a:stretch>
+            <a:fillRect/>
+          </a:stretch>
+        </p:blipFill>
+        <p:spPr>
+          <a:xfrm>
+            <a:off x="5170105" y="1234440"/>
+            <a:ext cx="6087899" cy="4389120"/>
+          </a:xfrm>
+          <a:prstGeom prst="rect">
+            <a:avLst/>
+          </a:prstGeom>
+          <a:ln w="12700">
+            <a:solidFill>
+              <a:srgbClr val="E5E7EB"/>
+            </a:solidFill>
+          </a:ln>
+        </p:spPr>
+      </p:pic>
+      <p:sp>
+        <p:nvSpPr>
+          <p:cNvPr id="10" name="TextBox 9"/>
+          <p:cNvSpPr txBox="1"/>
+          <p:nvPr/>
+        </p:nvSpPr>
+        <p:spPr>
+          <a:xfrm>
+            <a:off x="4739335" y="5623560"/>
+            <a:ext cx="6949440" cy="365760"/>
+          </a:xfrm>
+          <a:prstGeom prst="rect">
+            <a:avLst/>
+          </a:prstGeom>
+          <a:noFill/>
+        </p:spPr>
+        <p:txBody>
+          <a:bodyPr wrap="square" anchor="ctr" lIns="0" rIns="0" tIns="0" bIns="0">
+            <a:spAutoFit/>
+          </a:bodyPr>
+          <a:lstStyle/>
+          <a:p>
+            <a:pPr algn="ctr"/>
+            <a:r>
+              <a:rPr sz="1200" b="0" i="1">
+                <a:solidFill>
+                  <a:srgbClr val="6B7280"/>
+                </a:solidFill>
+                <a:latin typeface="Calibri"/>
+              </a:rPr>
+              <a:t>Resolution and Presentation de Asteroides: Auto Rotation con las 4 orientaciones</a:t>
+            </a:r>
+          </a:p>
+        </p:txBody>
+      </p:sp>
+      <p:sp>
+        <p:nvSpPr>
+          <p:cNvPr id="11" name="TextBox 10"/>
+          <p:cNvSpPr txBox="1"/>
+          <p:nvPr/>
+        </p:nvSpPr>
+        <p:spPr>
+          <a:xfrm>
+            <a:off x="502920" y="1234440"/>
+            <a:ext cx="3962095" cy="4754880"/>
+          </a:xfrm>
+          <a:prstGeom prst="rect">
+            <a:avLst/>
+          </a:prstGeom>
+          <a:noFill/>
+        </p:spPr>
+        <p:txBody>
+          <a:bodyPr wrap="square" anchor="t" lIns="0" rIns="0" tIns="0" bIns="0">
+            <a:spAutoFit/>
+          </a:bodyPr>
+          <a:lstStyle/>
+          <a:p>
+            <a:pPr>
+              <a:spcAft>
+                <a:spcPts val="800"/>
+              </a:spcAft>
+            </a:pPr>
+            <a:r>
+              <a:rPr sz="2200" b="1" i="0">
+                <a:solidFill>
+                  <a:srgbClr val="0D9488"/>
+                </a:solidFill>
+                <a:latin typeface="Calibri"/>
+              </a:rPr>
+              <a:t>1  </a:t>
+            </a:r>
+            <a:r>
+              <a:rPr sz="2200" b="0" i="0">
+                <a:solidFill>
+                  <a:srgbClr val="1F2937"/>
+                </a:solidFill>
+                <a:latin typeface="Calibri"/>
+              </a:rPr>
+              <a:t>Resolution and Presentation</a:t>
+            </a:r>
+          </a:p>
+          <a:p>
+            <a:pPr>
+              <a:spcAft>
+                <a:spcPts val="800"/>
+              </a:spcAft>
+            </a:pPr>
+            <a:r>
+              <a:rPr sz="2200" b="1" i="0">
+                <a:solidFill>
+                  <a:srgbClr val="0D9488"/>
+                </a:solidFill>
+                <a:latin typeface="Calibri"/>
+              </a:rPr>
+              <a:t>2  </a:t>
+            </a:r>
+            <a:r>
+              <a:rPr sz="2200" b="0" i="0">
+                <a:solidFill>
+                  <a:srgbClr val="1F2937"/>
+                </a:solidFill>
+                <a:latin typeface="Calibri"/>
+              </a:rPr>
+              <a:t>Default Orientation: la del esquema</a:t>
+            </a:r>
+          </a:p>
+          <a:p>
+            <a:pPr>
+              <a:spcAft>
+                <a:spcPts val="800"/>
+              </a:spcAft>
+            </a:pPr>
+            <a:r>
+              <a:rPr sz="2200" b="1" i="0">
+                <a:solidFill>
+                  <a:srgbClr val="0D9488"/>
+                </a:solidFill>
+                <a:latin typeface="Calibri"/>
+              </a:rPr>
+              <a:t>3  </a:t>
+            </a:r>
+            <a:r>
+              <a:rPr sz="2200" b="0" i="0">
+                <a:solidFill>
+                  <a:srgbClr val="1F2937"/>
+                </a:solidFill>
+                <a:latin typeface="Calibri"/>
+              </a:rPr>
+              <a:t>Rotación: solo las permitidas</a:t>
+            </a:r>
+          </a:p>
+          <a:p>
+            <a:pPr>
+              <a:spcAft>
+                <a:spcPts val="800"/>
+              </a:spcAft>
+            </a:pPr>
+            <a:r>
+              <a:rPr sz="2200" b="1" i="0">
+                <a:solidFill>
+                  <a:srgbClr val="0D9488"/>
+                </a:solidFill>
+                <a:latin typeface="Calibri"/>
+              </a:rPr>
+              <a:t>4  </a:t>
+            </a:r>
+            <a:r>
+              <a:rPr sz="2200" b="0" i="0">
+                <a:solidFill>
+                  <a:srgbClr val="1F2937"/>
+                </a:solidFill>
+                <a:latin typeface="Calibri"/>
+              </a:rPr>
+              <a:t>Icon: el ícono del juego</a:t>
+            </a:r>
+          </a:p>
+        </p:txBody>
+      </p:sp>
+    </p:spTree>
+  </p:cSld>
+  <p:clrMapOvr>
+    <a:masterClrMapping/>
+  </p:clrMapOvr>
+</p:sld>
+</file>
+
+<file path=ppt/slides/slide62.xml><?xml version="1.0" encoding="utf-8"?>
+<p:sld xmlns:a="http://schemas.openxmlformats.org/drawingml/2006/main" xmlns:p="http://schemas.openxmlformats.org/presentationml/2006/main" xmlns:r="http://schemas.openxmlformats.org/officeDocument/2006/relationships">
+  <p:cSld>
+    <p:bg>
+      <p:bgPr>
+        <a:solidFill>
+          <a:srgbClr val="FFFFFF"/>
+        </a:solidFill>
+        <a:effectLst/>
+      </p:bgPr>
+    </p:bg>
+    <p:spTree>
+      <p:nvGrpSpPr>
+        <p:cNvPr id="1" name=""/>
+        <p:cNvGrpSpPr/>
+        <p:nvPr/>
+      </p:nvGrpSpPr>
+      <p:grpSpPr/>
+      <p:sp>
+        <p:nvSpPr>
+          <p:cNvPr id="2" name="Rectangle 1"/>
+          <p:cNvSpPr/>
+          <p:nvPr/>
+        </p:nvSpPr>
+        <p:spPr>
+          <a:xfrm>
+            <a:off x="0" y="0"/>
+            <a:ext cx="12191695" cy="960120"/>
+          </a:xfrm>
+          <a:prstGeom prst="rect">
+            <a:avLst/>
+          </a:prstGeom>
+          <a:solidFill>
+            <a:srgbClr val="1F2A44"/>
+          </a:solidFill>
+          <a:ln>
+            <a:noFill/>
+          </a:ln>
+          <a:effectLst/>
+        </p:spPr>
+        <p:style>
+          <a:lnRef idx="1">
+            <a:schemeClr val="accent1"/>
+          </a:lnRef>
+          <a:fillRef idx="3">
+            <a:schemeClr val="accent1"/>
+          </a:fillRef>
+          <a:effectRef idx="2">
+            <a:schemeClr val="accent1"/>
+          </a:effectRef>
+          <a:fontRef idx="minor">
+            <a:schemeClr val="lt1"/>
+          </a:fontRef>
+        </p:style>
+        <p:txBody>
+          <a:bodyPr rtlCol="0" anchor="ctr"/>
+          <a:lstStyle/>
+          <a:p>
+            <a:pPr algn="ctr"/>
+          </a:p>
+        </p:txBody>
+      </p:sp>
+      <p:sp>
+        <p:nvSpPr>
+          <p:cNvPr id="3" name="Rectangle 2"/>
+          <p:cNvSpPr/>
+          <p:nvPr/>
+        </p:nvSpPr>
+        <p:spPr>
+          <a:xfrm>
+            <a:off x="0" y="960120"/>
+            <a:ext cx="12191695" cy="38100"/>
+          </a:xfrm>
+          <a:prstGeom prst="rect">
+            <a:avLst/>
+          </a:prstGeom>
+          <a:solidFill>
+            <a:srgbClr val="0D9488"/>
+          </a:solidFill>
+          <a:ln>
+            <a:noFill/>
+          </a:ln>
+          <a:effectLst/>
+        </p:spPr>
+        <p:style>
+          <a:lnRef idx="1">
+            <a:schemeClr val="accent1"/>
+          </a:lnRef>
+          <a:fillRef idx="3">
+            <a:schemeClr val="accent1"/>
+          </a:fillRef>
+          <a:effectRef idx="2">
+            <a:schemeClr val="accent1"/>
+          </a:effectRef>
+          <a:fontRef idx="minor">
+            <a:schemeClr val="lt1"/>
+          </a:fontRef>
+        </p:style>
+        <p:txBody>
+          <a:bodyPr rtlCol="0" anchor="ctr"/>
+          <a:lstStyle/>
+          <a:p>
+            <a:pPr algn="ctr"/>
+          </a:p>
+        </p:txBody>
+      </p:sp>
+      <p:sp>
+        <p:nvSpPr>
+          <p:cNvPr id="4" name="Oval 3"/>
+          <p:cNvSpPr/>
+          <p:nvPr/>
+        </p:nvSpPr>
+        <p:spPr>
+          <a:xfrm>
+            <a:off x="274320" y="219456"/>
+            <a:ext cx="530352" cy="530352"/>
+          </a:xfrm>
+          <a:prstGeom prst="ellipse">
+            <a:avLst/>
+          </a:prstGeom>
+          <a:solidFill>
+            <a:srgbClr val="0D9488"/>
+          </a:solidFill>
+          <a:ln>
+            <a:noFill/>
+          </a:ln>
+          <a:effectLst/>
+        </p:spPr>
+        <p:style>
+          <a:lnRef idx="1">
+            <a:schemeClr val="accent1"/>
+          </a:lnRef>
+          <a:fillRef idx="3">
+            <a:schemeClr val="accent1"/>
+          </a:fillRef>
+          <a:effectRef idx="2">
+            <a:schemeClr val="accent1"/>
+          </a:effectRef>
+          <a:fontRef idx="minor">
+            <a:schemeClr val="lt1"/>
+          </a:fontRef>
+        </p:style>
+        <p:txBody>
+          <a:bodyPr rtlCol="0" anchor="ctr" lIns="0" rIns="0" tIns="0" bIns="0"/>
+          <a:lstStyle/>
+          <a:p>
+            <a:pPr algn="ctr"/>
+            <a:r>
+              <a:rPr sz="1600" b="1" i="0">
+                <a:solidFill>
+                  <a:srgbClr val="FFFFFF"/>
+                </a:solidFill>
+                <a:latin typeface="Calibri"/>
+              </a:rPr>
+              <a:t>62</a:t>
+            </a:r>
+          </a:p>
+        </p:txBody>
+      </p:sp>
+      <p:sp>
+        <p:nvSpPr>
+          <p:cNvPr id="5" name="TextBox 4"/>
+          <p:cNvSpPr txBox="1"/>
+          <p:nvPr/>
+        </p:nvSpPr>
+        <p:spPr>
+          <a:xfrm>
+            <a:off x="1005840" y="109728"/>
+            <a:ext cx="10728655" cy="777240"/>
+          </a:xfrm>
+          <a:prstGeom prst="rect">
+            <a:avLst/>
+          </a:prstGeom>
+          <a:noFill/>
+        </p:spPr>
+        <p:txBody>
+          <a:bodyPr wrap="square" anchor="ctr" lIns="0" rIns="0" tIns="0" bIns="0">
+            <a:spAutoFit/>
+          </a:bodyPr>
+          <a:lstStyle/>
+          <a:p>
+            <a:r>
+              <a:rPr sz="1100" b="1" i="0">
+                <a:solidFill>
+                  <a:srgbClr val="99F6E4"/>
+                </a:solidFill>
+                <a:latin typeface="Calibri"/>
+              </a:rPr>
+              <a:t>ANEXO · PASO 7 · INSTALAR</a:t>
+            </a:r>
+          </a:p>
+          <a:p>
+            <a:r>
+              <a:rPr sz="2600" b="1" i="0">
+                <a:solidFill>
+                  <a:srgbClr val="FFFFFF"/>
+                </a:solidFill>
+                <a:latin typeface="Calibri"/>
+              </a:rPr>
+              <a:t>Build e instalación</a:t>
+            </a:r>
+          </a:p>
+        </p:txBody>
+      </p:sp>
+      <p:sp>
+        <p:nvSpPr>
+          <p:cNvPr id="6" name="TextBox 5"/>
+          <p:cNvSpPr txBox="1"/>
+          <p:nvPr/>
+        </p:nvSpPr>
+        <p:spPr>
+          <a:xfrm>
+            <a:off x="502920" y="6473952"/>
+            <a:ext cx="11185855" cy="274320"/>
+          </a:xfrm>
+          <a:prstGeom prst="rect">
+            <a:avLst/>
+          </a:prstGeom>
+          <a:noFill/>
+        </p:spPr>
+        <p:txBody>
+          <a:bodyPr wrap="square" anchor="ctr" lIns="0" rIns="0" tIns="0" bIns="0">
+            <a:spAutoFit/>
+          </a:bodyPr>
+          <a:lstStyle/>
+          <a:p>
+            <a:r>
+              <a:rPr sz="1000" b="0" i="0">
+                <a:solidFill>
+                  <a:srgbClr val="6B7280"/>
+                </a:solidFill>
+                <a:latin typeface="Calibri"/>
+              </a:rPr>
+              <a:t>Diseño según Plataformas de Juego · Unidad IV · Anexo · Anexo: Android en Unity 6</a:t>
+            </a:r>
+          </a:p>
+        </p:txBody>
+      </p:sp>
+      <p:sp>
+        <p:nvSpPr>
+          <p:cNvPr id="7" name="TextBox 6"/>
+          <p:cNvSpPr txBox="1"/>
+          <p:nvPr/>
+        </p:nvSpPr>
+        <p:spPr>
+          <a:xfrm>
+            <a:off x="10774375" y="6473952"/>
+            <a:ext cx="914400" cy="274320"/>
+          </a:xfrm>
+          <a:prstGeom prst="rect">
+            <a:avLst/>
+          </a:prstGeom>
+          <a:noFill/>
+        </p:spPr>
+        <p:txBody>
+          <a:bodyPr wrap="square" anchor="ctr" lIns="0" rIns="0" tIns="0" bIns="0">
+            <a:spAutoFit/>
+          </a:bodyPr>
+          <a:lstStyle/>
+          <a:p>
+            <a:pPr algn="r"/>
+            <a:r>
+              <a:rPr sz="1000" b="0" i="0">
+                <a:solidFill>
+                  <a:srgbClr val="6B7280"/>
+                </a:solidFill>
+                <a:latin typeface="Calibri"/>
+              </a:rPr>
+              <a:t>62/63</a:t>
+            </a:r>
+          </a:p>
+        </p:txBody>
+      </p:sp>
+      <p:sp>
+        <p:nvSpPr>
+          <p:cNvPr id="8" name="TextBox 7"/>
+          <p:cNvSpPr txBox="1"/>
+          <p:nvPr/>
+        </p:nvSpPr>
+        <p:spPr>
+          <a:xfrm>
+            <a:off x="502920" y="6126480"/>
+            <a:ext cx="11185855" cy="292608"/>
+          </a:xfrm>
+          <a:prstGeom prst="rect">
+            <a:avLst/>
+          </a:prstGeom>
+          <a:noFill/>
+        </p:spPr>
+        <p:txBody>
+          <a:bodyPr wrap="square" anchor="ctr" lIns="0" rIns="0" tIns="0" bIns="0">
+            <a:spAutoFit/>
+          </a:bodyPr>
+          <a:lstStyle/>
+          <a:p>
+            <a:r>
+              <a:rPr sz="1000" b="1" i="0">
+                <a:solidFill>
+                  <a:srgbClr val="6B7280"/>
+                </a:solidFill>
+                <a:latin typeface="Calibri"/>
+              </a:rPr>
+              <a:t>Fuente: </a:t>
+            </a:r>
+            <a:r>
+              <a:rPr sz="1000" b="0" i="0">
+                <a:solidFill>
+                  <a:srgbClr val="6B7280"/>
+                </a:solidFill>
+                <a:latin typeface="Calibri"/>
+              </a:rPr>
+              <a:t>Unity 6.3 Manual — Build your application for Android</a:t>
+            </a:r>
+          </a:p>
+        </p:txBody>
+      </p:sp>
+      <p:pic>
+        <p:nvPicPr>
+          <p:cNvPr id="9" name="Picture 8" descr="u4-build-botones.png"/>
+          <p:cNvPicPr>
+            <a:picLocks noChangeAspect="1"/>
+          </p:cNvPicPr>
+          <p:nvPr/>
+        </p:nvPicPr>
+        <p:blipFill>
+          <a:blip r:embed="rId2"/>
+          <a:stretch>
+            <a:fillRect/>
+          </a:stretch>
+        </p:blipFill>
+        <p:spPr>
+          <a:xfrm>
+            <a:off x="4739335" y="3163034"/>
+            <a:ext cx="6949440" cy="531932"/>
+          </a:xfrm>
+          <a:prstGeom prst="rect">
+            <a:avLst/>
+          </a:prstGeom>
+          <a:ln w="12700">
+            <a:solidFill>
+              <a:srgbClr val="E5E7EB"/>
+            </a:solidFill>
+          </a:ln>
+        </p:spPr>
+      </p:pic>
+      <p:sp>
+        <p:nvSpPr>
+          <p:cNvPr id="10" name="TextBox 9"/>
+          <p:cNvSpPr txBox="1"/>
+          <p:nvPr/>
+        </p:nvSpPr>
+        <p:spPr>
+          <a:xfrm>
+            <a:off x="4739335" y="5623560"/>
+            <a:ext cx="6949440" cy="365760"/>
+          </a:xfrm>
+          <a:prstGeom prst="rect">
+            <a:avLst/>
+          </a:prstGeom>
+          <a:noFill/>
+        </p:spPr>
+        <p:txBody>
+          <a:bodyPr wrap="square" anchor="ctr" lIns="0" rIns="0" tIns="0" bIns="0">
+            <a:spAutoFit/>
+          </a:bodyPr>
+          <a:lstStyle/>
+          <a:p>
+            <a:pPr algn="ctr"/>
+            <a:r>
+              <a:rPr sz="1200" b="0" i="1">
+                <a:solidFill>
+                  <a:srgbClr val="6B7280"/>
+                </a:solidFill>
+                <a:latin typeface="Calibri"/>
+              </a:rPr>
+              <a:t>Abajo a la derecha de Build Profiles: Build (marcado) y Build And Run</a:t>
+            </a:r>
+          </a:p>
+        </p:txBody>
+      </p:sp>
+      <p:sp>
+        <p:nvSpPr>
+          <p:cNvPr id="11" name="TextBox 10"/>
+          <p:cNvSpPr txBox="1"/>
+          <p:nvPr/>
+        </p:nvSpPr>
+        <p:spPr>
+          <a:xfrm>
+            <a:off x="502920" y="1234440"/>
+            <a:ext cx="3962095" cy="4754880"/>
+          </a:xfrm>
+          <a:prstGeom prst="rect">
+            <a:avLst/>
+          </a:prstGeom>
+          <a:noFill/>
+        </p:spPr>
+        <p:txBody>
+          <a:bodyPr wrap="square" anchor="t" lIns="0" rIns="0" tIns="0" bIns="0">
+            <a:spAutoFit/>
+          </a:bodyPr>
+          <a:lstStyle/>
+          <a:p>
+            <a:pPr>
+              <a:spcAft>
+                <a:spcPts val="800"/>
+              </a:spcAft>
+            </a:pPr>
+            <a:r>
+              <a:rPr sz="2200" b="1" i="0">
+                <a:solidFill>
+                  <a:srgbClr val="0D9488"/>
+                </a:solidFill>
+                <a:latin typeface="Calibri"/>
+              </a:rPr>
+              <a:t>1  </a:t>
+            </a:r>
+            <a:r>
+              <a:rPr sz="2200" b="0" i="0">
+                <a:solidFill>
+                  <a:srgbClr val="1F2937"/>
+                </a:solidFill>
+                <a:latin typeface="Calibri"/>
+              </a:rPr>
+              <a:t>Build → Builds/AsteroideTest.apk</a:t>
+            </a:r>
+          </a:p>
+          <a:p>
+            <a:pPr>
+              <a:spcAft>
+                <a:spcPts val="800"/>
+              </a:spcAft>
+            </a:pPr>
+            <a:r>
+              <a:rPr sz="2200" b="1" i="0">
+                <a:solidFill>
+                  <a:srgbClr val="0D9488"/>
+                </a:solidFill>
+                <a:latin typeface="Calibri"/>
+              </a:rPr>
+              <a:t>2  </a:t>
+            </a:r>
+            <a:r>
+              <a:rPr sz="2200" b="0" i="0">
+                <a:solidFill>
+                  <a:srgbClr val="1F2937"/>
+                </a:solidFill>
+                <a:latin typeface="Calibri"/>
+              </a:rPr>
+              <a:t>Copiar el .apk al teléfono y abrirlo</a:t>
+            </a:r>
+          </a:p>
+          <a:p>
+            <a:pPr>
+              <a:spcAft>
+                <a:spcPts val="800"/>
+              </a:spcAft>
+            </a:pPr>
+            <a:r>
+              <a:rPr sz="2200" b="1" i="0">
+                <a:solidFill>
+                  <a:srgbClr val="0D9488"/>
+                </a:solidFill>
+                <a:latin typeface="Calibri"/>
+              </a:rPr>
+              <a:t>3  </a:t>
+            </a:r>
+            <a:r>
+              <a:rPr sz="2200" b="0" i="0">
+                <a:solidFill>
+                  <a:srgbClr val="1F2937"/>
+                </a:solidFill>
+                <a:latin typeface="Calibri"/>
+              </a:rPr>
+              <a:t>Aceptar "fuentes desconocidas"</a:t>
+            </a:r>
+          </a:p>
+          <a:p>
+            <a:pPr>
+              <a:spcAft>
+                <a:spcPts val="800"/>
+              </a:spcAft>
+            </a:pPr>
+            <a:r>
+              <a:rPr sz="2200" b="1" i="0">
+                <a:solidFill>
+                  <a:srgbClr val="0D9488"/>
+                </a:solidFill>
+                <a:latin typeface="Calibri"/>
+              </a:rPr>
+              <a:t>4  </a:t>
+            </a:r>
+            <a:r>
+              <a:rPr sz="2200" b="0" i="0">
+                <a:solidFill>
+                  <a:srgbClr val="1F2937"/>
+                </a:solidFill>
+                <a:latin typeface="Calibri"/>
+              </a:rPr>
+              <a:t>Con cable: adb install -r</a:t>
+            </a:r>
+          </a:p>
+        </p:txBody>
+      </p:sp>
+    </p:spTree>
+  </p:cSld>
+  <p:clrMapOvr>
+    <a:masterClrMapping/>
+  </p:clrMapOvr>
+</p:sld>
+</file>
+
+<file path=ppt/slides/slide63.xml><?xml version="1.0" encoding="utf-8"?>
+<p:sld xmlns:a="http://schemas.openxmlformats.org/drawingml/2006/main" xmlns:p="http://schemas.openxmlformats.org/presentationml/2006/main" xmlns:r="http://schemas.openxmlformats.org/officeDocument/2006/relationships">
+  <p:cSld>
+    <p:bg>
+      <p:bgPr>
+        <a:solidFill>
+          <a:srgbClr val="FFFFFF"/>
+        </a:solidFill>
+        <a:effectLst/>
+      </p:bgPr>
+    </p:bg>
+    <p:spTree>
+      <p:nvGrpSpPr>
+        <p:cNvPr id="1" name=""/>
+        <p:cNvGrpSpPr/>
+        <p:nvPr/>
+      </p:nvGrpSpPr>
+      <p:grpSpPr/>
+      <p:sp>
+        <p:nvSpPr>
+          <p:cNvPr id="2" name="Rectangle 1"/>
+          <p:cNvSpPr/>
+          <p:nvPr/>
+        </p:nvSpPr>
+        <p:spPr>
+          <a:xfrm>
+            <a:off x="0" y="0"/>
+            <a:ext cx="12191695" cy="960120"/>
+          </a:xfrm>
+          <a:prstGeom prst="rect">
+            <a:avLst/>
+          </a:prstGeom>
+          <a:solidFill>
+            <a:srgbClr val="1F2A44"/>
+          </a:solidFill>
+          <a:ln>
+            <a:noFill/>
+          </a:ln>
+          <a:effectLst/>
+        </p:spPr>
+        <p:style>
+          <a:lnRef idx="1">
+            <a:schemeClr val="accent1"/>
+          </a:lnRef>
+          <a:fillRef idx="3">
+            <a:schemeClr val="accent1"/>
+          </a:fillRef>
+          <a:effectRef idx="2">
+            <a:schemeClr val="accent1"/>
+          </a:effectRef>
+          <a:fontRef idx="minor">
+            <a:schemeClr val="lt1"/>
+          </a:fontRef>
+        </p:style>
+        <p:txBody>
+          <a:bodyPr rtlCol="0" anchor="ctr"/>
+          <a:lstStyle/>
+          <a:p>
+            <a:pPr algn="ctr"/>
+          </a:p>
+        </p:txBody>
+      </p:sp>
+      <p:sp>
+        <p:nvSpPr>
+          <p:cNvPr id="3" name="Rectangle 2"/>
+          <p:cNvSpPr/>
+          <p:nvPr/>
+        </p:nvSpPr>
+        <p:spPr>
+          <a:xfrm>
+            <a:off x="0" y="960120"/>
+            <a:ext cx="12191695" cy="38100"/>
+          </a:xfrm>
+          <a:prstGeom prst="rect">
+            <a:avLst/>
+          </a:prstGeom>
+          <a:solidFill>
+            <a:srgbClr val="0D9488"/>
+          </a:solidFill>
+          <a:ln>
+            <a:noFill/>
+          </a:ln>
+          <a:effectLst/>
+        </p:spPr>
+        <p:style>
+          <a:lnRef idx="1">
+            <a:schemeClr val="accent1"/>
+          </a:lnRef>
+          <a:fillRef idx="3">
+            <a:schemeClr val="accent1"/>
+          </a:fillRef>
+          <a:effectRef idx="2">
+            <a:schemeClr val="accent1"/>
+          </a:effectRef>
+          <a:fontRef idx="minor">
+            <a:schemeClr val="lt1"/>
+          </a:fontRef>
+        </p:style>
+        <p:txBody>
+          <a:bodyPr rtlCol="0" anchor="ctr"/>
+          <a:lstStyle/>
+          <a:p>
+            <a:pPr algn="ctr"/>
+          </a:p>
+        </p:txBody>
+      </p:sp>
+      <p:sp>
+        <p:nvSpPr>
+          <p:cNvPr id="4" name="Oval 3"/>
+          <p:cNvSpPr/>
+          <p:nvPr/>
+        </p:nvSpPr>
+        <p:spPr>
+          <a:xfrm>
+            <a:off x="274320" y="219456"/>
+            <a:ext cx="530352" cy="530352"/>
+          </a:xfrm>
+          <a:prstGeom prst="ellipse">
+            <a:avLst/>
+          </a:prstGeom>
+          <a:solidFill>
+            <a:srgbClr val="0D9488"/>
+          </a:solidFill>
+          <a:ln>
+            <a:noFill/>
+          </a:ln>
+          <a:effectLst/>
+        </p:spPr>
+        <p:style>
+          <a:lnRef idx="1">
+            <a:schemeClr val="accent1"/>
+          </a:lnRef>
+          <a:fillRef idx="3">
+            <a:schemeClr val="accent1"/>
+          </a:fillRef>
+          <a:effectRef idx="2">
+            <a:schemeClr val="accent1"/>
+          </a:effectRef>
+          <a:fontRef idx="minor">
+            <a:schemeClr val="lt1"/>
+          </a:fontRef>
+        </p:style>
+        <p:txBody>
+          <a:bodyPr rtlCol="0" anchor="ctr" lIns="0" rIns="0" tIns="0" bIns="0"/>
+          <a:lstStyle/>
+          <a:p>
+            <a:pPr algn="ctr"/>
+            <a:r>
+              <a:rPr sz="1600" b="1" i="0">
+                <a:solidFill>
+                  <a:srgbClr val="FFFFFF"/>
+                </a:solidFill>
+                <a:latin typeface="Calibri"/>
+              </a:rPr>
+              <a:t>63</a:t>
+            </a:r>
+          </a:p>
+        </p:txBody>
+      </p:sp>
+      <p:sp>
+        <p:nvSpPr>
+          <p:cNvPr id="5" name="TextBox 4"/>
+          <p:cNvSpPr txBox="1"/>
+          <p:nvPr/>
+        </p:nvSpPr>
+        <p:spPr>
+          <a:xfrm>
+            <a:off x="1005840" y="109728"/>
+            <a:ext cx="10728655" cy="777240"/>
+          </a:xfrm>
+          <a:prstGeom prst="rect">
+            <a:avLst/>
+          </a:prstGeom>
+          <a:noFill/>
+        </p:spPr>
+        <p:txBody>
+          <a:bodyPr wrap="square" anchor="ctr" lIns="0" rIns="0" tIns="0" bIns="0">
+            <a:spAutoFit/>
+          </a:bodyPr>
+          <a:lstStyle/>
+          <a:p>
+            <a:r>
+              <a:rPr sz="1100" b="1" i="0">
+                <a:solidFill>
+                  <a:srgbClr val="99F6E4"/>
+                </a:solidFill>
+                <a:latin typeface="Calibri"/>
+              </a:rPr>
+              <a:t>ANEXO · PASO 8 · CUANDO ALGO FALLA</a:t>
+            </a:r>
+          </a:p>
+          <a:p>
+            <a:r>
+              <a:rPr sz="2600" b="1" i="0">
+                <a:solidFill>
+                  <a:srgbClr val="FFFFFF"/>
+                </a:solidFill>
+                <a:latin typeface="Calibri"/>
+              </a:rPr>
+              <a:t>Diagnóstico rápido</a:t>
+            </a:r>
+          </a:p>
+        </p:txBody>
+      </p:sp>
+      <p:sp>
+        <p:nvSpPr>
+          <p:cNvPr id="6" name="TextBox 5"/>
+          <p:cNvSpPr txBox="1"/>
+          <p:nvPr/>
+        </p:nvSpPr>
+        <p:spPr>
+          <a:xfrm>
+            <a:off x="502920" y="6473952"/>
+            <a:ext cx="11185855" cy="274320"/>
+          </a:xfrm>
+          <a:prstGeom prst="rect">
+            <a:avLst/>
+          </a:prstGeom>
+          <a:noFill/>
+        </p:spPr>
+        <p:txBody>
+          <a:bodyPr wrap="square" anchor="ctr" lIns="0" rIns="0" tIns="0" bIns="0">
+            <a:spAutoFit/>
+          </a:bodyPr>
+          <a:lstStyle/>
+          <a:p>
+            <a:r>
+              <a:rPr sz="1000" b="0" i="0">
+                <a:solidFill>
+                  <a:srgbClr val="6B7280"/>
+                </a:solidFill>
+                <a:latin typeface="Calibri"/>
+              </a:rPr>
+              <a:t>Diseño según Plataformas de Juego · Unidad IV · Anexo · Anexo: Android en Unity 6</a:t>
+            </a:r>
+          </a:p>
+        </p:txBody>
+      </p:sp>
+      <p:sp>
+        <p:nvSpPr>
+          <p:cNvPr id="7" name="TextBox 6"/>
+          <p:cNvSpPr txBox="1"/>
+          <p:nvPr/>
+        </p:nvSpPr>
+        <p:spPr>
+          <a:xfrm>
+            <a:off x="10774375" y="6473952"/>
+            <a:ext cx="914400" cy="274320"/>
+          </a:xfrm>
+          <a:prstGeom prst="rect">
+            <a:avLst/>
+          </a:prstGeom>
+          <a:noFill/>
+        </p:spPr>
+        <p:txBody>
+          <a:bodyPr wrap="square" anchor="ctr" lIns="0" rIns="0" tIns="0" bIns="0">
+            <a:spAutoFit/>
+          </a:bodyPr>
+          <a:lstStyle/>
+          <a:p>
+            <a:pPr algn="r"/>
+            <a:r>
+              <a:rPr sz="1000" b="0" i="0">
+                <a:solidFill>
+                  <a:srgbClr val="6B7280"/>
+                </a:solidFill>
+                <a:latin typeface="Calibri"/>
+              </a:rPr>
+              <a:t>63/63</a:t>
+            </a:r>
+          </a:p>
+        </p:txBody>
+      </p:sp>
+      <p:sp>
+        <p:nvSpPr>
+          <p:cNvPr id="8" name="TextBox 7"/>
+          <p:cNvSpPr txBox="1"/>
+          <p:nvPr/>
+        </p:nvSpPr>
+        <p:spPr>
+          <a:xfrm>
+            <a:off x="502920" y="6126480"/>
+            <a:ext cx="11185855" cy="292608"/>
+          </a:xfrm>
+          <a:prstGeom prst="rect">
+            <a:avLst/>
+          </a:prstGeom>
+          <a:noFill/>
+        </p:spPr>
+        <p:txBody>
+          <a:bodyPr wrap="square" anchor="ctr" lIns="0" rIns="0" tIns="0" bIns="0">
+            <a:spAutoFit/>
+          </a:bodyPr>
+          <a:lstStyle/>
+          <a:p>
+            <a:r>
+              <a:rPr sz="1000" b="1" i="0">
+                <a:solidFill>
+                  <a:srgbClr val="6B7280"/>
+                </a:solidFill>
+                <a:latin typeface="Calibri"/>
+              </a:rPr>
+              <a:t>Fuente: </a:t>
+            </a:r>
+            <a:r>
+              <a:rPr sz="1000" b="0" i="0">
+                <a:solidFill>
+                  <a:srgbClr val="6B7280"/>
+                </a:solidFill>
+                <a:latin typeface="Calibri"/>
+              </a:rPr>
+              <a:t>Unity 6.3 Manual — Android Player settings; Debug on Android devices</a:t>
+            </a:r>
+          </a:p>
+        </p:txBody>
+      </p:sp>
+      <p:graphicFrame>
+        <p:nvGraphicFramePr>
+          <p:cNvPr id="9" name="Table 8"/>
+          <p:cNvGraphicFramePr>
+            <a:graphicFrameLocks noGrp="1"/>
+          </p:cNvGraphicFramePr>
+          <p:nvPr/>
+        </p:nvGraphicFramePr>
+        <p:xfrm>
+          <a:off x="502920" y="1234440"/>
+          <a:ext cx="11185854" cy="3968496"/>
+        </p:xfrm>
+        <a:graphic>
+          <a:graphicData uri="http://schemas.openxmlformats.org/drawingml/2006/table">
+            <a:tbl>
+              <a:tblPr firstRow="1" bandRow="1">
+                <a:tableStyleId>{5C22544A-7EE6-4342-B048-85BDC9FD1C3A}</a:tableStyleId>
+              </a:tblPr>
+              <a:tblGrid>
+                <a:gridCol w="5655769"/>
+                <a:gridCol w="5530085"/>
+              </a:tblGrid>
+              <a:tr h="566928">
+                <a:tc>
+                  <a:txBody>
+                    <a:bodyPr wrap="square"/>
+                    <a:lstStyle/>
+                    <a:p>
+                      <a:r>
+                        <a:rPr sz="1200" b="1" i="0">
+                          <a:solidFill>
+                            <a:srgbClr val="FFFFFF"/>
+                          </a:solidFill>
+                          <a:latin typeface="Calibri"/>
+                        </a:rPr>
+                        <a:t>Síntoma</a:t>
+                      </a:r>
+                    </a:p>
+                  </a:txBody>
+                  <a:tcPr marL="73152" marR="73152" marT="36576" marB="36576" anchor="ctr">
+                    <a:solidFill>
+                      <a:srgbClr val="0D9488"/>
+                    </a:solidFill>
+                  </a:tcPr>
+                </a:tc>
+                <a:tc>
+                  <a:txBody>
+                    <a:bodyPr wrap="square"/>
+                    <a:lstStyle/>
+                    <a:p>
+                      <a:r>
+                        <a:rPr sz="1200" b="1" i="0">
+                          <a:solidFill>
+                            <a:srgbClr val="FFFFFF"/>
+                          </a:solidFill>
+                          <a:latin typeface="Calibri"/>
+                        </a:rPr>
+                        <a:t>Qué hacer</a:t>
+                      </a:r>
+                    </a:p>
+                  </a:txBody>
+                  <a:tcPr marL="73152" marR="73152" marT="36576" marB="36576" anchor="ctr">
+                    <a:solidFill>
+                      <a:srgbClr val="0D9488"/>
+                    </a:solidFill>
+                  </a:tcPr>
+                </a:tc>
+              </a:tr>
+              <a:tr h="566928">
+                <a:tc>
+                  <a:txBody>
+                    <a:bodyPr wrap="square"/>
+                    <a:lstStyle/>
+                    <a:p>
+                      <a:r>
+                        <a:rPr sz="1200" b="0" i="0">
+                          <a:solidFill>
+                            <a:srgbClr val="1F2937"/>
+                          </a:solidFill>
+                          <a:latin typeface="Calibri"/>
+                        </a:rPr>
+                        <a:t>"Unsupported Input Handling on Android"</a:t>
+                      </a:r>
+                    </a:p>
+                  </a:txBody>
+                  <a:tcPr marL="73152" marR="73152" marT="36576" marB="36576" anchor="ctr">
+                    <a:solidFill>
+                      <a:srgbClr val="FFFFFF"/>
+                    </a:solidFill>
+                  </a:tcPr>
+                </a:tc>
+                <a:tc>
+                  <a:txBody>
+                    <a:bodyPr wrap="square"/>
+                    <a:lstStyle/>
+                    <a:p>
+                      <a:r>
+                        <a:rPr sz="1200" b="0" i="0">
+                          <a:solidFill>
+                            <a:srgbClr val="1F2937"/>
+                          </a:solidFill>
+                          <a:latin typeface="Calibri"/>
+                        </a:rPr>
+                        <a:t>Ignore y registrarlo</a:t>
+                      </a:r>
+                    </a:p>
+                  </a:txBody>
+                  <a:tcPr marL="73152" marR="73152" marT="36576" marB="36576" anchor="ctr">
+                    <a:solidFill>
+                      <a:srgbClr val="FFFFFF"/>
+                    </a:solidFill>
+                  </a:tcPr>
+                </a:tc>
+              </a:tr>
+              <a:tr h="566928">
+                <a:tc>
+                  <a:txBody>
+                    <a:bodyPr wrap="square"/>
+                    <a:lstStyle/>
+                    <a:p>
+                      <a:r>
+                        <a:rPr sz="1200" b="0" i="0">
+                          <a:solidFill>
+                            <a:srgbClr val="1F2937"/>
+                          </a:solidFill>
+                          <a:latin typeface="Calibri"/>
+                        </a:rPr>
+                        <a:t>"No Android devices connected"</a:t>
+                      </a:r>
+                    </a:p>
+                  </a:txBody>
+                  <a:tcPr marL="73152" marR="73152" marT="36576" marB="36576" anchor="ctr">
+                    <a:solidFill>
+                      <a:srgbClr val="E6F4F2"/>
+                    </a:solidFill>
+                  </a:tcPr>
+                </a:tc>
+                <a:tc>
+                  <a:txBody>
+                    <a:bodyPr wrap="square"/>
+                    <a:lstStyle/>
+                    <a:p>
+                      <a:r>
+                        <a:rPr sz="1200" b="0" i="0">
+                          <a:solidFill>
+                            <a:srgbClr val="1F2937"/>
+                          </a:solidFill>
+                          <a:latin typeface="Calibri"/>
+                        </a:rPr>
+                        <a:t>Usar Build, o cable, diálogo y Refresh</a:t>
+                      </a:r>
+                    </a:p>
+                  </a:txBody>
+                  <a:tcPr marL="73152" marR="73152" marT="36576" marB="36576" anchor="ctr">
+                    <a:solidFill>
+                      <a:srgbClr val="E6F4F2"/>
+                    </a:solidFill>
+                  </a:tcPr>
+                </a:tc>
+              </a:tr>
+              <a:tr h="566928">
+                <a:tc>
+                  <a:txBody>
+                    <a:bodyPr wrap="square"/>
+                    <a:lstStyle/>
+                    <a:p>
+                      <a:r>
+                        <a:rPr sz="1200" b="0" i="0">
+                          <a:solidFill>
+                            <a:srgbClr val="1F2937"/>
+                          </a:solidFill>
+                          <a:latin typeface="Calibri"/>
+                        </a:rPr>
+                        <a:t>adb dice "unauthorized"</a:t>
+                      </a:r>
+                    </a:p>
+                  </a:txBody>
+                  <a:tcPr marL="73152" marR="73152" marT="36576" marB="36576" anchor="ctr">
+                    <a:solidFill>
+                      <a:srgbClr val="FFFFFF"/>
+                    </a:solidFill>
+                  </a:tcPr>
+                </a:tc>
+                <a:tc>
+                  <a:txBody>
+                    <a:bodyPr wrap="square"/>
+                    <a:lstStyle/>
+                    <a:p>
+                      <a:r>
+                        <a:rPr sz="1200" b="0" i="0">
+                          <a:solidFill>
+                            <a:srgbClr val="1F2937"/>
+                          </a:solidFill>
+                          <a:latin typeface="Calibri"/>
+                        </a:rPr>
+                        <a:t>Aceptar el diálogo en el teléfono</a:t>
+                      </a:r>
+                    </a:p>
+                  </a:txBody>
+                  <a:tcPr marL="73152" marR="73152" marT="36576" marB="36576" anchor="ctr">
+                    <a:solidFill>
+                      <a:srgbClr val="FFFFFF"/>
+                    </a:solidFill>
+                  </a:tcPr>
+                </a:tc>
+              </a:tr>
+              <a:tr h="566928">
+                <a:tc>
+                  <a:txBody>
+                    <a:bodyPr wrap="square"/>
+                    <a:lstStyle/>
+                    <a:p>
+                      <a:r>
+                        <a:rPr sz="1200" b="0" i="0">
+                          <a:solidFill>
+                            <a:srgbClr val="1F2937"/>
+                          </a:solidFill>
+                          <a:latin typeface="Calibri"/>
+                        </a:rPr>
+                        <a:t>No se instala o no abre</a:t>
+                      </a:r>
+                    </a:p>
+                  </a:txBody>
+                  <a:tcPr marL="73152" marR="73152" marT="36576" marB="36576" anchor="ctr">
+                    <a:solidFill>
+                      <a:srgbClr val="E6F4F2"/>
+                    </a:solidFill>
+                  </a:tcPr>
+                </a:tc>
+                <a:tc>
+                  <a:txBody>
+                    <a:bodyPr wrap="square"/>
+                    <a:lstStyle/>
+                    <a:p>
+                      <a:r>
+                        <a:rPr sz="1200" b="0" i="0">
+                          <a:solidFill>
+                            <a:srgbClr val="1F2937"/>
+                          </a:solidFill>
+                          <a:latin typeface="Calibri"/>
+                        </a:rPr>
+                        <a:t>IL2CPP + ARM64</a:t>
+                      </a:r>
+                    </a:p>
+                  </a:txBody>
+                  <a:tcPr marL="73152" marR="73152" marT="36576" marB="36576" anchor="ctr">
+                    <a:solidFill>
+                      <a:srgbClr val="E6F4F2"/>
+                    </a:solidFill>
+                  </a:tcPr>
+                </a:tc>
+              </a:tr>
+              <a:tr h="566928">
+                <a:tc>
+                  <a:txBody>
+                    <a:bodyPr wrap="square"/>
+                    <a:lstStyle/>
+                    <a:p>
+                      <a:r>
+                        <a:rPr sz="1200" b="0" i="0">
+                          <a:solidFill>
+                            <a:srgbClr val="1F2937"/>
+                          </a:solidFill>
+                          <a:latin typeface="Calibri"/>
+                        </a:rPr>
+                        <a:t>Ícono negro</a:t>
+                      </a:r>
+                    </a:p>
+                  </a:txBody>
+                  <a:tcPr marL="73152" marR="73152" marT="36576" marB="36576" anchor="ctr">
+                    <a:solidFill>
+                      <a:srgbClr val="FFFFFF"/>
+                    </a:solidFill>
+                  </a:tcPr>
+                </a:tc>
+                <a:tc>
+                  <a:txBody>
+                    <a:bodyPr wrap="square"/>
+                    <a:lstStyle/>
+                    <a:p>
+                      <a:r>
+                        <a:rPr sz="1200" b="0" i="0">
+                          <a:solidFill>
+                            <a:srgbClr val="1F2937"/>
+                          </a:solidFill>
+                          <a:latin typeface="Calibri"/>
+                        </a:rPr>
+                        <a:t>Revisar Default Icon</a:t>
+                      </a:r>
+                    </a:p>
+                  </a:txBody>
+                  <a:tcPr marL="73152" marR="73152" marT="36576" marB="36576" anchor="ctr">
+                    <a:solidFill>
+                      <a:srgbClr val="FFFFFF"/>
+                    </a:solidFill>
+                  </a:tcPr>
+                </a:tc>
+              </a:tr>
+              <a:tr h="566928">
+                <a:tc>
+                  <a:txBody>
+                    <a:bodyPr wrap="square"/>
+                    <a:lstStyle/>
+                    <a:p>
+                      <a:r>
+                        <a:rPr sz="1200" b="0" i="0">
+                          <a:solidFill>
+                            <a:srgbClr val="1F2937"/>
+                          </a:solidFill>
+                          <a:latin typeface="Calibri"/>
+                        </a:rPr>
+                        <a:t>Ver errores del juego</a:t>
+                      </a:r>
+                    </a:p>
+                  </a:txBody>
+                  <a:tcPr marL="73152" marR="73152" marT="36576" marB="36576" anchor="ctr">
+                    <a:solidFill>
+                      <a:srgbClr val="E6F4F2"/>
+                    </a:solidFill>
+                  </a:tcPr>
+                </a:tc>
+                <a:tc>
+                  <a:txBody>
+                    <a:bodyPr wrap="square"/>
+                    <a:lstStyle/>
+                    <a:p>
+                      <a:r>
+                        <a:rPr sz="1200" b="0" i="0">
+                          <a:solidFill>
+                            <a:srgbClr val="1F2937"/>
+                          </a:solidFill>
+                          <a:latin typeface="Calibri"/>
+                        </a:rPr>
+                        <a:t>adb logcat -s Unity</a:t>
+                      </a:r>
+                    </a:p>
+                  </a:txBody>
+                  <a:tcPr marL="73152" marR="73152" marT="36576" marB="36576" anchor="ctr">
+                    <a:solidFill>
+                      <a:srgbClr val="E6F4F2"/>
+                    </a:solidFill>
+                  </a:tcPr>
+                </a:tc>
+              </a:tr>
+            </a:tbl>
+          </a:graphicData>
+        </a:graphic>
+      </p:graphicFrame>
     </p:spTree>
   </p:cSld>
   <p:clrMapOvr>
@@ -46071,7 +51933,7 @@
                 </a:solidFill>
                 <a:latin typeface="Calibri"/>
               </a:rPr>
-              <a:t>7/54</a:t>
+              <a:t>7/63</a:t>
             </a:r>
           </a:p>
         </p:txBody>
@@ -47728,7 +53590,7 @@
                 </a:solidFill>
                 <a:latin typeface="Calibri"/>
               </a:rPr>
-              <a:t>8/54</a:t>
+              <a:t>8/63</a:t>
             </a:r>
           </a:p>
         </p:txBody>
@@ -48281,7 +54143,7 @@
                 </a:solidFill>
                 <a:latin typeface="Calibri"/>
               </a:rPr>
-              <a:t>9/54</a:t>
+              <a:t>9/63</a:t>
             </a:r>
           </a:p>
         </p:txBody>

--- a/diseno-plataformas/unidad-04/Unidad-4-2026-completa.pptx
+++ b/diseno-plataformas/unidad-04/Unidad-4-2026-completa.pptx
@@ -68,6 +68,8 @@
     <p:sldId id="316" r:id="rId68"/>
     <p:sldId id="317" r:id="rId69"/>
     <p:sldId id="318" r:id="rId70"/>
+    <p:sldId id="319" r:id="rId71"/>
+    <p:sldId id="320" r:id="rId72"/>
   </p:sldIdLst>
   <p:sldSz cx="12191695" cy="6858000" type="screen4x3"/>
   <p:notesSz cx="6858000" cy="9144000"/>
@@ -5177,6 +5179,56 @@
               <a:t>Imagen sugerida (opcional, sin recuadro en la slide): titular del comunicado oficial de la FTC del 19/12/2022.</a:t>
             </a:r>
           </a:p>
+          <a:p>
+            <a:r>
+              <a:t>• ACM (Autoriteit Consument &amp; Markt): autoridad de consumo y competencia de los Países Bajos.</a:t>
+            </a:r>
+          </a:p>
+          <a:p>
+            <a:r>
+              <a:t>• Item Shop: la tienda de objetos dentro de Fortnite.</a:t>
+            </a:r>
+          </a:p>
+          <a:p>
+            <a:r>
+              <a:t>No es un caso aislado: en 2024 la ACM multó a Epic con 1.125.000 euros en total, más una orden obligatoria de cambiar la tienda, por prácticas comerciales desleales dirigidas a niños en el Item Shop de Fortnite (mensajes del tipo "consíguelo ya" y temporizadores de cuenta regresiva engañosos). Epic recurrió y el 14/01/2026 el Tribunal de Distrito de Róterdam le dio la razón a la ACM: "Epic directly exhorted children to make purchases in the Fortnite Item Shop" (ACM, "Ruling of the District Court of Rotterdam: Epic's objection declared unfounded", 14/01/2026, https://www.acm.nl/en/node/28730). Epic no discutió la infracción de los temporizadores.</a:t>
+            </a:r>
+          </a:p>
+          <a:p>
+            <a:r>
+              <a:t>Para remarcar: dos países, dos organismos y la misma conclusión: la pantalla de compra es diseño, y el diseño tiene consecuencias legales. El temporizador que apura es una decisión de interfaz, igual que el botón confuso.</a:t>
+            </a:r>
+          </a:p>
+          <a:p>
+            <a:r>
+              <a:t>Videos cortos de noticias, en español (pedido de la titular, 2026-10-19), para abrir el tema:</a:t>
+            </a:r>
+          </a:p>
+          <a:p>
+            <a:r>
+              <a:t>- La Tercera (Chile), "Millonaria multa: no fue una 'victoria magistral' para Epic Games", caso FTC: https://www.facebook.com/watch/?v=2465461220269942</a:t>
+            </a:r>
+          </a:p>
+          <a:p>
+            <a:r>
+              <a:t>- El Deber (Bolivia), "Multa millonaria a Fortnite por violar la privacidad de menores y manipulación", caso FTC: https://www.facebook.com/watch/?v=541682641335363</a:t>
+            </a:r>
+          </a:p>
+          <a:p>
+            <a:r>
+              <a:t>- El Sol de México, multa de Países Bajos por prácticas desleales con menores: https://www.facebook.com/reel/657601210708360</a:t>
+            </a:r>
+          </a:p>
+          <a:p>
+            <a:r>
+              <a:t>- DW Español, "Fortnite pagará USD 520 millones por violar privacidad de menores" (12 min, 19/12/2022): https://www.youtube.com/watch?v=cavSjjSDdo0</a:t>
+            </a:r>
+          </a:p>
+          <a:p>
+            <a:r>
+              <a:t>Verificación (2026-10-19): título y medio de los tres videos de Facebook leídos de los metadatos públicos de cada enlace; el reel de El Sol de México no muestra título, solo la descripción. Facebook puede pedir iniciar sesión para reproducirlos: probarlos antes de la clase. El video de DW se verificó en YouTube (título, canal, fecha y duración). No se miraron completos.</a:t>
+            </a:r>
+          </a:p>
         </p:txBody>
       </p:sp>
       <p:sp>
@@ -6437,6 +6489,21 @@
               <a:t>No detenerse más de 3 minutos: es contexto, no contenido evaluable.</a:t>
             </a:r>
           </a:p>
+          <a:p>
+            <a:r>
+              <a:t>Videos de consulta, en español (agregados el 2026-10-19; existencia, título, canal y fecha verificados con YouTube el 2026-10-19; el contenido no se revisó completo):</a:t>
+            </a:r>
+          </a:p>
+          <a:p>
+            <a:r>
+              <a:t>- lucasmelor, "La historia COMPLETA de los Juegos de Celular" (21 min, 24/02/2025): https://www.youtube.com/watch?v=kEwd_CnXvaM. Canal de divulgación, no académico; incluye un segmento patrocinado.</a:t>
+            </a:r>
+          </a:p>
+          <a:p>
+            <a:r>
+              <a:t>- Aranimations ES y Cerebro Sin hueso, "Antes de las App Stores: Así Era el Increíble Gaming en Celulares Java" (9 min, 12/09/2026): https://www.youtube.com/watch?v=omq5avbt8kw. Muestra la etapa previa a 2008 (Snake, J2ME, Gameloft): el teléfono ya era plataforma de juego antes del App Store, que es el hito que usa la cronología.</a:t>
+            </a:r>
+          </a:p>
         </p:txBody>
       </p:sp>
       <p:sp>
@@ -6722,6 +6789,31 @@
               <a:t>Tiempo de referencia: Mono + ARMv7, 42 s y 20 MB en la PC de la docente (2026-10-12). Con IL2CPP la primera build tarda bastante más (no medido todavía).</a:t>
             </a:r>
           </a:p>
+          <a:p>
+            <a:r>
+              <a:t>Videos de ejemplo, en español (agregados el 2026-10-19; título, canal, fecha y descripción verificados con YouTube el 2026-10-19; no se miraron completos ni se compararon paso por paso con este anexo):</a:t>
+            </a:r>
+          </a:p>
+          <a:p>
+            <a:r>
+              <a:t>- Jadsa Games, "De PC a Android: Guía Completa para Portear y Publicar tu Juego con Unity 6" (18 min, 26/11/2025): https://www.youtube.com/watch?v=BuaJrjBDxK8. Es el que más se parece a la unidad: toma un juego de PC, agrega botones táctiles, ajusta la relación de aspecto y genera el APK y el .aab. Llega hasta la publicación en Google Play, que en esta materia no se hace.</a:t>
+            </a:r>
+          </a:p>
+          <a:p>
+            <a:r>
+              <a:t>- LuisCanary, "Generar EJECUTABLE de tu Videojuego en UNITY | Sacar .EXE y .APK (PC y Android)" (13 min, 26/02/2026): https://www.youtube.com/watch?v=nlgC6N_xfpM. Muestra la misma build para PC y para Android, útil para comparar los dos destinos. La descripción no dice la versión de Unity: si los menús no coinciden, seguir este anexo (Unity 6000.3.11f1).</a:t>
+            </a:r>
+          </a:p>
+          <a:p>
+            <a:r>
+              <a:t>- Complemento, del mismo canal que el primero: Jadsa Games, "Crear un Bundle .AAB para Android en Unity 6" (8 min): https://www.youtube.com/watch?v=COrg93Kz4o0.</a:t>
+            </a:r>
+          </a:p>
+          <a:p>
+            <a:r>
+              <a:t>Diferencia a remarcar: los videos que publican en Google Play generan .aab (Build App Bundle tildado). Para probar en el teléfono, esta unidad usa .apk (casilla destildada, paso 4).</a:t>
+            </a:r>
+          </a:p>
         </p:txBody>
       </p:sp>
       <p:sp>
@@ -6829,6 +6921,236 @@
 </p:notes>
 </file>
 
+<file path=ppt/notesSlides/notesSlide64.xml><?xml version="1.0" encoding="utf-8"?>
+<p:notes xmlns:a="http://schemas.openxmlformats.org/drawingml/2006/main" xmlns:p="http://schemas.openxmlformats.org/presentationml/2006/main" xmlns:r="http://schemas.openxmlformats.org/officeDocument/2006/relationships">
+  <p:cSld>
+    <p:spTree>
+      <p:nvGrpSpPr>
+        <p:cNvPr id="1" name=""/>
+        <p:cNvGrpSpPr/>
+        <p:nvPr/>
+      </p:nvGrpSpPr>
+      <p:grpSpPr>
+        <a:xfrm>
+          <a:off x="0" y="0"/>
+          <a:ext cx="0" cy="0"/>
+          <a:chOff x="0" y="0"/>
+          <a:chExt cx="0" cy="0"/>
+        </a:xfrm>
+      </p:grpSpPr>
+      <p:sp>
+        <p:nvSpPr>
+          <p:cNvPr id="2" name="Slide Image Placeholder 1"/>
+          <p:cNvSpPr>
+            <a:spLocks noGrp="1"/>
+          </p:cNvSpPr>
+          <p:nvPr>
+            <p:ph type="sldImg" idx="2"/>
+          </p:nvPr>
+        </p:nvSpPr>
+        <p:spPr/>
+      </p:sp>
+      <p:sp>
+        <p:nvSpPr>
+          <p:cNvPr id="3" name="Notes Placeholder 2"/>
+          <p:cNvSpPr>
+            <a:spLocks noGrp="1"/>
+          </p:cNvSpPr>
+          <p:nvPr>
+            <p:ph type="body" idx="3" sz="quarter"/>
+          </p:nvPr>
+        </p:nvSpPr>
+        <p:spPr/>
+        <p:txBody>
+          <a:bodyPr/>
+          <a:lstStyle/>
+          <a:p>
+            <a:r>
+              <a:t>Glosario (conceptos cortos para la docente):</a:t>
+            </a:r>
+          </a:p>
+          <a:p>
+            <a:r>
+              <a:t>• Input Manager (legacy): sistema de entrada clásico de Unity; los ejes y botones se configuran en Project Settings &gt; Input Manager.</a:t>
+            </a:r>
+          </a:p>
+          <a:p>
+            <a:r>
+              <a:t>• Gamepad virtual: los botones en pantalla (OnScreenButton) se hacen pasar por un gamepad; el juego no distingue el dedo de un control físico.</a:t>
+            </a:r>
+          </a:p>
+          <a:p>
+            <a:r>
+              <a:t>• Safe area: parte de la pantalla libre de muesca y barra de gestos.</a:t>
+            </a:r>
+          </a:p>
+          <a:p>
+            <a:r>
+              <a:t>• Suavizado: el eje "Horizontal" del Input Manager acelera y frena en unos 0,3 s en lugar de saltar de 0 a 1.</a:t>
+            </a:r>
+          </a:p>
+          <a:p>
+            <a:r>
+              <a:t>Qué muestra: el mismo juego (2D Platformer, el segundo caso del laboratorio) antes y después del porteo, en las dos plataformas. La versión 2 es una copia; el original no se tocó.</a:t>
+            </a:r>
+          </a:p>
+          <a:p>
+            <a:r>
+              <a:t>PC antes: teclado (flechas o A/D, salto con Espacio) y un joystick genérico configurado en el Input Manager (el salto del joystick era "joystick button 3", que en un control de Xbox es Y, no A). PC después: las mismas teclas, más gamepad (stick, cruceta y botón A para saltar).</a:t>
+            </a:r>
+          </a:p>
+          <a:p>
+            <a:r>
+              <a:t>Android antes: el juego tenía un campo "controlmode" y un contenedor MobileControls, pero el contenedor estaba vacío; en el teléfono se podía tocar el menú, pero el personaje no se movía. Android después: botones ◀ ▶ y SALTAR, visibles solo en móvil; mantener ◀ mueve de forma continua y soltar detiene. Orientación: solo horizontal, porque es un juego de desplazamiento lateral.</a:t>
+            </a:r>
+          </a:p>
+          <a:p>
+            <a:r>
+              <a:t>Respuesta esperada a la pregunta: casi nada, y eso es lo buscado. Dos diferencias reales: ahora responde a un gamepad moderno, y el movimiento con teclado ya no tiene suavizado (respuesta inmediata). Es un cambio de sensación: hay que contarlo, no esconderlo.</a:t>
+            </a:r>
+          </a:p>
+          <a:p>
+            <a:r>
+              <a:t>Qué NO resuelve esto: el esquema táctil (botones o stick) es provisional y lo eligen los grupos; no hay coyote time ni buffer de salto; no se probó todavía en un teléfono real.</a:t>
+            </a:r>
+          </a:p>
+        </p:txBody>
+      </p:sp>
+      <p:sp>
+        <p:nvSpPr>
+          <p:cNvPr id="4" name="Slide Number Placeholder 3"/>
+          <p:cNvSpPr>
+            <a:spLocks noGrp="1"/>
+          </p:cNvSpPr>
+          <p:nvPr>
+            <p:ph type="sldNum" idx="5" sz="quarter"/>
+          </p:nvPr>
+        </p:nvSpPr>
+        <p:spPr/>
+      </p:sp>
+    </p:spTree>
+  </p:cSld>
+  <p:clrMapOvr>
+    <a:masterClrMapping/>
+  </p:clrMapOvr>
+</p:notes>
+</file>
+
+<file path=ppt/notesSlides/notesSlide65.xml><?xml version="1.0" encoding="utf-8"?>
+<p:notes xmlns:a="http://schemas.openxmlformats.org/drawingml/2006/main" xmlns:p="http://schemas.openxmlformats.org/presentationml/2006/main" xmlns:r="http://schemas.openxmlformats.org/officeDocument/2006/relationships">
+  <p:cSld>
+    <p:spTree>
+      <p:nvGrpSpPr>
+        <p:cNvPr id="1" name=""/>
+        <p:cNvGrpSpPr/>
+        <p:nvPr/>
+      </p:nvGrpSpPr>
+      <p:grpSpPr>
+        <a:xfrm>
+          <a:off x="0" y="0"/>
+          <a:ext cx="0" cy="0"/>
+          <a:chOff x="0" y="0"/>
+          <a:chExt cx="0" cy="0"/>
+        </a:xfrm>
+      </p:grpSpPr>
+      <p:sp>
+        <p:nvSpPr>
+          <p:cNvPr id="2" name="Slide Image Placeholder 1"/>
+          <p:cNvSpPr>
+            <a:spLocks noGrp="1"/>
+          </p:cNvSpPr>
+          <p:nvPr>
+            <p:ph type="sldImg" idx="2"/>
+          </p:nvPr>
+        </p:nvSpPr>
+        <p:spPr/>
+      </p:sp>
+      <p:sp>
+        <p:nvSpPr>
+          <p:cNvPr id="3" name="Notes Placeholder 2"/>
+          <p:cNvSpPr>
+            <a:spLocks noGrp="1"/>
+          </p:cNvSpPr>
+          <p:nvPr>
+            <p:ph type="body" idx="3" sz="quarter"/>
+          </p:nvPr>
+        </p:nvSpPr>
+        <p:spPr/>
+        <p:txBody>
+          <a:bodyPr/>
+          <a:lstStyle/>
+          <a:p>
+            <a:r>
+              <a:t>Glosario (conceptos cortos para la docente):</a:t>
+            </a:r>
+          </a:p>
+          <a:p>
+            <a:r>
+              <a:t>• Input System: paquete de entrada moderno de Unity; unifica teclado, gamepad y táctil.</a:t>
+            </a:r>
+          </a:p>
+          <a:p>
+            <a:r>
+              <a:t>• SetIntent: método del jugador que recibe la intención (mover, saltar) sin saber de qué dispositivo vino.</a:t>
+            </a:r>
+          </a:p>
+          <a:p>
+            <a:r>
+              <a:t>• Módulo de UI: componente del EventSystem que traduce clics y toques a eventos de botones.</a:t>
+            </a:r>
+          </a:p>
+          <a:p>
+            <a:r>
+              <a:t>• URP en modo compatibilidad: modo viejo del render de Unity; Unity 6.3 no compila builds con él activado.</a:t>
+            </a:r>
+          </a:p>
+          <a:p>
+            <a:r>
+              <a:t>Fila por fila: el input pasó del Input Manager al Input System, configurado solo en "New" porque Unity 6.3 no admite "Both" en Android. El PlayerController ya no lee teclas: un adaptador lee el dispositivo y le pasa la intención. Los menús cambiaron de módulo de UI para funcionar sin el sistema viejo.</a:t>
+            </a:r>
+          </a:p>
+          <a:p>
+            <a:r>
+              <a:t>Errores y build: el error "isGrounded" se repetía en cada frame (2447 veces en una sesión) y ahora aparece 0 veces. La build de Android del proyecto migrado fallaba por el render en modo compatibilidad; corregido eso, generó un APK de 35,9 MB (Mono, ARMv7, 9 min 25 s la primera vez).</a:t>
+            </a:r>
+          </a:p>
+          <a:p>
+            <a:r>
+              <a:t>Tests: 6 de configuración (Edit Mode) y 10 de juego (Play Mode); pasan 14.</a:t>
+            </a:r>
+          </a:p>
+          <a:p>
+            <a:r>
+              <a:t>Respuesta esperada a la pregunta: los 2 tests que fallan encontraron un defecto del juego original, no del porteo. El rayo que detecta el suelo choca con el propio jugador, así que el juego siempre cree que está en el suelo y permite saltar sin límite. Un test en rojo también es evidencia útil. Corregirlo cambia la dificultad del nivel, y esa decisión es de diseño, no técnica.</a:t>
+            </a:r>
+          </a:p>
+          <a:p>
+            <a:r>
+              <a:t>Estado: todo esto está VERIFICADO con logs y XML del 19/10/2026. La instalación en un teléfono real es UNKNOWN.</a:t>
+            </a:r>
+          </a:p>
+        </p:txBody>
+      </p:sp>
+      <p:sp>
+        <p:nvSpPr>
+          <p:cNvPr id="4" name="Slide Number Placeholder 3"/>
+          <p:cNvSpPr>
+            <a:spLocks noGrp="1"/>
+          </p:cNvSpPr>
+          <p:nvPr>
+            <p:ph type="sldNum" idx="5" sz="quarter"/>
+          </p:nvPr>
+        </p:nvSpPr>
+        <p:spPr/>
+      </p:sp>
+    </p:spTree>
+  </p:cSld>
+  <p:clrMapOvr>
+    <a:masterClrMapping/>
+  </p:clrMapOvr>
+</p:notes>
+</file>
+
 <file path=ppt/notesSlides/notesSlide7.xml><?xml version="1.0" encoding="utf-8"?>
 <p:notes xmlns:a="http://schemas.openxmlformats.org/drawingml/2006/main" xmlns:p="http://schemas.openxmlformats.org/presentationml/2006/main" xmlns:r="http://schemas.openxmlformats.org/officeDocument/2006/relationships">
   <p:cSld>
@@ -6945,6 +7267,11 @@
           <a:p>
             <a:r>
               <a:t>Recorrer el gráfico de izquierda a derecha y no detenerse más de 3 minutos.</a:t>
+            </a:r>
+          </a:p>
+          <a:p>
+            <a:r>
+              <a:t>Video de consulta, en español (agregado el 2026-10-19; existencia, título, canal y fecha verificados con YouTube el 2026-10-19; el contenido no se revisó completo): Academia Play, "Historia de los Videojuegos (1972-1983) Parte I" (7 min, 10/07/2019): https://www.youtube.com/watch?v=KRRfb-pSZy8. Según su descripción, recorre Pong, Space Invaders, Pac-Man y Donkey Kong hasta la crisis de 1983: los mismos hitos del gráfico.</a:t>
             </a:r>
           </a:p>
         </p:txBody>
@@ -10338,7 +10665,7 @@
                 </a:solidFill>
                 <a:latin typeface="Calibri"/>
               </a:rPr>
-              <a:t>Unidad IV · Clase 1 · final (dada hasta la slide 15) · 1/63</a:t>
+              <a:t>Unidad IV · Clase 1 · final (dada hasta la slide 15) · 1/65</a:t>
             </a:r>
           </a:p>
         </p:txBody>
@@ -10619,7 +10946,7 @@
                 </a:solidFill>
                 <a:latin typeface="Calibri"/>
               </a:rPr>
-              <a:t>10/63</a:t>
+              <a:t>10/65</a:t>
             </a:r>
           </a:p>
         </p:txBody>
@@ -12650,7 +12977,7 @@
                 </a:solidFill>
                 <a:latin typeface="Calibri"/>
               </a:rPr>
-              <a:t>11/63</a:t>
+              <a:t>11/65</a:t>
             </a:r>
           </a:p>
         </p:txBody>
@@ -13679,7 +14006,7 @@
                 </a:solidFill>
                 <a:latin typeface="Calibri"/>
               </a:rPr>
-              <a:t>12/63</a:t>
+              <a:t>12/65</a:t>
             </a:r>
           </a:p>
         </p:txBody>
@@ -14101,7 +14428,7 @@
                 </a:solidFill>
                 <a:latin typeface="Calibri"/>
               </a:rPr>
-              <a:t>13/63</a:t>
+              <a:t>13/65</a:t>
             </a:r>
           </a:p>
         </p:txBody>
@@ -14943,7 +15270,7 @@
                 </a:solidFill>
                 <a:latin typeface="Calibri"/>
               </a:rPr>
-              <a:t>14/63</a:t>
+              <a:t>14/65</a:t>
             </a:r>
           </a:p>
         </p:txBody>
@@ -15390,7 +15717,7 @@
                 </a:solidFill>
                 <a:latin typeface="Calibri"/>
               </a:rPr>
-              <a:t>15/63</a:t>
+              <a:t>15/65</a:t>
             </a:r>
           </a:p>
         </p:txBody>
@@ -16335,7 +16662,7 @@
                 </a:solidFill>
                 <a:latin typeface="Calibri"/>
               </a:rPr>
-              <a:t>Unidad IV · Clase 2 · final · 16/63</a:t>
+              <a:t>Unidad IV · Clase 2 · final · 16/65</a:t>
             </a:r>
           </a:p>
         </p:txBody>
@@ -16616,7 +16943,7 @@
                 </a:solidFill>
                 <a:latin typeface="Calibri"/>
               </a:rPr>
-              <a:t>17/63</a:t>
+              <a:t>17/65</a:t>
             </a:r>
           </a:p>
         </p:txBody>
@@ -17101,7 +17428,7 @@
                 </a:solidFill>
                 <a:latin typeface="Calibri"/>
               </a:rPr>
-              <a:t>18/63</a:t>
+              <a:t>18/65</a:t>
             </a:r>
           </a:p>
         </p:txBody>
@@ -17612,7 +17939,7 @@
                 </a:solidFill>
                 <a:latin typeface="Calibri"/>
               </a:rPr>
-              <a:t>19/63</a:t>
+              <a:t>19/65</a:t>
             </a:r>
           </a:p>
         </p:txBody>
@@ -18472,7 +18799,7 @@
                 </a:solidFill>
                 <a:latin typeface="Calibri"/>
               </a:rPr>
-              <a:t>2/63</a:t>
+              <a:t>2/65</a:t>
             </a:r>
           </a:p>
         </p:txBody>
@@ -18982,7 +19309,7 @@
                 </a:solidFill>
                 <a:latin typeface="Calibri"/>
               </a:rPr>
-              <a:t>20/63</a:t>
+              <a:t>20/65</a:t>
             </a:r>
           </a:p>
         </p:txBody>
@@ -19983,7 +20310,7 @@
                 </a:solidFill>
                 <a:latin typeface="Calibri"/>
               </a:rPr>
-              <a:t>21/63</a:t>
+              <a:t>21/65</a:t>
             </a:r>
           </a:p>
         </p:txBody>
@@ -20561,7 +20888,7 @@
                 </a:solidFill>
                 <a:latin typeface="Calibri"/>
               </a:rPr>
-              <a:t>22/63</a:t>
+              <a:t>22/65</a:t>
             </a:r>
           </a:p>
         </p:txBody>
@@ -21189,7 +21516,7 @@
                 </a:solidFill>
                 <a:latin typeface="Calibri"/>
               </a:rPr>
-              <a:t>23/63</a:t>
+              <a:t>23/65</a:t>
             </a:r>
           </a:p>
         </p:txBody>
@@ -21915,7 +22242,7 @@
                 </a:solidFill>
                 <a:latin typeface="Calibri"/>
               </a:rPr>
-              <a:t>24/63</a:t>
+              <a:t>24/65</a:t>
             </a:r>
           </a:p>
         </p:txBody>
@@ -22468,7 +22795,7 @@
                 </a:solidFill>
                 <a:latin typeface="Calibri"/>
               </a:rPr>
-              <a:t>25/63</a:t>
+              <a:t>25/65</a:t>
             </a:r>
           </a:p>
         </p:txBody>
@@ -23267,7 +23594,7 @@
                 </a:solidFill>
                 <a:latin typeface="Calibri"/>
               </a:rPr>
-              <a:t>26/63</a:t>
+              <a:t>26/65</a:t>
             </a:r>
           </a:p>
         </p:txBody>
@@ -24482,7 +24809,7 @@
                 </a:solidFill>
                 <a:latin typeface="Calibri"/>
               </a:rPr>
-              <a:t>27/63</a:t>
+              <a:t>27/65</a:t>
             </a:r>
           </a:p>
         </p:txBody>
@@ -25191,7 +25518,7 @@
                 </a:solidFill>
                 <a:latin typeface="Calibri"/>
               </a:rPr>
-              <a:t>28/63</a:t>
+              <a:t>28/65</a:t>
             </a:r>
           </a:p>
         </p:txBody>
@@ -26005,7 +26332,7 @@
                 </a:solidFill>
                 <a:latin typeface="Calibri"/>
               </a:rPr>
-              <a:t>29/63</a:t>
+              <a:t>29/65</a:t>
             </a:r>
           </a:p>
         </p:txBody>
@@ -26490,7 +26817,7 @@
                 </a:solidFill>
                 <a:latin typeface="Calibri"/>
               </a:rPr>
-              <a:t>3/63</a:t>
+              <a:t>3/65</a:t>
             </a:r>
           </a:p>
         </p:txBody>
@@ -27755,7 +28082,7 @@
                 </a:solidFill>
                 <a:latin typeface="Calibri"/>
               </a:rPr>
-              <a:t>30/63</a:t>
+              <a:t>30/65</a:t>
             </a:r>
           </a:p>
         </p:txBody>
@@ -28295,7 +28622,7 @@
                 </a:solidFill>
                 <a:latin typeface="Calibri"/>
               </a:rPr>
-              <a:t>31/63</a:t>
+              <a:t>31/65</a:t>
             </a:r>
           </a:p>
         </p:txBody>
@@ -28706,7 +29033,7 @@
                 </a:solidFill>
                 <a:latin typeface="Calibri"/>
               </a:rPr>
-              <a:t>Unidad IV · Clase 3 · final · 32/63</a:t>
+              <a:t>Unidad IV · Clase 3 · final · 32/65</a:t>
             </a:r>
           </a:p>
         </p:txBody>
@@ -28987,7 +29314,7 @@
                 </a:solidFill>
                 <a:latin typeface="Calibri"/>
               </a:rPr>
-              <a:t>33/63</a:t>
+              <a:t>33/65</a:t>
             </a:r>
           </a:p>
         </p:txBody>
@@ -29472,7 +29799,7 @@
                 </a:solidFill>
                 <a:latin typeface="Calibri"/>
               </a:rPr>
-              <a:t>34/63</a:t>
+              <a:t>34/65</a:t>
             </a:r>
           </a:p>
         </p:txBody>
@@ -29923,7 +30250,7 @@
                 </a:solidFill>
                 <a:latin typeface="Calibri"/>
               </a:rPr>
-              <a:t>35/63</a:t>
+              <a:t>35/65</a:t>
             </a:r>
           </a:p>
         </p:txBody>
@@ -31471,7 +31798,7 @@
                 </a:solidFill>
                 <a:latin typeface="Calibri"/>
               </a:rPr>
-              <a:t>36/63</a:t>
+              <a:t>36/65</a:t>
             </a:r>
           </a:p>
         </p:txBody>
@@ -32049,7 +32376,7 @@
                 </a:solidFill>
                 <a:latin typeface="Calibri"/>
               </a:rPr>
-              <a:t>37/63</a:t>
+              <a:t>37/65</a:t>
             </a:r>
           </a:p>
         </p:txBody>
@@ -32932,7 +33259,7 @@
                 </a:solidFill>
                 <a:latin typeface="Calibri"/>
               </a:rPr>
-              <a:t>38/63</a:t>
+              <a:t>38/65</a:t>
             </a:r>
           </a:p>
         </p:txBody>
@@ -33460,7 +33787,7 @@
                 </a:solidFill>
                 <a:latin typeface="Calibri"/>
               </a:rPr>
-              <a:t>39/63</a:t>
+              <a:t>39/65</a:t>
             </a:r>
           </a:p>
         </p:txBody>
@@ -34214,7 +34541,7 @@
                 </a:solidFill>
                 <a:latin typeface="Calibri"/>
               </a:rPr>
-              <a:t>4/63</a:t>
+              <a:t>4/65</a:t>
             </a:r>
           </a:p>
         </p:txBody>
@@ -34643,7 +34970,7 @@
                 </a:solidFill>
                 <a:latin typeface="Calibri"/>
               </a:rPr>
-              <a:t>40/63</a:t>
+              <a:t>40/65</a:t>
             </a:r>
           </a:p>
         </p:txBody>
@@ -35128,7 +35455,7 @@
                 </a:solidFill>
                 <a:latin typeface="Calibri"/>
               </a:rPr>
-              <a:t>41/63</a:t>
+              <a:t>41/65</a:t>
             </a:r>
           </a:p>
         </p:txBody>
@@ -36200,7 +36527,7 @@
                 </a:solidFill>
                 <a:latin typeface="Calibri"/>
               </a:rPr>
-              <a:t>42/63</a:t>
+              <a:t>42/65</a:t>
             </a:r>
           </a:p>
         </p:txBody>
@@ -37285,7 +37612,7 @@
                 </a:solidFill>
                 <a:latin typeface="Calibri"/>
               </a:rPr>
-              <a:t>43/63</a:t>
+              <a:t>43/65</a:t>
             </a:r>
           </a:p>
         </p:txBody>
@@ -38112,7 +38439,7 @@
                 </a:solidFill>
                 <a:latin typeface="Calibri"/>
               </a:rPr>
-              <a:t>44/63</a:t>
+              <a:t>44/65</a:t>
             </a:r>
           </a:p>
         </p:txBody>
@@ -38597,7 +38924,7 @@
                 </a:solidFill>
                 <a:latin typeface="Calibri"/>
               </a:rPr>
-              <a:t>45/63</a:t>
+              <a:t>45/65</a:t>
             </a:r>
           </a:p>
         </p:txBody>
@@ -39371,7 +39698,7 @@
                 </a:solidFill>
                 <a:latin typeface="Calibri"/>
               </a:rPr>
-              <a:t>46/63</a:t>
+              <a:t>46/65</a:t>
             </a:r>
           </a:p>
         </p:txBody>
@@ -40087,7 +40414,7 @@
                 </a:solidFill>
                 <a:latin typeface="Calibri"/>
               </a:rPr>
-              <a:t>47/63</a:t>
+              <a:t>47/65</a:t>
             </a:r>
           </a:p>
         </p:txBody>
@@ -40597,7 +40924,7 @@
                 </a:solidFill>
                 <a:latin typeface="Calibri"/>
               </a:rPr>
-              <a:t>48/63</a:t>
+              <a:t>48/65</a:t>
             </a:r>
           </a:p>
         </p:txBody>
@@ -40640,7 +40967,7 @@
                 </a:solidFill>
                 <a:latin typeface="Calibri"/>
               </a:rPr>
-              <a:t>FTC, comunicado de prensa del 19/12/2022</a:t>
+              <a:t>FTC, comunicado de prensa del 19/12/2022; ACM (Países Bajos), 14/01/2026</a:t>
             </a:r>
           </a:p>
         </p:txBody>
@@ -40654,6 +40981,170 @@
         <p:spPr>
           <a:xfrm>
             <a:off x="502920" y="5577840"/>
+            <a:ext cx="109728" cy="457200"/>
+          </a:xfrm>
+          <a:prstGeom prst="rect">
+            <a:avLst/>
+          </a:prstGeom>
+          <a:solidFill>
+            <a:srgbClr val="DC2626"/>
+          </a:solidFill>
+          <a:ln>
+            <a:noFill/>
+          </a:ln>
+          <a:effectLst/>
+        </p:spPr>
+        <p:style>
+          <a:lnRef idx="1">
+            <a:schemeClr val="accent1"/>
+          </a:lnRef>
+          <a:fillRef idx="3">
+            <a:schemeClr val="accent1"/>
+          </a:fillRef>
+          <a:effectRef idx="2">
+            <a:schemeClr val="accent1"/>
+          </a:effectRef>
+          <a:fontRef idx="minor">
+            <a:schemeClr val="lt1"/>
+          </a:fontRef>
+        </p:style>
+        <p:txBody>
+          <a:bodyPr rtlCol="0" anchor="ctr"/>
+          <a:lstStyle/>
+          <a:p>
+            <a:pPr algn="ctr"/>
+          </a:p>
+        </p:txBody>
+      </p:sp>
+      <p:sp>
+        <p:nvSpPr>
+          <p:cNvPr id="10" name="Rectangle 9"/>
+          <p:cNvSpPr/>
+          <p:nvPr/>
+        </p:nvSpPr>
+        <p:spPr>
+          <a:xfrm>
+            <a:off x="612648" y="5577840"/>
+            <a:ext cx="11076127" cy="457200"/>
+          </a:xfrm>
+          <a:prstGeom prst="rect">
+            <a:avLst/>
+          </a:prstGeom>
+          <a:solidFill>
+            <a:srgbClr val="F3F4F6"/>
+          </a:solidFill>
+          <a:ln>
+            <a:noFill/>
+          </a:ln>
+          <a:effectLst/>
+        </p:spPr>
+        <p:style>
+          <a:lnRef idx="1">
+            <a:schemeClr val="accent1"/>
+          </a:lnRef>
+          <a:fillRef idx="3">
+            <a:schemeClr val="accent1"/>
+          </a:fillRef>
+          <a:effectRef idx="2">
+            <a:schemeClr val="accent1"/>
+          </a:effectRef>
+          <a:fontRef idx="minor">
+            <a:schemeClr val="lt1"/>
+          </a:fontRef>
+        </p:style>
+        <p:txBody>
+          <a:bodyPr rtlCol="0" anchor="ctr" wrap="square" lIns="137160"/>
+          <a:lstStyle/>
+          <a:p>
+            <a:pPr algn="l"/>
+            <a:r>
+              <a:rPr sz="1300" b="1" i="0">
+                <a:solidFill>
+                  <a:srgbClr val="DC2626"/>
+                </a:solidFill>
+                <a:latin typeface="Calibri"/>
+              </a:rPr>
+              <a:t>VIDEO  </a:t>
+            </a:r>
+            <a:r>
+              <a:rPr sz="1400" b="1" i="0" u="sng">
+                <a:solidFill>
+                  <a:srgbClr val="DC2626"/>
+                </a:solidFill>
+                <a:latin typeface="Calibri"/>
+                <a:hlinkClick r:id="rId2"/>
+              </a:rPr>
+              <a:t>La Tercera</a:t>
+            </a:r>
+            <a:r>
+              <a:rPr sz="1400" b="0" i="0">
+                <a:solidFill>
+                  <a:srgbClr val="1F2937"/>
+                </a:solidFill>
+                <a:latin typeface="Calibri"/>
+              </a:rPr>
+              <a:t> · </a:t>
+            </a:r>
+            <a:r>
+              <a:rPr sz="1400" b="1" i="0" u="sng">
+                <a:solidFill>
+                  <a:srgbClr val="DC2626"/>
+                </a:solidFill>
+                <a:latin typeface="Calibri"/>
+                <a:hlinkClick r:id="rId3"/>
+              </a:rPr>
+              <a:t>El Deber</a:t>
+            </a:r>
+            <a:r>
+              <a:rPr sz="1400" b="0" i="0">
+                <a:solidFill>
+                  <a:srgbClr val="1F2937"/>
+                </a:solidFill>
+                <a:latin typeface="Calibri"/>
+              </a:rPr>
+              <a:t> · </a:t>
+            </a:r>
+            <a:r>
+              <a:rPr sz="1400" b="1" i="0" u="sng">
+                <a:solidFill>
+                  <a:srgbClr val="DC2626"/>
+                </a:solidFill>
+                <a:latin typeface="Calibri"/>
+                <a:hlinkClick r:id="rId4"/>
+              </a:rPr>
+              <a:t>El Sol de México</a:t>
+            </a:r>
+            <a:r>
+              <a:rPr sz="1400" b="0" i="0">
+                <a:solidFill>
+                  <a:srgbClr val="1F2937"/>
+                </a:solidFill>
+                <a:latin typeface="Calibri"/>
+              </a:rPr>
+              <a:t> · </a:t>
+            </a:r>
+            <a:r>
+              <a:rPr sz="1400" b="1" i="0" u="sng">
+                <a:solidFill>
+                  <a:srgbClr val="DC2626"/>
+                </a:solidFill>
+                <a:latin typeface="Calibri"/>
+                <a:hlinkClick r:id="rId5"/>
+              </a:rPr>
+              <a:t>DW Español (12 min)</a:t>
+            </a:r>
+          </a:p>
+        </p:txBody>
+      </p:sp>
+      <p:sp>
+        <p:nvSpPr>
+          <p:cNvPr id="11" name="Rectangle 10"/>
+          <p:cNvSpPr/>
+          <p:nvPr/>
+        </p:nvSpPr>
+        <p:spPr>
+          <a:xfrm>
+            <a:off x="502920" y="5029200"/>
             <a:ext cx="109728" cy="457200"/>
           </a:xfrm>
           <a:prstGeom prst="rect">
@@ -40691,13 +41182,13 @@
       </p:sp>
       <p:sp>
         <p:nvSpPr>
-          <p:cNvPr id="10" name="Rectangle 9"/>
+          <p:cNvPr id="12" name="Rectangle 11"/>
           <p:cNvSpPr/>
           <p:nvPr/>
         </p:nvSpPr>
         <p:spPr>
           <a:xfrm>
-            <a:off x="612648" y="5577840"/>
+            <a:off x="612648" y="5029200"/>
             <a:ext cx="11076127" cy="457200"/>
           </a:xfrm>
           <a:prstGeom prst="rect">
@@ -40753,14 +41244,14 @@
       </p:sp>
       <p:sp>
         <p:nvSpPr>
-          <p:cNvPr id="11" name="TextBox 10"/>
+          <p:cNvPr id="13" name="TextBox 12"/>
           <p:cNvSpPr txBox="1"/>
           <p:nvPr/>
         </p:nvSpPr>
         <p:spPr>
           <a:xfrm>
             <a:off x="502920" y="1234440"/>
-            <a:ext cx="11185855" cy="4206240"/>
+            <a:ext cx="11185855" cy="3657600"/>
           </a:xfrm>
           <a:prstGeom prst="rect">
             <a:avLst/>
@@ -40845,6 +41336,31 @@
                 <a:latin typeface="Calibri"/>
               </a:rPr>
               <a:t>Botones confusos al comprar</a:t>
+            </a:r>
+          </a:p>
+          <a:p>
+            <a:pPr>
+              <a:spcAft>
+                <a:spcPts val="800"/>
+              </a:spcAft>
+            </a:pPr>
+            <a:r>
+              <a:rPr sz="1600" b="1" i="0">
+                <a:solidFill>
+                  <a:srgbClr val="0D9488"/>
+                </a:solidFill>
+                <a:latin typeface="Calibri"/>
+              </a:rPr>
+              <a:t>■  </a:t>
+            </a:r>
+            <a:r>
+              <a:rPr sz="2200" b="0" i="0">
+                <a:solidFill>
+                  <a:srgbClr val="1F2937"/>
+                </a:solidFill>
+                <a:latin typeface="Calibri"/>
+              </a:rPr>
+              <a:t>Países Bajos: € 1,125 M (2024)</a:t>
             </a:r>
           </a:p>
         </p:txBody>
@@ -41125,7 +41641,7 @@
                 </a:solidFill>
                 <a:latin typeface="Calibri"/>
               </a:rPr>
-              <a:t>49/63</a:t>
+              <a:t>49/65</a:t>
             </a:r>
           </a:p>
         </p:txBody>
@@ -41816,7 +42332,7 @@
                 </a:solidFill>
                 <a:latin typeface="Calibri"/>
               </a:rPr>
-              <a:t>5/63</a:t>
+              <a:t>5/65</a:t>
             </a:r>
           </a:p>
         </p:txBody>
@@ -42613,7 +43129,7 @@
                 </a:solidFill>
                 <a:latin typeface="Calibri"/>
               </a:rPr>
-              <a:t>50/63</a:t>
+              <a:t>50/65</a:t>
             </a:r>
           </a:p>
         </p:txBody>
@@ -43166,7 +43682,7 @@
                 </a:solidFill>
                 <a:latin typeface="Calibri"/>
               </a:rPr>
-              <a:t>51/63</a:t>
+              <a:t>51/65</a:t>
             </a:r>
           </a:p>
         </p:txBody>
@@ -43719,7 +44235,7 @@
                 </a:solidFill>
                 <a:latin typeface="Calibri"/>
               </a:rPr>
-              <a:t>52/63</a:t>
+              <a:t>52/65</a:t>
             </a:r>
           </a:p>
         </p:txBody>
@@ -44316,7 +44832,7 @@
                 </a:solidFill>
                 <a:latin typeface="Calibri"/>
               </a:rPr>
-              <a:t>53/63</a:t>
+              <a:t>53/65</a:t>
             </a:r>
           </a:p>
         </p:txBody>
@@ -44930,7 +45446,7 @@
                 </a:solidFill>
                 <a:latin typeface="Calibri"/>
               </a:rPr>
-              <a:t>54/63</a:t>
+              <a:t>54/65</a:t>
             </a:r>
           </a:p>
         </p:txBody>
@@ -45340,7 +45856,7 @@
                 </a:solidFill>
                 <a:latin typeface="Calibri"/>
               </a:rPr>
-              <a:t>Unidad IV · Anexo de consulta · 55/63</a:t>
+              <a:t>Unidad IV · Anexo de consulta · 55/65</a:t>
             </a:r>
           </a:p>
         </p:txBody>
@@ -45621,7 +46137,7 @@
                 </a:solidFill>
                 <a:latin typeface="Calibri"/>
               </a:rPr>
-              <a:t>56/63</a:t>
+              <a:t>56/65</a:t>
             </a:r>
           </a:p>
         </p:txBody>
@@ -46132,7 +46648,7 @@
                 </a:solidFill>
                 <a:latin typeface="Calibri"/>
               </a:rPr>
-              <a:t>57/63</a:t>
+              <a:t>57/65</a:t>
             </a:r>
           </a:p>
         </p:txBody>
@@ -47040,7 +47556,7 @@
                 </a:solidFill>
                 <a:latin typeface="Calibri"/>
               </a:rPr>
-              <a:t>58/63</a:t>
+              <a:t>58/65</a:t>
             </a:r>
           </a:p>
         </p:txBody>
@@ -47551,7 +48067,7 @@
                 </a:solidFill>
                 <a:latin typeface="Calibri"/>
               </a:rPr>
-              <a:t>59/63</a:t>
+              <a:t>59/65</a:t>
             </a:r>
           </a:p>
         </p:txBody>
@@ -48091,7 +48607,7 @@
                 </a:solidFill>
                 <a:latin typeface="Calibri"/>
               </a:rPr>
-              <a:t>6/63</a:t>
+              <a:t>6/65</a:t>
             </a:r>
           </a:p>
         </p:txBody>
@@ -48147,8 +48663,143 @@
         </p:nvSpPr>
         <p:spPr>
           <a:xfrm>
+            <a:off x="502920" y="5577840"/>
+            <a:ext cx="109728" cy="457200"/>
+          </a:xfrm>
+          <a:prstGeom prst="rect">
+            <a:avLst/>
+          </a:prstGeom>
+          <a:solidFill>
+            <a:srgbClr val="DC2626"/>
+          </a:solidFill>
+          <a:ln>
+            <a:noFill/>
+          </a:ln>
+          <a:effectLst/>
+        </p:spPr>
+        <p:style>
+          <a:lnRef idx="1">
+            <a:schemeClr val="accent1"/>
+          </a:lnRef>
+          <a:fillRef idx="3">
+            <a:schemeClr val="accent1"/>
+          </a:fillRef>
+          <a:effectRef idx="2">
+            <a:schemeClr val="accent1"/>
+          </a:effectRef>
+          <a:fontRef idx="minor">
+            <a:schemeClr val="lt1"/>
+          </a:fontRef>
+        </p:style>
+        <p:txBody>
+          <a:bodyPr rtlCol="0" anchor="ctr"/>
+          <a:lstStyle/>
+          <a:p>
+            <a:pPr algn="ctr"/>
+          </a:p>
+        </p:txBody>
+      </p:sp>
+      <p:sp>
+        <p:nvSpPr>
+          <p:cNvPr id="10" name="Rectangle 9"/>
+          <p:cNvSpPr/>
+          <p:nvPr/>
+        </p:nvSpPr>
+        <p:spPr>
+          <a:xfrm>
+            <a:off x="612648" y="5577840"/>
+            <a:ext cx="11076127" cy="457200"/>
+          </a:xfrm>
+          <a:prstGeom prst="rect">
+            <a:avLst/>
+          </a:prstGeom>
+          <a:solidFill>
+            <a:srgbClr val="F3F4F6"/>
+          </a:solidFill>
+          <a:ln>
+            <a:noFill/>
+          </a:ln>
+          <a:effectLst/>
+        </p:spPr>
+        <p:style>
+          <a:lnRef idx="1">
+            <a:schemeClr val="accent1"/>
+          </a:lnRef>
+          <a:fillRef idx="3">
+            <a:schemeClr val="accent1"/>
+          </a:fillRef>
+          <a:effectRef idx="2">
+            <a:schemeClr val="accent1"/>
+          </a:effectRef>
+          <a:fontRef idx="minor">
+            <a:schemeClr val="lt1"/>
+          </a:fontRef>
+        </p:style>
+        <p:txBody>
+          <a:bodyPr rtlCol="0" anchor="ctr" wrap="square" lIns="137160"/>
+          <a:lstStyle/>
+          <a:p>
+            <a:pPr algn="l"/>
+            <a:r>
+              <a:rPr sz="1300" b="1" i="0">
+                <a:solidFill>
+                  <a:srgbClr val="DC2626"/>
+                </a:solidFill>
+                <a:latin typeface="Calibri"/>
+              </a:rPr>
+              <a:t>VIDEO  </a:t>
+            </a:r>
+            <a:r>
+              <a:rPr sz="1400" b="0" i="0">
+                <a:solidFill>
+                  <a:srgbClr val="1F2937"/>
+                </a:solidFill>
+                <a:latin typeface="Calibri"/>
+              </a:rPr>
+              <a:t>Consulta: </a:t>
+            </a:r>
+            <a:r>
+              <a:rPr sz="1400" b="1" i="0" u="sng">
+                <a:solidFill>
+                  <a:srgbClr val="DC2626"/>
+                </a:solidFill>
+                <a:latin typeface="Calibri"/>
+                <a:hlinkClick r:id="rId2"/>
+              </a:rPr>
+              <a:t>Juegos de celular, historia (21 min)</a:t>
+            </a:r>
+            <a:r>
+              <a:rPr sz="1400" b="0" i="0">
+                <a:solidFill>
+                  <a:srgbClr val="1F2937"/>
+                </a:solidFill>
+                <a:latin typeface="Calibri"/>
+              </a:rPr>
+              <a:t> · </a:t>
+            </a:r>
+            <a:r>
+              <a:rPr sz="1400" b="1" i="0" u="sng">
+                <a:solidFill>
+                  <a:srgbClr val="DC2626"/>
+                </a:solidFill>
+                <a:latin typeface="Calibri"/>
+                <a:hlinkClick r:id="rId3"/>
+              </a:rPr>
+              <a:t>Antes de las App Stores (9 min)</a:t>
+            </a:r>
+          </a:p>
+        </p:txBody>
+      </p:sp>
+      <p:sp>
+        <p:nvSpPr>
+          <p:cNvPr id="11" name="Rectangle 10"/>
+          <p:cNvSpPr/>
+          <p:nvPr/>
+        </p:nvSpPr>
+        <p:spPr>
+          <a:xfrm>
             <a:off x="7071055" y="1234440"/>
-            <a:ext cx="12700" cy="4069080"/>
+            <a:ext cx="12700" cy="3520440"/>
           </a:xfrm>
           <a:prstGeom prst="rect">
             <a:avLst/>
@@ -48185,13 +48836,13 @@
       </p:sp>
       <p:sp>
         <p:nvSpPr>
-          <p:cNvPr id="10" name="TextBox 9"/>
+          <p:cNvPr id="12" name="TextBox 11"/>
           <p:cNvSpPr txBox="1"/>
           <p:nvPr/>
         </p:nvSpPr>
         <p:spPr>
           <a:xfrm>
-            <a:off x="6705295" y="5349240"/>
+            <a:off x="6705295" y="4800600"/>
             <a:ext cx="731520" cy="274320"/>
           </a:xfrm>
           <a:prstGeom prst="rect">
@@ -48220,14 +48871,14 @@
       </p:sp>
       <p:sp>
         <p:nvSpPr>
-          <p:cNvPr id="11" name="Rectangle 10"/>
+          <p:cNvPr id="13" name="Rectangle 12"/>
           <p:cNvSpPr/>
           <p:nvPr/>
         </p:nvSpPr>
         <p:spPr>
           <a:xfrm>
             <a:off x="7879319" y="1234440"/>
-            <a:ext cx="12700" cy="4069080"/>
+            <a:ext cx="12700" cy="3520440"/>
           </a:xfrm>
           <a:prstGeom prst="rect">
             <a:avLst/>
@@ -48264,13 +48915,13 @@
       </p:sp>
       <p:sp>
         <p:nvSpPr>
-          <p:cNvPr id="12" name="TextBox 11"/>
+          <p:cNvPr id="14" name="TextBox 13"/>
           <p:cNvSpPr txBox="1"/>
           <p:nvPr/>
         </p:nvSpPr>
         <p:spPr>
           <a:xfrm>
-            <a:off x="7513559" y="5349240"/>
+            <a:off x="7513559" y="4800600"/>
             <a:ext cx="731520" cy="274320"/>
           </a:xfrm>
           <a:prstGeom prst="rect">
@@ -48299,14 +48950,14 @@
       </p:sp>
       <p:sp>
         <p:nvSpPr>
-          <p:cNvPr id="13" name="Rectangle 12"/>
+          <p:cNvPr id="15" name="Rectangle 14"/>
           <p:cNvSpPr/>
           <p:nvPr/>
         </p:nvSpPr>
         <p:spPr>
           <a:xfrm>
             <a:off x="8687583" y="1234440"/>
-            <a:ext cx="12700" cy="4069080"/>
+            <a:ext cx="12700" cy="3520440"/>
           </a:xfrm>
           <a:prstGeom prst="rect">
             <a:avLst/>
@@ -48343,13 +48994,13 @@
       </p:sp>
       <p:sp>
         <p:nvSpPr>
-          <p:cNvPr id="14" name="TextBox 13"/>
+          <p:cNvPr id="16" name="TextBox 15"/>
           <p:cNvSpPr txBox="1"/>
           <p:nvPr/>
         </p:nvSpPr>
         <p:spPr>
           <a:xfrm>
-            <a:off x="8321823" y="5349240"/>
+            <a:off x="8321823" y="4800600"/>
             <a:ext cx="731520" cy="274320"/>
           </a:xfrm>
           <a:prstGeom prst="rect">
@@ -48378,14 +49029,14 @@
       </p:sp>
       <p:sp>
         <p:nvSpPr>
-          <p:cNvPr id="15" name="Rectangle 14"/>
+          <p:cNvPr id="17" name="Rectangle 16"/>
           <p:cNvSpPr/>
           <p:nvPr/>
         </p:nvSpPr>
         <p:spPr>
           <a:xfrm>
             <a:off x="9495847" y="1234440"/>
-            <a:ext cx="12700" cy="4069080"/>
+            <a:ext cx="12700" cy="3520440"/>
           </a:xfrm>
           <a:prstGeom prst="rect">
             <a:avLst/>
@@ -48422,13 +49073,13 @@
       </p:sp>
       <p:sp>
         <p:nvSpPr>
-          <p:cNvPr id="16" name="TextBox 15"/>
+          <p:cNvPr id="18" name="TextBox 17"/>
           <p:cNvSpPr txBox="1"/>
           <p:nvPr/>
         </p:nvSpPr>
         <p:spPr>
           <a:xfrm>
-            <a:off x="9130087" y="5349240"/>
+            <a:off x="9130087" y="4800600"/>
             <a:ext cx="731520" cy="274320"/>
           </a:xfrm>
           <a:prstGeom prst="rect">
@@ -48457,14 +49108,14 @@
       </p:sp>
       <p:sp>
         <p:nvSpPr>
-          <p:cNvPr id="17" name="Rectangle 16"/>
+          <p:cNvPr id="19" name="Rectangle 18"/>
           <p:cNvSpPr/>
           <p:nvPr/>
         </p:nvSpPr>
         <p:spPr>
           <a:xfrm>
             <a:off x="10304112" y="1234440"/>
-            <a:ext cx="12700" cy="4069080"/>
+            <a:ext cx="12700" cy="3520440"/>
           </a:xfrm>
           <a:prstGeom prst="rect">
             <a:avLst/>
@@ -48501,13 +49152,13 @@
       </p:sp>
       <p:sp>
         <p:nvSpPr>
-          <p:cNvPr id="18" name="TextBox 17"/>
+          <p:cNvPr id="20" name="TextBox 19"/>
           <p:cNvSpPr txBox="1"/>
           <p:nvPr/>
         </p:nvSpPr>
         <p:spPr>
           <a:xfrm>
-            <a:off x="9938352" y="5349240"/>
+            <a:off x="9938352" y="4800600"/>
             <a:ext cx="731520" cy="274320"/>
           </a:xfrm>
           <a:prstGeom prst="rect">
@@ -48536,14 +49187,14 @@
       </p:sp>
       <p:sp>
         <p:nvSpPr>
-          <p:cNvPr id="19" name="Rectangle 18"/>
+          <p:cNvPr id="21" name="Rectangle 20"/>
           <p:cNvSpPr/>
           <p:nvPr/>
         </p:nvSpPr>
         <p:spPr>
           <a:xfrm>
             <a:off x="11112376" y="1234440"/>
-            <a:ext cx="12700" cy="4069080"/>
+            <a:ext cx="12700" cy="3520440"/>
           </a:xfrm>
           <a:prstGeom prst="rect">
             <a:avLst/>
@@ -48580,13 +49231,13 @@
       </p:sp>
       <p:sp>
         <p:nvSpPr>
-          <p:cNvPr id="20" name="TextBox 19"/>
+          <p:cNvPr id="22" name="TextBox 21"/>
           <p:cNvSpPr txBox="1"/>
           <p:nvPr/>
         </p:nvSpPr>
         <p:spPr>
           <a:xfrm>
-            <a:off x="10746616" y="5349240"/>
+            <a:off x="10746616" y="4800600"/>
             <a:ext cx="731520" cy="274320"/>
           </a:xfrm>
           <a:prstGeom prst="rect">
@@ -48615,14 +49266,14 @@
       </p:sp>
       <p:sp>
         <p:nvSpPr>
-          <p:cNvPr id="21" name="TextBox 20"/>
+          <p:cNvPr id="23" name="TextBox 22"/>
           <p:cNvSpPr txBox="1"/>
           <p:nvPr/>
         </p:nvSpPr>
         <p:spPr>
           <a:xfrm>
             <a:off x="4922215" y="1272540"/>
-            <a:ext cx="2011680" cy="505097"/>
+            <a:ext cx="2011680" cy="426720"/>
           </a:xfrm>
           <a:prstGeom prst="rect">
             <a:avLst/>
@@ -48650,14 +49301,14 @@
       </p:sp>
       <p:sp>
         <p:nvSpPr>
-          <p:cNvPr id="22" name="Rounded Rectangle 21"/>
+          <p:cNvPr id="24" name="Rounded Rectangle 23"/>
           <p:cNvSpPr/>
           <p:nvPr/>
         </p:nvSpPr>
         <p:spPr>
           <a:xfrm>
             <a:off x="7232707" y="1272540"/>
-            <a:ext cx="4364628" cy="505097"/>
+            <a:ext cx="4364628" cy="426720"/>
           </a:xfrm>
           <a:prstGeom prst="roundRect">
             <a:avLst>
@@ -48705,14 +49356,14 @@
       </p:sp>
       <p:sp>
         <p:nvSpPr>
-          <p:cNvPr id="23" name="TextBox 22"/>
+          <p:cNvPr id="25" name="TextBox 24"/>
           <p:cNvSpPr txBox="1"/>
           <p:nvPr/>
         </p:nvSpPr>
         <p:spPr>
           <a:xfrm>
-            <a:off x="4922215" y="1853837"/>
-            <a:ext cx="2011680" cy="505097"/>
+            <a:off x="4922215" y="1775460"/>
+            <a:ext cx="2011680" cy="426720"/>
           </a:xfrm>
           <a:prstGeom prst="rect">
             <a:avLst/>
@@ -48740,14 +49391,14 @@
       </p:sp>
       <p:sp>
         <p:nvSpPr>
-          <p:cNvPr id="24" name="Rounded Rectangle 23"/>
+          <p:cNvPr id="26" name="Rounded Rectangle 25"/>
           <p:cNvSpPr/>
           <p:nvPr/>
         </p:nvSpPr>
         <p:spPr>
           <a:xfrm>
-            <a:off x="7636840" y="1853837"/>
-            <a:ext cx="3960495" cy="505097"/>
+            <a:off x="7636840" y="1775460"/>
+            <a:ext cx="3960495" cy="426720"/>
           </a:xfrm>
           <a:prstGeom prst="roundRect">
             <a:avLst>
@@ -48795,14 +49446,14 @@
       </p:sp>
       <p:sp>
         <p:nvSpPr>
-          <p:cNvPr id="25" name="TextBox 24"/>
+          <p:cNvPr id="27" name="TextBox 26"/>
           <p:cNvSpPr txBox="1"/>
           <p:nvPr/>
         </p:nvSpPr>
         <p:spPr>
           <a:xfrm>
-            <a:off x="4922215" y="2435134"/>
-            <a:ext cx="2011680" cy="505097"/>
+            <a:off x="4922215" y="2278380"/>
+            <a:ext cx="2011680" cy="426720"/>
           </a:xfrm>
           <a:prstGeom prst="rect">
             <a:avLst/>
@@ -48830,14 +49481,14 @@
       </p:sp>
       <p:sp>
         <p:nvSpPr>
-          <p:cNvPr id="26" name="Rounded Rectangle 25"/>
+          <p:cNvPr id="28" name="Rounded Rectangle 27"/>
           <p:cNvSpPr/>
           <p:nvPr/>
         </p:nvSpPr>
         <p:spPr>
           <a:xfrm>
-            <a:off x="7960145" y="2435134"/>
-            <a:ext cx="3637190" cy="505097"/>
+            <a:off x="7960145" y="2278380"/>
+            <a:ext cx="3637190" cy="426720"/>
           </a:xfrm>
           <a:prstGeom prst="roundRect">
             <a:avLst>
@@ -48885,14 +49536,14 @@
       </p:sp>
       <p:sp>
         <p:nvSpPr>
-          <p:cNvPr id="27" name="TextBox 26"/>
+          <p:cNvPr id="29" name="TextBox 28"/>
           <p:cNvSpPr txBox="1"/>
           <p:nvPr/>
         </p:nvSpPr>
         <p:spPr>
           <a:xfrm>
-            <a:off x="4922215" y="3016431"/>
-            <a:ext cx="2011680" cy="505097"/>
+            <a:off x="4922215" y="2781300"/>
+            <a:ext cx="2011680" cy="426720"/>
           </a:xfrm>
           <a:prstGeom prst="rect">
             <a:avLst/>
@@ -48920,14 +49571,14 @@
       </p:sp>
       <p:sp>
         <p:nvSpPr>
-          <p:cNvPr id="28" name="Rounded Rectangle 27"/>
+          <p:cNvPr id="30" name="Rounded Rectangle 29"/>
           <p:cNvSpPr/>
           <p:nvPr/>
         </p:nvSpPr>
         <p:spPr>
           <a:xfrm>
-            <a:off x="8606757" y="3016431"/>
-            <a:ext cx="2990578" cy="505097"/>
+            <a:off x="8606757" y="2781300"/>
+            <a:ext cx="2990578" cy="426720"/>
           </a:xfrm>
           <a:prstGeom prst="roundRect">
             <a:avLst>
@@ -48975,14 +49626,14 @@
       </p:sp>
       <p:sp>
         <p:nvSpPr>
-          <p:cNvPr id="29" name="TextBox 28"/>
+          <p:cNvPr id="31" name="TextBox 30"/>
           <p:cNvSpPr txBox="1"/>
           <p:nvPr/>
         </p:nvSpPr>
         <p:spPr>
           <a:xfrm>
-            <a:off x="4922215" y="3597728"/>
-            <a:ext cx="2011680" cy="505097"/>
+            <a:off x="4922215" y="3284220"/>
+            <a:ext cx="2011680" cy="426720"/>
           </a:xfrm>
           <a:prstGeom prst="rect">
             <a:avLst/>
@@ -49010,14 +49661,14 @@
       </p:sp>
       <p:sp>
         <p:nvSpPr>
-          <p:cNvPr id="30" name="Rounded Rectangle 29"/>
+          <p:cNvPr id="32" name="Rounded Rectangle 31"/>
           <p:cNvSpPr/>
           <p:nvPr/>
         </p:nvSpPr>
         <p:spPr>
           <a:xfrm>
-            <a:off x="10142459" y="3597728"/>
-            <a:ext cx="1454876" cy="505097"/>
+            <a:off x="10142459" y="3284220"/>
+            <a:ext cx="1454876" cy="426720"/>
           </a:xfrm>
           <a:prstGeom prst="roundRect">
             <a:avLst>
@@ -49065,14 +49716,14 @@
       </p:sp>
       <p:sp>
         <p:nvSpPr>
-          <p:cNvPr id="31" name="TextBox 30"/>
+          <p:cNvPr id="33" name="TextBox 32"/>
           <p:cNvSpPr txBox="1"/>
           <p:nvPr/>
         </p:nvSpPr>
         <p:spPr>
           <a:xfrm>
-            <a:off x="4922215" y="4179025"/>
-            <a:ext cx="2011680" cy="505097"/>
+            <a:off x="4922215" y="3787140"/>
+            <a:ext cx="2011680" cy="426720"/>
           </a:xfrm>
           <a:prstGeom prst="rect">
             <a:avLst/>
@@ -49100,14 +49751,14 @@
       </p:sp>
       <p:sp>
         <p:nvSpPr>
-          <p:cNvPr id="32" name="Rounded Rectangle 31"/>
+          <p:cNvPr id="34" name="Rounded Rectangle 33"/>
           <p:cNvSpPr/>
           <p:nvPr/>
         </p:nvSpPr>
         <p:spPr>
           <a:xfrm>
-            <a:off x="10789070" y="4179025"/>
-            <a:ext cx="808265" cy="505097"/>
+            <a:off x="10789070" y="3787140"/>
+            <a:ext cx="808265" cy="426720"/>
           </a:xfrm>
           <a:prstGeom prst="roundRect">
             <a:avLst>
@@ -49155,14 +49806,14 @@
       </p:sp>
       <p:sp>
         <p:nvSpPr>
-          <p:cNvPr id="33" name="TextBox 32"/>
+          <p:cNvPr id="35" name="TextBox 34"/>
           <p:cNvSpPr txBox="1"/>
           <p:nvPr/>
         </p:nvSpPr>
         <p:spPr>
           <a:xfrm>
-            <a:off x="4922215" y="4760322"/>
-            <a:ext cx="2011680" cy="505097"/>
+            <a:off x="4922215" y="4290060"/>
+            <a:ext cx="2011680" cy="426720"/>
           </a:xfrm>
           <a:prstGeom prst="rect">
             <a:avLst/>
@@ -49190,14 +49841,14 @@
       </p:sp>
       <p:sp>
         <p:nvSpPr>
-          <p:cNvPr id="34" name="Rounded Rectangle 33"/>
+          <p:cNvPr id="36" name="Rounded Rectangle 35"/>
           <p:cNvSpPr/>
           <p:nvPr/>
         </p:nvSpPr>
         <p:spPr>
           <a:xfrm>
-            <a:off x="11112376" y="4760322"/>
-            <a:ext cx="484959" cy="505097"/>
+            <a:off x="11112376" y="4290060"/>
+            <a:ext cx="484959" cy="426720"/>
           </a:xfrm>
           <a:prstGeom prst="roundRect">
             <a:avLst>
@@ -49236,14 +49887,14 @@
       </p:sp>
       <p:sp>
         <p:nvSpPr>
-          <p:cNvPr id="35" name="TextBox 34"/>
+          <p:cNvPr id="37" name="TextBox 36"/>
           <p:cNvSpPr txBox="1"/>
           <p:nvPr/>
         </p:nvSpPr>
         <p:spPr>
           <a:xfrm>
-            <a:off x="10426576" y="4760322"/>
-            <a:ext cx="621792" cy="505097"/>
+            <a:off x="10426576" y="4290060"/>
+            <a:ext cx="621792" cy="426720"/>
           </a:xfrm>
           <a:prstGeom prst="rect">
             <a:avLst/>
@@ -49271,13 +49922,13 @@
       </p:sp>
       <p:sp>
         <p:nvSpPr>
-          <p:cNvPr id="36" name="TextBox 35"/>
+          <p:cNvPr id="38" name="TextBox 37"/>
           <p:cNvSpPr txBox="1"/>
           <p:nvPr/>
         </p:nvSpPr>
         <p:spPr>
           <a:xfrm>
-            <a:off x="4922215" y="5669280"/>
+            <a:off x="4922215" y="5120640"/>
             <a:ext cx="6766560" cy="320040"/>
           </a:xfrm>
           <a:prstGeom prst="rect">
@@ -49306,14 +49957,14 @@
       </p:sp>
       <p:sp>
         <p:nvSpPr>
-          <p:cNvPr id="37" name="TextBox 36"/>
+          <p:cNvPr id="39" name="TextBox 38"/>
           <p:cNvSpPr txBox="1"/>
           <p:nvPr/>
         </p:nvSpPr>
         <p:spPr>
           <a:xfrm>
             <a:off x="502920" y="1234440"/>
-            <a:ext cx="4144975" cy="4754880"/>
+            <a:ext cx="4144975" cy="4206240"/>
           </a:xfrm>
           <a:prstGeom prst="rect">
             <a:avLst/>
@@ -49728,7 +50379,7 @@
                 </a:solidFill>
                 <a:latin typeface="Calibri"/>
               </a:rPr>
-              <a:t>60/63</a:t>
+              <a:t>60/65</a:t>
             </a:r>
           </a:p>
         </p:txBody>
@@ -50239,7 +50890,7 @@
                 </a:solidFill>
                 <a:latin typeface="Calibri"/>
               </a:rPr>
-              <a:t>61/63</a:t>
+              <a:t>61/65</a:t>
             </a:r>
           </a:p>
         </p:txBody>
@@ -50750,7 +51401,7 @@
                 </a:solidFill>
                 <a:latin typeface="Calibri"/>
               </a:rPr>
-              <a:t>62/63</a:t>
+              <a:t>62/65</a:t>
             </a:r>
           </a:p>
         </p:txBody>
@@ -50798,23 +51449,158 @@
           </a:p>
         </p:txBody>
       </p:sp>
+      <p:sp>
+        <p:nvSpPr>
+          <p:cNvPr id="9" name="Rectangle 8"/>
+          <p:cNvSpPr/>
+          <p:nvPr/>
+        </p:nvSpPr>
+        <p:spPr>
+          <a:xfrm>
+            <a:off x="502920" y="5577840"/>
+            <a:ext cx="109728" cy="457200"/>
+          </a:xfrm>
+          <a:prstGeom prst="rect">
+            <a:avLst/>
+          </a:prstGeom>
+          <a:solidFill>
+            <a:srgbClr val="DC2626"/>
+          </a:solidFill>
+          <a:ln>
+            <a:noFill/>
+          </a:ln>
+          <a:effectLst/>
+        </p:spPr>
+        <p:style>
+          <a:lnRef idx="1">
+            <a:schemeClr val="accent1"/>
+          </a:lnRef>
+          <a:fillRef idx="3">
+            <a:schemeClr val="accent1"/>
+          </a:fillRef>
+          <a:effectRef idx="2">
+            <a:schemeClr val="accent1"/>
+          </a:effectRef>
+          <a:fontRef idx="minor">
+            <a:schemeClr val="lt1"/>
+          </a:fontRef>
+        </p:style>
+        <p:txBody>
+          <a:bodyPr rtlCol="0" anchor="ctr"/>
+          <a:lstStyle/>
+          <a:p>
+            <a:pPr algn="ctr"/>
+          </a:p>
+        </p:txBody>
+      </p:sp>
+      <p:sp>
+        <p:nvSpPr>
+          <p:cNvPr id="10" name="Rectangle 9"/>
+          <p:cNvSpPr/>
+          <p:nvPr/>
+        </p:nvSpPr>
+        <p:spPr>
+          <a:xfrm>
+            <a:off x="612648" y="5577840"/>
+            <a:ext cx="11076127" cy="457200"/>
+          </a:xfrm>
+          <a:prstGeom prst="rect">
+            <a:avLst/>
+          </a:prstGeom>
+          <a:solidFill>
+            <a:srgbClr val="F3F4F6"/>
+          </a:solidFill>
+          <a:ln>
+            <a:noFill/>
+          </a:ln>
+          <a:effectLst/>
+        </p:spPr>
+        <p:style>
+          <a:lnRef idx="1">
+            <a:schemeClr val="accent1"/>
+          </a:lnRef>
+          <a:fillRef idx="3">
+            <a:schemeClr val="accent1"/>
+          </a:fillRef>
+          <a:effectRef idx="2">
+            <a:schemeClr val="accent1"/>
+          </a:effectRef>
+          <a:fontRef idx="minor">
+            <a:schemeClr val="lt1"/>
+          </a:fontRef>
+        </p:style>
+        <p:txBody>
+          <a:bodyPr rtlCol="0" anchor="ctr" wrap="square" lIns="137160"/>
+          <a:lstStyle/>
+          <a:p>
+            <a:pPr algn="l"/>
+            <a:r>
+              <a:rPr sz="1300" b="1" i="0">
+                <a:solidFill>
+                  <a:srgbClr val="DC2626"/>
+                </a:solidFill>
+                <a:latin typeface="Calibri"/>
+              </a:rPr>
+              <a:t>VIDEO  </a:t>
+            </a:r>
+            <a:r>
+              <a:rPr sz="1400" b="0" i="0">
+                <a:solidFill>
+                  <a:srgbClr val="1F2937"/>
+                </a:solidFill>
+                <a:latin typeface="Calibri"/>
+              </a:rPr>
+              <a:t>Ejemplos de PC a Android: </a:t>
+            </a:r>
+            <a:r>
+              <a:rPr sz="1400" b="1" i="0" u="sng">
+                <a:solidFill>
+                  <a:srgbClr val="DC2626"/>
+                </a:solidFill>
+                <a:latin typeface="Calibri"/>
+                <a:hlinkClick r:id="rId2"/>
+              </a:rPr>
+              <a:t>Jadsa Games, Unity 6 (18 min)</a:t>
+            </a:r>
+            <a:r>
+              <a:rPr sz="1400" b="0" i="0">
+                <a:solidFill>
+                  <a:srgbClr val="1F2937"/>
+                </a:solidFill>
+                <a:latin typeface="Calibri"/>
+              </a:rPr>
+              <a:t> · </a:t>
+            </a:r>
+            <a:r>
+              <a:rPr sz="1400" b="1" i="0" u="sng">
+                <a:solidFill>
+                  <a:srgbClr val="DC2626"/>
+                </a:solidFill>
+                <a:latin typeface="Calibri"/>
+                <a:hlinkClick r:id="rId3"/>
+              </a:rPr>
+              <a:t>LuisCanary, .exe y .apk (13 min)</a:t>
+            </a:r>
+          </a:p>
+        </p:txBody>
+      </p:sp>
       <p:pic>
         <p:nvPicPr>
-          <p:cNvPr id="9" name="Picture 8" descr="u4-build-botones.png"/>
+          <p:cNvPr id="11" name="Picture 10" descr="u4-build-botones.png"/>
           <p:cNvPicPr>
             <a:picLocks noChangeAspect="1"/>
           </p:cNvPicPr>
           <p:nvPr/>
         </p:nvPicPr>
         <p:blipFill>
-          <a:blip r:embed="rId2"/>
+          <a:blip r:embed="rId4"/>
           <a:stretch>
             <a:fillRect/>
           </a:stretch>
         </p:blipFill>
         <p:spPr>
           <a:xfrm>
-            <a:off x="4739335" y="3163034"/>
+            <a:off x="4739335" y="2888714"/>
             <a:ext cx="6949440" cy="531932"/>
           </a:xfrm>
           <a:prstGeom prst="rect">
@@ -50829,13 +51615,13 @@
       </p:pic>
       <p:sp>
         <p:nvSpPr>
-          <p:cNvPr id="10" name="TextBox 9"/>
+          <p:cNvPr id="12" name="TextBox 11"/>
           <p:cNvSpPr txBox="1"/>
           <p:nvPr/>
         </p:nvSpPr>
         <p:spPr>
           <a:xfrm>
-            <a:off x="4739335" y="5623560"/>
+            <a:off x="4739335" y="5074920"/>
             <a:ext cx="6949440" cy="365760"/>
           </a:xfrm>
           <a:prstGeom prst="rect">
@@ -50864,14 +51650,14 @@
       </p:sp>
       <p:sp>
         <p:nvSpPr>
-          <p:cNvPr id="11" name="TextBox 10"/>
+          <p:cNvPr id="13" name="TextBox 12"/>
           <p:cNvSpPr txBox="1"/>
           <p:nvPr/>
         </p:nvSpPr>
         <p:spPr>
           <a:xfrm>
             <a:off x="502920" y="1234440"/>
-            <a:ext cx="3962095" cy="4754880"/>
+            <a:ext cx="3962095" cy="4206240"/>
           </a:xfrm>
           <a:prstGeom prst="rect">
             <a:avLst/>
@@ -51261,7 +52047,7 @@
                 </a:solidFill>
                 <a:latin typeface="Calibri"/>
               </a:rPr>
-              <a:t>63/63</a:t>
+              <a:t>63/65</a:t>
             </a:r>
           </a:p>
         </p:txBody>
@@ -51665,6 +52451,2069 @@
 </p:sld>
 </file>
 
+<file path=ppt/slides/slide64.xml><?xml version="1.0" encoding="utf-8"?>
+<p:sld xmlns:a="http://schemas.openxmlformats.org/drawingml/2006/main" xmlns:p="http://schemas.openxmlformats.org/presentationml/2006/main" xmlns:r="http://schemas.openxmlformats.org/officeDocument/2006/relationships">
+  <p:cSld>
+    <p:bg>
+      <p:bgPr>
+        <a:solidFill>
+          <a:srgbClr val="FFFFFF"/>
+        </a:solidFill>
+        <a:effectLst/>
+      </p:bgPr>
+    </p:bg>
+    <p:spTree>
+      <p:nvGrpSpPr>
+        <p:cNvPr id="1" name=""/>
+        <p:cNvGrpSpPr/>
+        <p:nvPr/>
+      </p:nvGrpSpPr>
+      <p:grpSpPr/>
+      <p:sp>
+        <p:nvSpPr>
+          <p:cNvPr id="2" name="Rectangle 1"/>
+          <p:cNvSpPr/>
+          <p:nvPr/>
+        </p:nvSpPr>
+        <p:spPr>
+          <a:xfrm>
+            <a:off x="0" y="0"/>
+            <a:ext cx="12191695" cy="960120"/>
+          </a:xfrm>
+          <a:prstGeom prst="rect">
+            <a:avLst/>
+          </a:prstGeom>
+          <a:solidFill>
+            <a:srgbClr val="1F2A44"/>
+          </a:solidFill>
+          <a:ln>
+            <a:noFill/>
+          </a:ln>
+          <a:effectLst/>
+        </p:spPr>
+        <p:style>
+          <a:lnRef idx="1">
+            <a:schemeClr val="accent1"/>
+          </a:lnRef>
+          <a:fillRef idx="3">
+            <a:schemeClr val="accent1"/>
+          </a:fillRef>
+          <a:effectRef idx="2">
+            <a:schemeClr val="accent1"/>
+          </a:effectRef>
+          <a:fontRef idx="minor">
+            <a:schemeClr val="lt1"/>
+          </a:fontRef>
+        </p:style>
+        <p:txBody>
+          <a:bodyPr rtlCol="0" anchor="ctr"/>
+          <a:lstStyle/>
+          <a:p>
+            <a:pPr algn="ctr"/>
+          </a:p>
+        </p:txBody>
+      </p:sp>
+      <p:sp>
+        <p:nvSpPr>
+          <p:cNvPr id="3" name="Rectangle 2"/>
+          <p:cNvSpPr/>
+          <p:nvPr/>
+        </p:nvSpPr>
+        <p:spPr>
+          <a:xfrm>
+            <a:off x="0" y="960120"/>
+            <a:ext cx="12191695" cy="38100"/>
+          </a:xfrm>
+          <a:prstGeom prst="rect">
+            <a:avLst/>
+          </a:prstGeom>
+          <a:solidFill>
+            <a:srgbClr val="0D9488"/>
+          </a:solidFill>
+          <a:ln>
+            <a:noFill/>
+          </a:ln>
+          <a:effectLst/>
+        </p:spPr>
+        <p:style>
+          <a:lnRef idx="1">
+            <a:schemeClr val="accent1"/>
+          </a:lnRef>
+          <a:fillRef idx="3">
+            <a:schemeClr val="accent1"/>
+          </a:fillRef>
+          <a:effectRef idx="2">
+            <a:schemeClr val="accent1"/>
+          </a:effectRef>
+          <a:fontRef idx="minor">
+            <a:schemeClr val="lt1"/>
+          </a:fontRef>
+        </p:style>
+        <p:txBody>
+          <a:bodyPr rtlCol="0" anchor="ctr"/>
+          <a:lstStyle/>
+          <a:p>
+            <a:pPr algn="ctr"/>
+          </a:p>
+        </p:txBody>
+      </p:sp>
+      <p:sp>
+        <p:nvSpPr>
+          <p:cNvPr id="4" name="Oval 3"/>
+          <p:cNvSpPr/>
+          <p:nvPr/>
+        </p:nvSpPr>
+        <p:spPr>
+          <a:xfrm>
+            <a:off x="274320" y="219456"/>
+            <a:ext cx="530352" cy="530352"/>
+          </a:xfrm>
+          <a:prstGeom prst="ellipse">
+            <a:avLst/>
+          </a:prstGeom>
+          <a:solidFill>
+            <a:srgbClr val="0D9488"/>
+          </a:solidFill>
+          <a:ln>
+            <a:noFill/>
+          </a:ln>
+          <a:effectLst/>
+        </p:spPr>
+        <p:style>
+          <a:lnRef idx="1">
+            <a:schemeClr val="accent1"/>
+          </a:lnRef>
+          <a:fillRef idx="3">
+            <a:schemeClr val="accent1"/>
+          </a:fillRef>
+          <a:effectRef idx="2">
+            <a:schemeClr val="accent1"/>
+          </a:effectRef>
+          <a:fontRef idx="minor">
+            <a:schemeClr val="lt1"/>
+          </a:fontRef>
+        </p:style>
+        <p:txBody>
+          <a:bodyPr rtlCol="0" anchor="ctr" lIns="0" rIns="0" tIns="0" bIns="0"/>
+          <a:lstStyle/>
+          <a:p>
+            <a:pPr algn="ctr"/>
+            <a:r>
+              <a:rPr sz="1600" b="1" i="0">
+                <a:solidFill>
+                  <a:srgbClr val="FFFFFF"/>
+                </a:solidFill>
+                <a:latin typeface="Calibri"/>
+              </a:rPr>
+              <a:t>64</a:t>
+            </a:r>
+          </a:p>
+        </p:txBody>
+      </p:sp>
+      <p:sp>
+        <p:nvSpPr>
+          <p:cNvPr id="5" name="TextBox 4"/>
+          <p:cNvSpPr txBox="1"/>
+          <p:nvPr/>
+        </p:nvSpPr>
+        <p:spPr>
+          <a:xfrm>
+            <a:off x="1005840" y="109728"/>
+            <a:ext cx="10728655" cy="777240"/>
+          </a:xfrm>
+          <a:prstGeom prst="rect">
+            <a:avLst/>
+          </a:prstGeom>
+          <a:noFill/>
+        </p:spPr>
+        <p:txBody>
+          <a:bodyPr wrap="square" anchor="ctr" lIns="0" rIns="0" tIns="0" bIns="0">
+            <a:spAutoFit/>
+          </a:bodyPr>
+          <a:lstStyle/>
+          <a:p>
+            <a:r>
+              <a:rPr sz="1100" b="1" i="0">
+                <a:solidFill>
+                  <a:srgbClr val="99F6E4"/>
+                </a:solidFill>
+                <a:latin typeface="Calibri"/>
+              </a:rPr>
+              <a:t>ANEXO · CASO 2D PLATFORMER · PC Y ANDROID</a:t>
+            </a:r>
+          </a:p>
+          <a:p>
+            <a:r>
+              <a:rPr sz="2600" b="1" i="0">
+                <a:solidFill>
+                  <a:srgbClr val="FFFFFF"/>
+                </a:solidFill>
+                <a:latin typeface="Calibri"/>
+              </a:rPr>
+              <a:t>Antes y después: controles</a:t>
+            </a:r>
+          </a:p>
+        </p:txBody>
+      </p:sp>
+      <p:sp>
+        <p:nvSpPr>
+          <p:cNvPr id="6" name="TextBox 5"/>
+          <p:cNvSpPr txBox="1"/>
+          <p:nvPr/>
+        </p:nvSpPr>
+        <p:spPr>
+          <a:xfrm>
+            <a:off x="502920" y="6473952"/>
+            <a:ext cx="11185855" cy="274320"/>
+          </a:xfrm>
+          <a:prstGeom prst="rect">
+            <a:avLst/>
+          </a:prstGeom>
+          <a:noFill/>
+        </p:spPr>
+        <p:txBody>
+          <a:bodyPr wrap="square" anchor="ctr" lIns="0" rIns="0" tIns="0" bIns="0">
+            <a:spAutoFit/>
+          </a:bodyPr>
+          <a:lstStyle/>
+          <a:p>
+            <a:r>
+              <a:rPr sz="1000" b="0" i="0">
+                <a:solidFill>
+                  <a:srgbClr val="6B7280"/>
+                </a:solidFill>
+                <a:latin typeface="Calibri"/>
+              </a:rPr>
+              <a:t>Diseño según Plataformas de Juego · Unidad IV · Anexo · Anexo: Android en Unity 6</a:t>
+            </a:r>
+          </a:p>
+        </p:txBody>
+      </p:sp>
+      <p:sp>
+        <p:nvSpPr>
+          <p:cNvPr id="7" name="TextBox 6"/>
+          <p:cNvSpPr txBox="1"/>
+          <p:nvPr/>
+        </p:nvSpPr>
+        <p:spPr>
+          <a:xfrm>
+            <a:off x="10774375" y="6473952"/>
+            <a:ext cx="914400" cy="274320"/>
+          </a:xfrm>
+          <a:prstGeom prst="rect">
+            <a:avLst/>
+          </a:prstGeom>
+          <a:noFill/>
+        </p:spPr>
+        <p:txBody>
+          <a:bodyPr wrap="square" anchor="ctr" lIns="0" rIns="0" tIns="0" bIns="0">
+            <a:spAutoFit/>
+          </a:bodyPr>
+          <a:lstStyle/>
+          <a:p>
+            <a:pPr algn="r"/>
+            <a:r>
+              <a:rPr sz="1000" b="0" i="0">
+                <a:solidFill>
+                  <a:srgbClr val="6B7280"/>
+                </a:solidFill>
+                <a:latin typeface="Calibri"/>
+              </a:rPr>
+              <a:t>64/65</a:t>
+            </a:r>
+          </a:p>
+        </p:txBody>
+      </p:sp>
+      <p:sp>
+        <p:nvSpPr>
+          <p:cNvPr id="8" name="TextBox 7"/>
+          <p:cNvSpPr txBox="1"/>
+          <p:nvPr/>
+        </p:nvSpPr>
+        <p:spPr>
+          <a:xfrm>
+            <a:off x="502920" y="6126480"/>
+            <a:ext cx="11185855" cy="292608"/>
+          </a:xfrm>
+          <a:prstGeom prst="rect">
+            <a:avLst/>
+          </a:prstGeom>
+          <a:noFill/>
+        </p:spPr>
+        <p:txBody>
+          <a:bodyPr wrap="square" anchor="ctr" lIns="0" rIns="0" tIns="0" bIns="0">
+            <a:spAutoFit/>
+          </a:bodyPr>
+          <a:lstStyle/>
+          <a:p>
+            <a:r>
+              <a:rPr sz="1000" b="1" i="0">
+                <a:solidFill>
+                  <a:srgbClr val="6B7280"/>
+                </a:solidFill>
+                <a:latin typeface="Calibri"/>
+              </a:rPr>
+              <a:t>Fuente: </a:t>
+            </a:r>
+            <a:r>
+              <a:rPr sz="1000" b="0" i="0">
+                <a:solidFill>
+                  <a:srgbClr val="6B7280"/>
+                </a:solidFill>
+                <a:latin typeface="Calibri"/>
+              </a:rPr>
+              <a:t>proyectos-unity/2D-Platformer-Unity-v2; laboratorio-adaptacion/PORTEO-PLATFORMER.md (evidencia del 19/10/2026)</a:t>
+            </a:r>
+          </a:p>
+        </p:txBody>
+      </p:sp>
+      <p:sp>
+        <p:nvSpPr>
+          <p:cNvPr id="9" name="Rectangle 8"/>
+          <p:cNvSpPr/>
+          <p:nvPr/>
+        </p:nvSpPr>
+        <p:spPr>
+          <a:xfrm>
+            <a:off x="502920" y="5577840"/>
+            <a:ext cx="109728" cy="457200"/>
+          </a:xfrm>
+          <a:prstGeom prst="rect">
+            <a:avLst/>
+          </a:prstGeom>
+          <a:solidFill>
+            <a:srgbClr val="D97706"/>
+          </a:solidFill>
+          <a:ln>
+            <a:noFill/>
+          </a:ln>
+          <a:effectLst/>
+        </p:spPr>
+        <p:style>
+          <a:lnRef idx="1">
+            <a:schemeClr val="accent1"/>
+          </a:lnRef>
+          <a:fillRef idx="3">
+            <a:schemeClr val="accent1"/>
+          </a:fillRef>
+          <a:effectRef idx="2">
+            <a:schemeClr val="accent1"/>
+          </a:effectRef>
+          <a:fontRef idx="minor">
+            <a:schemeClr val="lt1"/>
+          </a:fontRef>
+        </p:style>
+        <p:txBody>
+          <a:bodyPr rtlCol="0" anchor="ctr"/>
+          <a:lstStyle/>
+          <a:p>
+            <a:pPr algn="ctr"/>
+          </a:p>
+        </p:txBody>
+      </p:sp>
+      <p:sp>
+        <p:nvSpPr>
+          <p:cNvPr id="10" name="Rectangle 9"/>
+          <p:cNvSpPr/>
+          <p:nvPr/>
+        </p:nvSpPr>
+        <p:spPr>
+          <a:xfrm>
+            <a:off x="612648" y="5577840"/>
+            <a:ext cx="11076127" cy="457200"/>
+          </a:xfrm>
+          <a:prstGeom prst="rect">
+            <a:avLst/>
+          </a:prstGeom>
+          <a:solidFill>
+            <a:srgbClr val="F3F4F6"/>
+          </a:solidFill>
+          <a:ln>
+            <a:noFill/>
+          </a:ln>
+          <a:effectLst/>
+        </p:spPr>
+        <p:style>
+          <a:lnRef idx="1">
+            <a:schemeClr val="accent1"/>
+          </a:lnRef>
+          <a:fillRef idx="3">
+            <a:schemeClr val="accent1"/>
+          </a:fillRef>
+          <a:effectRef idx="2">
+            <a:schemeClr val="accent1"/>
+          </a:effectRef>
+          <a:fontRef idx="minor">
+            <a:schemeClr val="lt1"/>
+          </a:fontRef>
+        </p:style>
+        <p:txBody>
+          <a:bodyPr rtlCol="0" anchor="ctr" wrap="square" lIns="137160"/>
+          <a:lstStyle/>
+          <a:p>
+            <a:pPr algn="l"/>
+            <a:r>
+              <a:rPr sz="1300" b="1" i="0">
+                <a:solidFill>
+                  <a:srgbClr val="D97706"/>
+                </a:solidFill>
+                <a:latin typeface="Calibri"/>
+              </a:rPr>
+              <a:t>PREGUNTA  </a:t>
+            </a:r>
+            <a:r>
+              <a:rPr sz="1400" b="0" i="0">
+                <a:solidFill>
+                  <a:srgbClr val="1F2937"/>
+                </a:solidFill>
+                <a:latin typeface="Calibri"/>
+              </a:rPr>
+              <a:t>¿Qué cambió para quien juega en PC?</a:t>
+            </a:r>
+          </a:p>
+        </p:txBody>
+      </p:sp>
+      <p:graphicFrame>
+        <p:nvGraphicFramePr>
+          <p:cNvPr id="11" name="Table 10"/>
+          <p:cNvGraphicFramePr>
+            <a:graphicFrameLocks noGrp="1"/>
+          </p:cNvGraphicFramePr>
+          <p:nvPr/>
+        </p:nvGraphicFramePr>
+        <p:xfrm>
+          <a:off x="502920" y="1234440"/>
+          <a:ext cx="11185852" cy="2834640"/>
+        </p:xfrm>
+        <a:graphic>
+          <a:graphicData uri="http://schemas.openxmlformats.org/drawingml/2006/table">
+            <a:tbl>
+              <a:tblPr firstRow="1" bandRow="1">
+                <a:tableStyleId>{5C22544A-7EE6-4342-B048-85BDC9FD1C3A}</a:tableStyleId>
+              </a:tblPr>
+              <a:tblGrid>
+                <a:gridCol w="1618079"/>
+                <a:gridCol w="2321592"/>
+                <a:gridCol w="2180889"/>
+                <a:gridCol w="1618079"/>
+                <a:gridCol w="1969836"/>
+                <a:gridCol w="1477377"/>
+              </a:tblGrid>
+              <a:tr h="566928">
+                <a:tc>
+                  <a:txBody>
+                    <a:bodyPr wrap="square"/>
+                    <a:lstStyle/>
+                    <a:p>
+                      <a:r>
+                        <a:rPr sz="1400" b="1" i="0">
+                          <a:solidFill>
+                            <a:srgbClr val="FFFFFF"/>
+                          </a:solidFill>
+                          <a:latin typeface="Calibri"/>
+                        </a:rPr>
+                        <a:t>Versión</a:t>
+                      </a:r>
+                    </a:p>
+                  </a:txBody>
+                  <a:tcPr marL="73152" marR="73152" marT="36576" marB="36576" anchor="ctr">
+                    <a:solidFill>
+                      <a:srgbClr val="0D9488"/>
+                    </a:solidFill>
+                  </a:tcPr>
+                </a:tc>
+                <a:tc>
+                  <a:txBody>
+                    <a:bodyPr wrap="square"/>
+                    <a:lstStyle/>
+                    <a:p>
+                      <a:r>
+                        <a:rPr sz="1400" b="1" i="0">
+                          <a:solidFill>
+                            <a:srgbClr val="FFFFFF"/>
+                          </a:solidFill>
+                          <a:latin typeface="Calibri"/>
+                        </a:rPr>
+                        <a:t>Controles</a:t>
+                      </a:r>
+                    </a:p>
+                  </a:txBody>
+                  <a:tcPr marL="73152" marR="73152" marT="36576" marB="36576" anchor="ctr">
+                    <a:solidFill>
+                      <a:srgbClr val="0D9488"/>
+                    </a:solidFill>
+                  </a:tcPr>
+                </a:tc>
+                <a:tc>
+                  <a:txBody>
+                    <a:bodyPr wrap="square"/>
+                    <a:lstStyle/>
+                    <a:p>
+                      <a:r>
+                        <a:rPr sz="1400" b="1" i="0">
+                          <a:solidFill>
+                            <a:srgbClr val="FFFFFF"/>
+                          </a:solidFill>
+                          <a:latin typeface="Calibri"/>
+                        </a:rPr>
+                        <a:t>Mover</a:t>
+                      </a:r>
+                    </a:p>
+                  </a:txBody>
+                  <a:tcPr marL="73152" marR="73152" marT="36576" marB="36576" anchor="ctr">
+                    <a:solidFill>
+                      <a:srgbClr val="0D9488"/>
+                    </a:solidFill>
+                  </a:tcPr>
+                </a:tc>
+                <a:tc>
+                  <a:txBody>
+                    <a:bodyPr wrap="square"/>
+                    <a:lstStyle/>
+                    <a:p>
+                      <a:r>
+                        <a:rPr sz="1400" b="1" i="0">
+                          <a:solidFill>
+                            <a:srgbClr val="FFFFFF"/>
+                          </a:solidFill>
+                          <a:latin typeface="Calibri"/>
+                        </a:rPr>
+                        <a:t>Saltar</a:t>
+                      </a:r>
+                    </a:p>
+                  </a:txBody>
+                  <a:tcPr marL="73152" marR="73152" marT="36576" marB="36576" anchor="ctr">
+                    <a:solidFill>
+                      <a:srgbClr val="0D9488"/>
+                    </a:solidFill>
+                  </a:tcPr>
+                </a:tc>
+                <a:tc>
+                  <a:txBody>
+                    <a:bodyPr wrap="square"/>
+                    <a:lstStyle/>
+                    <a:p>
+                      <a:r>
+                        <a:rPr sz="1400" b="1" i="0">
+                          <a:solidFill>
+                            <a:srgbClr val="FFFFFF"/>
+                          </a:solidFill>
+                          <a:latin typeface="Calibri"/>
+                        </a:rPr>
+                        <a:t>En pantalla</a:t>
+                      </a:r>
+                    </a:p>
+                  </a:txBody>
+                  <a:tcPr marL="73152" marR="73152" marT="36576" marB="36576" anchor="ctr">
+                    <a:solidFill>
+                      <a:srgbClr val="0D9488"/>
+                    </a:solidFill>
+                  </a:tcPr>
+                </a:tc>
+                <a:tc>
+                  <a:txBody>
+                    <a:bodyPr wrap="square"/>
+                    <a:lstStyle/>
+                    <a:p>
+                      <a:r>
+                        <a:rPr sz="1400" b="1" i="0">
+                          <a:solidFill>
+                            <a:srgbClr val="FFFFFF"/>
+                          </a:solidFill>
+                          <a:latin typeface="Calibri"/>
+                        </a:rPr>
+                        <a:t>Orientación</a:t>
+                      </a:r>
+                    </a:p>
+                  </a:txBody>
+                  <a:tcPr marL="73152" marR="73152" marT="36576" marB="36576" anchor="ctr">
+                    <a:solidFill>
+                      <a:srgbClr val="0D9488"/>
+                    </a:solidFill>
+                  </a:tcPr>
+                </a:tc>
+              </a:tr>
+              <a:tr h="566928">
+                <a:tc>
+                  <a:txBody>
+                    <a:bodyPr wrap="square"/>
+                    <a:lstStyle/>
+                    <a:p>
+                      <a:r>
+                        <a:rPr sz="1400" b="0" i="0">
+                          <a:solidFill>
+                            <a:srgbClr val="1F2937"/>
+                          </a:solidFill>
+                          <a:latin typeface="Calibri"/>
+                        </a:rPr>
+                        <a:t>PC · antes</a:t>
+                      </a:r>
+                    </a:p>
+                  </a:txBody>
+                  <a:tcPr marL="73152" marR="73152" marT="36576" marB="36576" anchor="ctr">
+                    <a:solidFill>
+                      <a:srgbClr val="FFFFFF"/>
+                    </a:solidFill>
+                  </a:tcPr>
+                </a:tc>
+                <a:tc>
+                  <a:txBody>
+                    <a:bodyPr wrap="square"/>
+                    <a:lstStyle/>
+                    <a:p>
+                      <a:r>
+                        <a:rPr sz="1400" b="0" i="0">
+                          <a:solidFill>
+                            <a:srgbClr val="1F2937"/>
+                          </a:solidFill>
+                          <a:latin typeface="Calibri"/>
+                        </a:rPr>
+                        <a:t>Teclado y joystick (legacy)</a:t>
+                      </a:r>
+                    </a:p>
+                  </a:txBody>
+                  <a:tcPr marL="73152" marR="73152" marT="36576" marB="36576" anchor="ctr">
+                    <a:solidFill>
+                      <a:srgbClr val="FFFFFF"/>
+                    </a:solidFill>
+                  </a:tcPr>
+                </a:tc>
+                <a:tc>
+                  <a:txBody>
+                    <a:bodyPr wrap="square"/>
+                    <a:lstStyle/>
+                    <a:p>
+                      <a:r>
+                        <a:rPr sz="1400" b="0" i="0">
+                          <a:solidFill>
+                            <a:srgbClr val="1F2937"/>
+                          </a:solidFill>
+                          <a:latin typeface="Calibri"/>
+                        </a:rPr>
+                        <a:t>← → / A D, con suavizado</a:t>
+                      </a:r>
+                    </a:p>
+                  </a:txBody>
+                  <a:tcPr marL="73152" marR="73152" marT="36576" marB="36576" anchor="ctr">
+                    <a:solidFill>
+                      <a:srgbClr val="FFFFFF"/>
+                    </a:solidFill>
+                  </a:tcPr>
+                </a:tc>
+                <a:tc>
+                  <a:txBody>
+                    <a:bodyPr wrap="square"/>
+                    <a:lstStyle/>
+                    <a:p>
+                      <a:r>
+                        <a:rPr sz="1400" b="0" i="0">
+                          <a:solidFill>
+                            <a:srgbClr val="1F2937"/>
+                          </a:solidFill>
+                          <a:latin typeface="Calibri"/>
+                        </a:rPr>
+                        <a:t>Espacio</a:t>
+                      </a:r>
+                    </a:p>
+                  </a:txBody>
+                  <a:tcPr marL="73152" marR="73152" marT="36576" marB="36576" anchor="ctr">
+                    <a:solidFill>
+                      <a:srgbClr val="FFFFFF"/>
+                    </a:solidFill>
+                  </a:tcPr>
+                </a:tc>
+                <a:tc>
+                  <a:txBody>
+                    <a:bodyPr wrap="square"/>
+                    <a:lstStyle/>
+                    <a:p>
+                      <a:r>
+                        <a:rPr sz="1400" b="0" i="0">
+                          <a:solidFill>
+                            <a:srgbClr val="1F2937"/>
+                          </a:solidFill>
+                          <a:latin typeface="Calibri"/>
+                        </a:rPr>
+                        <a:t>Nada</a:t>
+                      </a:r>
+                    </a:p>
+                  </a:txBody>
+                  <a:tcPr marL="73152" marR="73152" marT="36576" marB="36576" anchor="ctr">
+                    <a:solidFill>
+                      <a:srgbClr val="FFFFFF"/>
+                    </a:solidFill>
+                  </a:tcPr>
+                </a:tc>
+                <a:tc>
+                  <a:txBody>
+                    <a:bodyPr wrap="square"/>
+                    <a:lstStyle/>
+                    <a:p>
+                      <a:r>
+                        <a:rPr sz="1400" b="0" i="0">
+                          <a:solidFill>
+                            <a:srgbClr val="1F2937"/>
+                          </a:solidFill>
+                          <a:latin typeface="Calibri"/>
+                        </a:rPr>
+                        <a:t>Ventana</a:t>
+                      </a:r>
+                    </a:p>
+                  </a:txBody>
+                  <a:tcPr marL="73152" marR="73152" marT="36576" marB="36576" anchor="ctr">
+                    <a:solidFill>
+                      <a:srgbClr val="FFFFFF"/>
+                    </a:solidFill>
+                  </a:tcPr>
+                </a:tc>
+              </a:tr>
+              <a:tr h="566928">
+                <a:tc>
+                  <a:txBody>
+                    <a:bodyPr wrap="square"/>
+                    <a:lstStyle/>
+                    <a:p>
+                      <a:r>
+                        <a:rPr sz="1400" b="0" i="0">
+                          <a:solidFill>
+                            <a:srgbClr val="1F2937"/>
+                          </a:solidFill>
+                          <a:latin typeface="Calibri"/>
+                        </a:rPr>
+                        <a:t>PC · después</a:t>
+                      </a:r>
+                    </a:p>
+                  </a:txBody>
+                  <a:tcPr marL="73152" marR="73152" marT="36576" marB="36576" anchor="ctr">
+                    <a:solidFill>
+                      <a:srgbClr val="E6F4F2"/>
+                    </a:solidFill>
+                  </a:tcPr>
+                </a:tc>
+                <a:tc>
+                  <a:txBody>
+                    <a:bodyPr wrap="square"/>
+                    <a:lstStyle/>
+                    <a:p>
+                      <a:r>
+                        <a:rPr sz="1400" b="0" i="0">
+                          <a:solidFill>
+                            <a:srgbClr val="1F2937"/>
+                          </a:solidFill>
+                          <a:latin typeface="Calibri"/>
+                        </a:rPr>
+                        <a:t>Teclado y gamepad</a:t>
+                      </a:r>
+                    </a:p>
+                  </a:txBody>
+                  <a:tcPr marL="73152" marR="73152" marT="36576" marB="36576" anchor="ctr">
+                    <a:solidFill>
+                      <a:srgbClr val="E6F4F2"/>
+                    </a:solidFill>
+                  </a:tcPr>
+                </a:tc>
+                <a:tc>
+                  <a:txBody>
+                    <a:bodyPr wrap="square"/>
+                    <a:lstStyle/>
+                    <a:p>
+                      <a:r>
+                        <a:rPr sz="1400" b="0" i="0">
+                          <a:solidFill>
+                            <a:srgbClr val="1F2937"/>
+                          </a:solidFill>
+                          <a:latin typeface="Calibri"/>
+                        </a:rPr>
+                        <a:t>← → / A D, stick, cruceta</a:t>
+                      </a:r>
+                    </a:p>
+                  </a:txBody>
+                  <a:tcPr marL="73152" marR="73152" marT="36576" marB="36576" anchor="ctr">
+                    <a:solidFill>
+                      <a:srgbClr val="E6F4F2"/>
+                    </a:solidFill>
+                  </a:tcPr>
+                </a:tc>
+                <a:tc>
+                  <a:txBody>
+                    <a:bodyPr wrap="square"/>
+                    <a:lstStyle/>
+                    <a:p>
+                      <a:r>
+                        <a:rPr sz="1400" b="0" i="0">
+                          <a:solidFill>
+                            <a:srgbClr val="1F2937"/>
+                          </a:solidFill>
+                          <a:latin typeface="Calibri"/>
+                        </a:rPr>
+                        <a:t>Espacio o botón A</a:t>
+                      </a:r>
+                    </a:p>
+                  </a:txBody>
+                  <a:tcPr marL="73152" marR="73152" marT="36576" marB="36576" anchor="ctr">
+                    <a:solidFill>
+                      <a:srgbClr val="E6F4F2"/>
+                    </a:solidFill>
+                  </a:tcPr>
+                </a:tc>
+                <a:tc>
+                  <a:txBody>
+                    <a:bodyPr wrap="square"/>
+                    <a:lstStyle/>
+                    <a:p>
+                      <a:r>
+                        <a:rPr sz="1400" b="0" i="0">
+                          <a:solidFill>
+                            <a:srgbClr val="1F2937"/>
+                          </a:solidFill>
+                          <a:latin typeface="Calibri"/>
+                        </a:rPr>
+                        <a:t>Nada (oculto)</a:t>
+                      </a:r>
+                    </a:p>
+                  </a:txBody>
+                  <a:tcPr marL="73152" marR="73152" marT="36576" marB="36576" anchor="ctr">
+                    <a:solidFill>
+                      <a:srgbClr val="E6F4F2"/>
+                    </a:solidFill>
+                  </a:tcPr>
+                </a:tc>
+                <a:tc>
+                  <a:txBody>
+                    <a:bodyPr wrap="square"/>
+                    <a:lstStyle/>
+                    <a:p>
+                      <a:r>
+                        <a:rPr sz="1400" b="0" i="0">
+                          <a:solidFill>
+                            <a:srgbClr val="1F2937"/>
+                          </a:solidFill>
+                          <a:latin typeface="Calibri"/>
+                        </a:rPr>
+                        <a:t>Ventana</a:t>
+                      </a:r>
+                    </a:p>
+                  </a:txBody>
+                  <a:tcPr marL="73152" marR="73152" marT="36576" marB="36576" anchor="ctr">
+                    <a:solidFill>
+                      <a:srgbClr val="E6F4F2"/>
+                    </a:solidFill>
+                  </a:tcPr>
+                </a:tc>
+              </a:tr>
+              <a:tr h="566928">
+                <a:tc>
+                  <a:txBody>
+                    <a:bodyPr wrap="square"/>
+                    <a:lstStyle/>
+                    <a:p>
+                      <a:r>
+                        <a:rPr sz="1400" b="0" i="0">
+                          <a:solidFill>
+                            <a:srgbClr val="1F2937"/>
+                          </a:solidFill>
+                          <a:latin typeface="Calibri"/>
+                        </a:rPr>
+                        <a:t>Android · antes</a:t>
+                      </a:r>
+                    </a:p>
+                  </a:txBody>
+                  <a:tcPr marL="73152" marR="73152" marT="36576" marB="36576" anchor="ctr">
+                    <a:solidFill>
+                      <a:srgbClr val="FFFFFF"/>
+                    </a:solidFill>
+                  </a:tcPr>
+                </a:tc>
+                <a:tc>
+                  <a:txBody>
+                    <a:bodyPr wrap="square"/>
+                    <a:lstStyle/>
+                    <a:p>
+                      <a:r>
+                        <a:rPr sz="1400" b="0" i="0">
+                          <a:solidFill>
+                            <a:srgbClr val="1F2937"/>
+                          </a:solidFill>
+                          <a:latin typeface="Calibri"/>
+                        </a:rPr>
+                        <a:t>Ninguno</a:t>
+                      </a:r>
+                    </a:p>
+                  </a:txBody>
+                  <a:tcPr marL="73152" marR="73152" marT="36576" marB="36576" anchor="ctr">
+                    <a:solidFill>
+                      <a:srgbClr val="FFFFFF"/>
+                    </a:solidFill>
+                  </a:tcPr>
+                </a:tc>
+                <a:tc>
+                  <a:txBody>
+                    <a:bodyPr wrap="square"/>
+                    <a:lstStyle/>
+                    <a:p>
+                      <a:r>
+                        <a:rPr sz="1400" b="0" i="0">
+                          <a:solidFill>
+                            <a:srgbClr val="1F2937"/>
+                          </a:solidFill>
+                          <a:latin typeface="Calibri"/>
+                        </a:rPr>
+                        <a:t>No se puede</a:t>
+                      </a:r>
+                    </a:p>
+                  </a:txBody>
+                  <a:tcPr marL="73152" marR="73152" marT="36576" marB="36576" anchor="ctr">
+                    <a:solidFill>
+                      <a:srgbClr val="FFFFFF"/>
+                    </a:solidFill>
+                  </a:tcPr>
+                </a:tc>
+                <a:tc>
+                  <a:txBody>
+                    <a:bodyPr wrap="square"/>
+                    <a:lstStyle/>
+                    <a:p>
+                      <a:r>
+                        <a:rPr sz="1400" b="0" i="0">
+                          <a:solidFill>
+                            <a:srgbClr val="1F2937"/>
+                          </a:solidFill>
+                          <a:latin typeface="Calibri"/>
+                        </a:rPr>
+                        <a:t>No se puede</a:t>
+                      </a:r>
+                    </a:p>
+                  </a:txBody>
+                  <a:tcPr marL="73152" marR="73152" marT="36576" marB="36576" anchor="ctr">
+                    <a:solidFill>
+                      <a:srgbClr val="FFFFFF"/>
+                    </a:solidFill>
+                  </a:tcPr>
+                </a:tc>
+                <a:tc>
+                  <a:txBody>
+                    <a:bodyPr wrap="square"/>
+                    <a:lstStyle/>
+                    <a:p>
+                      <a:r>
+                        <a:rPr sz="1400" b="0" i="0">
+                          <a:solidFill>
+                            <a:srgbClr val="1F2937"/>
+                          </a:solidFill>
+                          <a:latin typeface="Calibri"/>
+                        </a:rPr>
+                        <a:t>Contenedor vacío</a:t>
+                      </a:r>
+                    </a:p>
+                  </a:txBody>
+                  <a:tcPr marL="73152" marR="73152" marT="36576" marB="36576" anchor="ctr">
+                    <a:solidFill>
+                      <a:srgbClr val="FFFFFF"/>
+                    </a:solidFill>
+                  </a:tcPr>
+                </a:tc>
+                <a:tc>
+                  <a:txBody>
+                    <a:bodyPr wrap="square"/>
+                    <a:lstStyle/>
+                    <a:p>
+                      <a:r>
+                        <a:rPr sz="1400" b="0" i="0">
+                          <a:solidFill>
+                            <a:srgbClr val="1F2937"/>
+                          </a:solidFill>
+                          <a:latin typeface="Calibri"/>
+                        </a:rPr>
+                        <a:t>Las 4</a:t>
+                      </a:r>
+                    </a:p>
+                  </a:txBody>
+                  <a:tcPr marL="73152" marR="73152" marT="36576" marB="36576" anchor="ctr">
+                    <a:solidFill>
+                      <a:srgbClr val="FFFFFF"/>
+                    </a:solidFill>
+                  </a:tcPr>
+                </a:tc>
+              </a:tr>
+              <a:tr h="566928">
+                <a:tc>
+                  <a:txBody>
+                    <a:bodyPr wrap="square"/>
+                    <a:lstStyle/>
+                    <a:p>
+                      <a:r>
+                        <a:rPr sz="1400" b="0" i="0">
+                          <a:solidFill>
+                            <a:srgbClr val="1F2937"/>
+                          </a:solidFill>
+                          <a:latin typeface="Calibri"/>
+                        </a:rPr>
+                        <a:t>Android · después</a:t>
+                      </a:r>
+                    </a:p>
+                  </a:txBody>
+                  <a:tcPr marL="73152" marR="73152" marT="36576" marB="36576" anchor="ctr">
+                    <a:solidFill>
+                      <a:srgbClr val="E6F4F2"/>
+                    </a:solidFill>
+                  </a:tcPr>
+                </a:tc>
+                <a:tc>
+                  <a:txBody>
+                    <a:bodyPr wrap="square"/>
+                    <a:lstStyle/>
+                    <a:p>
+                      <a:r>
+                        <a:rPr sz="1400" b="0" i="0">
+                          <a:solidFill>
+                            <a:srgbClr val="1F2937"/>
+                          </a:solidFill>
+                          <a:latin typeface="Calibri"/>
+                        </a:rPr>
+                        <a:t>Táctil = gamepad virtual</a:t>
+                      </a:r>
+                    </a:p>
+                  </a:txBody>
+                  <a:tcPr marL="73152" marR="73152" marT="36576" marB="36576" anchor="ctr">
+                    <a:solidFill>
+                      <a:srgbClr val="E6F4F2"/>
+                    </a:solidFill>
+                  </a:tcPr>
+                </a:tc>
+                <a:tc>
+                  <a:txBody>
+                    <a:bodyPr wrap="square"/>
+                    <a:lstStyle/>
+                    <a:p>
+                      <a:r>
+                        <a:rPr sz="1400" b="0" i="0">
+                          <a:solidFill>
+                            <a:srgbClr val="1F2937"/>
+                          </a:solidFill>
+                          <a:latin typeface="Calibri"/>
+                        </a:rPr>
+                        <a:t>Botones ◀ ▶</a:t>
+                      </a:r>
+                    </a:p>
+                  </a:txBody>
+                  <a:tcPr marL="73152" marR="73152" marT="36576" marB="36576" anchor="ctr">
+                    <a:solidFill>
+                      <a:srgbClr val="E6F4F2"/>
+                    </a:solidFill>
+                  </a:tcPr>
+                </a:tc>
+                <a:tc>
+                  <a:txBody>
+                    <a:bodyPr wrap="square"/>
+                    <a:lstStyle/>
+                    <a:p>
+                      <a:r>
+                        <a:rPr sz="1400" b="0" i="0">
+                          <a:solidFill>
+                            <a:srgbClr val="1F2937"/>
+                          </a:solidFill>
+                          <a:latin typeface="Calibri"/>
+                        </a:rPr>
+                        <a:t>Botón SALTAR</a:t>
+                      </a:r>
+                    </a:p>
+                  </a:txBody>
+                  <a:tcPr marL="73152" marR="73152" marT="36576" marB="36576" anchor="ctr">
+                    <a:solidFill>
+                      <a:srgbClr val="E6F4F2"/>
+                    </a:solidFill>
+                  </a:tcPr>
+                </a:tc>
+                <a:tc>
+                  <a:txBody>
+                    <a:bodyPr wrap="square"/>
+                    <a:lstStyle/>
+                    <a:p>
+                      <a:r>
+                        <a:rPr sz="1400" b="0" i="0">
+                          <a:solidFill>
+                            <a:srgbClr val="1F2937"/>
+                          </a:solidFill>
+                          <a:latin typeface="Calibri"/>
+                        </a:rPr>
+                        <a:t>◀ ▶ SALTAR + safe area</a:t>
+                      </a:r>
+                    </a:p>
+                  </a:txBody>
+                  <a:tcPr marL="73152" marR="73152" marT="36576" marB="36576" anchor="ctr">
+                    <a:solidFill>
+                      <a:srgbClr val="E6F4F2"/>
+                    </a:solidFill>
+                  </a:tcPr>
+                </a:tc>
+                <a:tc>
+                  <a:txBody>
+                    <a:bodyPr wrap="square"/>
+                    <a:lstStyle/>
+                    <a:p>
+                      <a:r>
+                        <a:rPr sz="1400" b="0" i="0">
+                          <a:solidFill>
+                            <a:srgbClr val="1F2937"/>
+                          </a:solidFill>
+                          <a:latin typeface="Calibri"/>
+                        </a:rPr>
+                        <a:t>Solo horizontal</a:t>
+                      </a:r>
+                    </a:p>
+                  </a:txBody>
+                  <a:tcPr marL="73152" marR="73152" marT="36576" marB="36576" anchor="ctr">
+                    <a:solidFill>
+                      <a:srgbClr val="E6F4F2"/>
+                    </a:solidFill>
+                  </a:tcPr>
+                </a:tc>
+              </a:tr>
+            </a:tbl>
+          </a:graphicData>
+        </a:graphic>
+      </p:graphicFrame>
+    </p:spTree>
+  </p:cSld>
+  <p:clrMapOvr>
+    <a:masterClrMapping/>
+  </p:clrMapOvr>
+</p:sld>
+</file>
+
+<file path=ppt/slides/slide65.xml><?xml version="1.0" encoding="utf-8"?>
+<p:sld xmlns:a="http://schemas.openxmlformats.org/drawingml/2006/main" xmlns:p="http://schemas.openxmlformats.org/presentationml/2006/main" xmlns:r="http://schemas.openxmlformats.org/officeDocument/2006/relationships">
+  <p:cSld>
+    <p:bg>
+      <p:bgPr>
+        <a:solidFill>
+          <a:srgbClr val="FFFFFF"/>
+        </a:solidFill>
+        <a:effectLst/>
+      </p:bgPr>
+    </p:bg>
+    <p:spTree>
+      <p:nvGrpSpPr>
+        <p:cNvPr id="1" name=""/>
+        <p:cNvGrpSpPr/>
+        <p:nvPr/>
+      </p:nvGrpSpPr>
+      <p:grpSpPr/>
+      <p:sp>
+        <p:nvSpPr>
+          <p:cNvPr id="2" name="Rectangle 1"/>
+          <p:cNvSpPr/>
+          <p:nvPr/>
+        </p:nvSpPr>
+        <p:spPr>
+          <a:xfrm>
+            <a:off x="0" y="0"/>
+            <a:ext cx="12191695" cy="960120"/>
+          </a:xfrm>
+          <a:prstGeom prst="rect">
+            <a:avLst/>
+          </a:prstGeom>
+          <a:solidFill>
+            <a:srgbClr val="1F2A44"/>
+          </a:solidFill>
+          <a:ln>
+            <a:noFill/>
+          </a:ln>
+          <a:effectLst/>
+        </p:spPr>
+        <p:style>
+          <a:lnRef idx="1">
+            <a:schemeClr val="accent1"/>
+          </a:lnRef>
+          <a:fillRef idx="3">
+            <a:schemeClr val="accent1"/>
+          </a:fillRef>
+          <a:effectRef idx="2">
+            <a:schemeClr val="accent1"/>
+          </a:effectRef>
+          <a:fontRef idx="minor">
+            <a:schemeClr val="lt1"/>
+          </a:fontRef>
+        </p:style>
+        <p:txBody>
+          <a:bodyPr rtlCol="0" anchor="ctr"/>
+          <a:lstStyle/>
+          <a:p>
+            <a:pPr algn="ctr"/>
+          </a:p>
+        </p:txBody>
+      </p:sp>
+      <p:sp>
+        <p:nvSpPr>
+          <p:cNvPr id="3" name="Rectangle 2"/>
+          <p:cNvSpPr/>
+          <p:nvPr/>
+        </p:nvSpPr>
+        <p:spPr>
+          <a:xfrm>
+            <a:off x="0" y="960120"/>
+            <a:ext cx="12191695" cy="38100"/>
+          </a:xfrm>
+          <a:prstGeom prst="rect">
+            <a:avLst/>
+          </a:prstGeom>
+          <a:solidFill>
+            <a:srgbClr val="0D9488"/>
+          </a:solidFill>
+          <a:ln>
+            <a:noFill/>
+          </a:ln>
+          <a:effectLst/>
+        </p:spPr>
+        <p:style>
+          <a:lnRef idx="1">
+            <a:schemeClr val="accent1"/>
+          </a:lnRef>
+          <a:fillRef idx="3">
+            <a:schemeClr val="accent1"/>
+          </a:fillRef>
+          <a:effectRef idx="2">
+            <a:schemeClr val="accent1"/>
+          </a:effectRef>
+          <a:fontRef idx="minor">
+            <a:schemeClr val="lt1"/>
+          </a:fontRef>
+        </p:style>
+        <p:txBody>
+          <a:bodyPr rtlCol="0" anchor="ctr"/>
+          <a:lstStyle/>
+          <a:p>
+            <a:pPr algn="ctr"/>
+          </a:p>
+        </p:txBody>
+      </p:sp>
+      <p:sp>
+        <p:nvSpPr>
+          <p:cNvPr id="4" name="Oval 3"/>
+          <p:cNvSpPr/>
+          <p:nvPr/>
+        </p:nvSpPr>
+        <p:spPr>
+          <a:xfrm>
+            <a:off x="274320" y="219456"/>
+            <a:ext cx="530352" cy="530352"/>
+          </a:xfrm>
+          <a:prstGeom prst="ellipse">
+            <a:avLst/>
+          </a:prstGeom>
+          <a:solidFill>
+            <a:srgbClr val="0D9488"/>
+          </a:solidFill>
+          <a:ln>
+            <a:noFill/>
+          </a:ln>
+          <a:effectLst/>
+        </p:spPr>
+        <p:style>
+          <a:lnRef idx="1">
+            <a:schemeClr val="accent1"/>
+          </a:lnRef>
+          <a:fillRef idx="3">
+            <a:schemeClr val="accent1"/>
+          </a:fillRef>
+          <a:effectRef idx="2">
+            <a:schemeClr val="accent1"/>
+          </a:effectRef>
+          <a:fontRef idx="minor">
+            <a:schemeClr val="lt1"/>
+          </a:fontRef>
+        </p:style>
+        <p:txBody>
+          <a:bodyPr rtlCol="0" anchor="ctr" lIns="0" rIns="0" tIns="0" bIns="0"/>
+          <a:lstStyle/>
+          <a:p>
+            <a:pPr algn="ctr"/>
+            <a:r>
+              <a:rPr sz="1600" b="1" i="0">
+                <a:solidFill>
+                  <a:srgbClr val="FFFFFF"/>
+                </a:solidFill>
+                <a:latin typeface="Calibri"/>
+              </a:rPr>
+              <a:t>65</a:t>
+            </a:r>
+          </a:p>
+        </p:txBody>
+      </p:sp>
+      <p:sp>
+        <p:nvSpPr>
+          <p:cNvPr id="5" name="TextBox 4"/>
+          <p:cNvSpPr txBox="1"/>
+          <p:nvPr/>
+        </p:nvSpPr>
+        <p:spPr>
+          <a:xfrm>
+            <a:off x="1005840" y="109728"/>
+            <a:ext cx="10728655" cy="777240"/>
+          </a:xfrm>
+          <a:prstGeom prst="rect">
+            <a:avLst/>
+          </a:prstGeom>
+          <a:noFill/>
+        </p:spPr>
+        <p:txBody>
+          <a:bodyPr wrap="square" anchor="ctr" lIns="0" rIns="0" tIns="0" bIns="0">
+            <a:spAutoFit/>
+          </a:bodyPr>
+          <a:lstStyle/>
+          <a:p>
+            <a:r>
+              <a:rPr sz="1100" b="1" i="0">
+                <a:solidFill>
+                  <a:srgbClr val="99F6E4"/>
+                </a:solidFill>
+                <a:latin typeface="Calibri"/>
+              </a:rPr>
+              <a:t>ANEXO · CASO 2D PLATFORMER · LO QUE NO SE VE</a:t>
+            </a:r>
+          </a:p>
+          <a:p>
+            <a:r>
+              <a:rPr sz="2600" b="1" i="0">
+                <a:solidFill>
+                  <a:srgbClr val="FFFFFF"/>
+                </a:solidFill>
+                <a:latin typeface="Calibri"/>
+              </a:rPr>
+              <a:t>Antes y después: proyecto</a:t>
+            </a:r>
+          </a:p>
+        </p:txBody>
+      </p:sp>
+      <p:sp>
+        <p:nvSpPr>
+          <p:cNvPr id="6" name="TextBox 5"/>
+          <p:cNvSpPr txBox="1"/>
+          <p:nvPr/>
+        </p:nvSpPr>
+        <p:spPr>
+          <a:xfrm>
+            <a:off x="502920" y="6473952"/>
+            <a:ext cx="11185855" cy="274320"/>
+          </a:xfrm>
+          <a:prstGeom prst="rect">
+            <a:avLst/>
+          </a:prstGeom>
+          <a:noFill/>
+        </p:spPr>
+        <p:txBody>
+          <a:bodyPr wrap="square" anchor="ctr" lIns="0" rIns="0" tIns="0" bIns="0">
+            <a:spAutoFit/>
+          </a:bodyPr>
+          <a:lstStyle/>
+          <a:p>
+            <a:r>
+              <a:rPr sz="1000" b="0" i="0">
+                <a:solidFill>
+                  <a:srgbClr val="6B7280"/>
+                </a:solidFill>
+                <a:latin typeface="Calibri"/>
+              </a:rPr>
+              <a:t>Diseño según Plataformas de Juego · Unidad IV · Anexo · Anexo: Android en Unity 6</a:t>
+            </a:r>
+          </a:p>
+        </p:txBody>
+      </p:sp>
+      <p:sp>
+        <p:nvSpPr>
+          <p:cNvPr id="7" name="TextBox 6"/>
+          <p:cNvSpPr txBox="1"/>
+          <p:nvPr/>
+        </p:nvSpPr>
+        <p:spPr>
+          <a:xfrm>
+            <a:off x="10774375" y="6473952"/>
+            <a:ext cx="914400" cy="274320"/>
+          </a:xfrm>
+          <a:prstGeom prst="rect">
+            <a:avLst/>
+          </a:prstGeom>
+          <a:noFill/>
+        </p:spPr>
+        <p:txBody>
+          <a:bodyPr wrap="square" anchor="ctr" lIns="0" rIns="0" tIns="0" bIns="0">
+            <a:spAutoFit/>
+          </a:bodyPr>
+          <a:lstStyle/>
+          <a:p>
+            <a:pPr algn="r"/>
+            <a:r>
+              <a:rPr sz="1000" b="0" i="0">
+                <a:solidFill>
+                  <a:srgbClr val="6B7280"/>
+                </a:solidFill>
+                <a:latin typeface="Calibri"/>
+              </a:rPr>
+              <a:t>65/65</a:t>
+            </a:r>
+          </a:p>
+        </p:txBody>
+      </p:sp>
+      <p:sp>
+        <p:nvSpPr>
+          <p:cNvPr id="8" name="TextBox 7"/>
+          <p:cNvSpPr txBox="1"/>
+          <p:nvPr/>
+        </p:nvSpPr>
+        <p:spPr>
+          <a:xfrm>
+            <a:off x="502920" y="6126480"/>
+            <a:ext cx="11185855" cy="292608"/>
+          </a:xfrm>
+          <a:prstGeom prst="rect">
+            <a:avLst/>
+          </a:prstGeom>
+          <a:noFill/>
+        </p:spPr>
+        <p:txBody>
+          <a:bodyPr wrap="square" anchor="ctr" lIns="0" rIns="0" tIns="0" bIns="0">
+            <a:spAutoFit/>
+          </a:bodyPr>
+          <a:lstStyle/>
+          <a:p>
+            <a:r>
+              <a:rPr sz="1000" b="1" i="0">
+                <a:solidFill>
+                  <a:srgbClr val="6B7280"/>
+                </a:solidFill>
+                <a:latin typeface="Calibri"/>
+              </a:rPr>
+              <a:t>Fuente: </a:t>
+            </a:r>
+            <a:r>
+              <a:rPr sz="1000" b="0" i="0">
+                <a:solidFill>
+                  <a:srgbClr val="6B7280"/>
+                </a:solidFill>
+                <a:latin typeface="Calibri"/>
+              </a:rPr>
+              <a:t>laboratorio-adaptacion/PORTEO-PLATFORMER.md; logs y XML en laboratorio-adaptacion/evidencia/platformer-v2-*</a:t>
+            </a:r>
+          </a:p>
+        </p:txBody>
+      </p:sp>
+      <p:sp>
+        <p:nvSpPr>
+          <p:cNvPr id="9" name="Rectangle 8"/>
+          <p:cNvSpPr/>
+          <p:nvPr/>
+        </p:nvSpPr>
+        <p:spPr>
+          <a:xfrm>
+            <a:off x="502920" y="5577840"/>
+            <a:ext cx="109728" cy="457200"/>
+          </a:xfrm>
+          <a:prstGeom prst="rect">
+            <a:avLst/>
+          </a:prstGeom>
+          <a:solidFill>
+            <a:srgbClr val="D97706"/>
+          </a:solidFill>
+          <a:ln>
+            <a:noFill/>
+          </a:ln>
+          <a:effectLst/>
+        </p:spPr>
+        <p:style>
+          <a:lnRef idx="1">
+            <a:schemeClr val="accent1"/>
+          </a:lnRef>
+          <a:fillRef idx="3">
+            <a:schemeClr val="accent1"/>
+          </a:fillRef>
+          <a:effectRef idx="2">
+            <a:schemeClr val="accent1"/>
+          </a:effectRef>
+          <a:fontRef idx="minor">
+            <a:schemeClr val="lt1"/>
+          </a:fontRef>
+        </p:style>
+        <p:txBody>
+          <a:bodyPr rtlCol="0" anchor="ctr"/>
+          <a:lstStyle/>
+          <a:p>
+            <a:pPr algn="ctr"/>
+          </a:p>
+        </p:txBody>
+      </p:sp>
+      <p:sp>
+        <p:nvSpPr>
+          <p:cNvPr id="10" name="Rectangle 9"/>
+          <p:cNvSpPr/>
+          <p:nvPr/>
+        </p:nvSpPr>
+        <p:spPr>
+          <a:xfrm>
+            <a:off x="612648" y="5577840"/>
+            <a:ext cx="11076127" cy="457200"/>
+          </a:xfrm>
+          <a:prstGeom prst="rect">
+            <a:avLst/>
+          </a:prstGeom>
+          <a:solidFill>
+            <a:srgbClr val="F3F4F6"/>
+          </a:solidFill>
+          <a:ln>
+            <a:noFill/>
+          </a:ln>
+          <a:effectLst/>
+        </p:spPr>
+        <p:style>
+          <a:lnRef idx="1">
+            <a:schemeClr val="accent1"/>
+          </a:lnRef>
+          <a:fillRef idx="3">
+            <a:schemeClr val="accent1"/>
+          </a:fillRef>
+          <a:effectRef idx="2">
+            <a:schemeClr val="accent1"/>
+          </a:effectRef>
+          <a:fontRef idx="minor">
+            <a:schemeClr val="lt1"/>
+          </a:fontRef>
+        </p:style>
+        <p:txBody>
+          <a:bodyPr rtlCol="0" anchor="ctr" wrap="square" lIns="137160"/>
+          <a:lstStyle/>
+          <a:p>
+            <a:pPr algn="l"/>
+            <a:r>
+              <a:rPr sz="1300" b="1" i="0">
+                <a:solidFill>
+                  <a:srgbClr val="D97706"/>
+                </a:solidFill>
+                <a:latin typeface="Calibri"/>
+              </a:rPr>
+              <a:t>PREGUNTA  </a:t>
+            </a:r>
+            <a:r>
+              <a:rPr sz="1400" b="0" i="0">
+                <a:solidFill>
+                  <a:srgbClr val="1F2937"/>
+                </a:solidFill>
+                <a:latin typeface="Calibri"/>
+              </a:rPr>
+              <a:t>¿Por qué fallan 2 tests si el porteo está bien?</a:t>
+            </a:r>
+          </a:p>
+        </p:txBody>
+      </p:sp>
+      <p:graphicFrame>
+        <p:nvGraphicFramePr>
+          <p:cNvPr id="11" name="Table 10"/>
+          <p:cNvGraphicFramePr>
+            <a:graphicFrameLocks noGrp="1"/>
+          </p:cNvGraphicFramePr>
+          <p:nvPr/>
+        </p:nvGraphicFramePr>
+        <p:xfrm>
+          <a:off x="502920" y="1234440"/>
+          <a:ext cx="11185854" cy="3968496"/>
+        </p:xfrm>
+        <a:graphic>
+          <a:graphicData uri="http://schemas.openxmlformats.org/drawingml/2006/table">
+            <a:tbl>
+              <a:tblPr firstRow="1" bandRow="1">
+                <a:tableStyleId>{5C22544A-7EE6-4342-B048-85BDC9FD1C3A}</a:tableStyleId>
+              </a:tblPr>
+              <a:tblGrid>
+                <a:gridCol w="2684605"/>
+                <a:gridCol w="4474342"/>
+                <a:gridCol w="4026907"/>
+              </a:tblGrid>
+              <a:tr h="566928">
+                <a:tc>
+                  <a:txBody>
+                    <a:bodyPr wrap="square"/>
+                    <a:lstStyle/>
+                    <a:p>
+                      <a:r>
+                        <a:rPr sz="1200" b="1" i="0">
+                          <a:solidFill>
+                            <a:srgbClr val="FFFFFF"/>
+                          </a:solidFill>
+                          <a:latin typeface="Calibri"/>
+                        </a:rPr>
+                        <a:t>Aspecto</a:t>
+                      </a:r>
+                    </a:p>
+                  </a:txBody>
+                  <a:tcPr marL="73152" marR="73152" marT="36576" marB="36576" anchor="ctr">
+                    <a:solidFill>
+                      <a:srgbClr val="0D9488"/>
+                    </a:solidFill>
+                  </a:tcPr>
+                </a:tc>
+                <a:tc>
+                  <a:txBody>
+                    <a:bodyPr wrap="square"/>
+                    <a:lstStyle/>
+                    <a:p>
+                      <a:r>
+                        <a:rPr sz="1200" b="1" i="0">
+                          <a:solidFill>
+                            <a:srgbClr val="FFFFFF"/>
+                          </a:solidFill>
+                          <a:latin typeface="Calibri"/>
+                        </a:rPr>
+                        <a:t>Antes (original)</a:t>
+                      </a:r>
+                    </a:p>
+                  </a:txBody>
+                  <a:tcPr marL="73152" marR="73152" marT="36576" marB="36576" anchor="ctr">
+                    <a:solidFill>
+                      <a:srgbClr val="0D9488"/>
+                    </a:solidFill>
+                  </a:tcPr>
+                </a:tc>
+                <a:tc>
+                  <a:txBody>
+                    <a:bodyPr wrap="square"/>
+                    <a:lstStyle/>
+                    <a:p>
+                      <a:r>
+                        <a:rPr sz="1200" b="1" i="0">
+                          <a:solidFill>
+                            <a:srgbClr val="FFFFFF"/>
+                          </a:solidFill>
+                          <a:latin typeface="Calibri"/>
+                        </a:rPr>
+                        <a:t>Después (versión 2)</a:t>
+                      </a:r>
+                    </a:p>
+                  </a:txBody>
+                  <a:tcPr marL="73152" marR="73152" marT="36576" marB="36576" anchor="ctr">
+                    <a:solidFill>
+                      <a:srgbClr val="0D9488"/>
+                    </a:solidFill>
+                  </a:tcPr>
+                </a:tc>
+              </a:tr>
+              <a:tr h="566928">
+                <a:tc>
+                  <a:txBody>
+                    <a:bodyPr wrap="square"/>
+                    <a:lstStyle/>
+                    <a:p>
+                      <a:r>
+                        <a:rPr sz="1200" b="0" i="0">
+                          <a:solidFill>
+                            <a:srgbClr val="1F2937"/>
+                          </a:solidFill>
+                          <a:latin typeface="Calibri"/>
+                        </a:rPr>
+                        <a:t>Sistema de entrada</a:t>
+                      </a:r>
+                    </a:p>
+                  </a:txBody>
+                  <a:tcPr marL="73152" marR="73152" marT="36576" marB="36576" anchor="ctr">
+                    <a:solidFill>
+                      <a:srgbClr val="FFFFFF"/>
+                    </a:solidFill>
+                  </a:tcPr>
+                </a:tc>
+                <a:tc>
+                  <a:txBody>
+                    <a:bodyPr wrap="square"/>
+                    <a:lstStyle/>
+                    <a:p>
+                      <a:r>
+                        <a:rPr sz="1200" b="0" i="0">
+                          <a:solidFill>
+                            <a:srgbClr val="1F2937"/>
+                          </a:solidFill>
+                          <a:latin typeface="Calibri"/>
+                        </a:rPr>
+                        <a:t>Input Manager</a:t>
+                      </a:r>
+                    </a:p>
+                  </a:txBody>
+                  <a:tcPr marL="73152" marR="73152" marT="36576" marB="36576" anchor="ctr">
+                    <a:solidFill>
+                      <a:srgbClr val="FFFFFF"/>
+                    </a:solidFill>
+                  </a:tcPr>
+                </a:tc>
+                <a:tc>
+                  <a:txBody>
+                    <a:bodyPr wrap="square"/>
+                    <a:lstStyle/>
+                    <a:p>
+                      <a:r>
+                        <a:rPr sz="1200" b="0" i="0">
+                          <a:solidFill>
+                            <a:srgbClr val="1F2937"/>
+                          </a:solidFill>
+                          <a:latin typeface="Calibri"/>
+                        </a:rPr>
+                        <a:t>Input System 1.19 (solo "New")</a:t>
+                      </a:r>
+                    </a:p>
+                  </a:txBody>
+                  <a:tcPr marL="73152" marR="73152" marT="36576" marB="36576" anchor="ctr">
+                    <a:solidFill>
+                      <a:srgbClr val="FFFFFF"/>
+                    </a:solidFill>
+                  </a:tcPr>
+                </a:tc>
+              </a:tr>
+              <a:tr h="566928">
+                <a:tc>
+                  <a:txBody>
+                    <a:bodyPr wrap="square"/>
+                    <a:lstStyle/>
+                    <a:p>
+                      <a:r>
+                        <a:rPr sz="1200" b="0" i="0">
+                          <a:solidFill>
+                            <a:srgbClr val="1F2937"/>
+                          </a:solidFill>
+                          <a:latin typeface="Calibri"/>
+                        </a:rPr>
+                        <a:t>Quién lee el input</a:t>
+                      </a:r>
+                    </a:p>
+                  </a:txBody>
+                  <a:tcPr marL="73152" marR="73152" marT="36576" marB="36576" anchor="ctr">
+                    <a:solidFill>
+                      <a:srgbClr val="E6F4F2"/>
+                    </a:solidFill>
+                  </a:tcPr>
+                </a:tc>
+                <a:tc>
+                  <a:txBody>
+                    <a:bodyPr wrap="square"/>
+                    <a:lstStyle/>
+                    <a:p>
+                      <a:r>
+                        <a:rPr sz="1200" b="0" i="0">
+                          <a:solidFill>
+                            <a:srgbClr val="1F2937"/>
+                          </a:solidFill>
+                          <a:latin typeface="Calibri"/>
+                        </a:rPr>
+                        <a:t>PlayerController</a:t>
+                      </a:r>
+                    </a:p>
+                  </a:txBody>
+                  <a:tcPr marL="73152" marR="73152" marT="36576" marB="36576" anchor="ctr">
+                    <a:solidFill>
+                      <a:srgbClr val="E6F4F2"/>
+                    </a:solidFill>
+                  </a:tcPr>
+                </a:tc>
+                <a:tc>
+                  <a:txBody>
+                    <a:bodyPr wrap="square"/>
+                    <a:lstStyle/>
+                    <a:p>
+                      <a:r>
+                        <a:rPr sz="1200" b="0" i="0">
+                          <a:solidFill>
+                            <a:srgbClr val="1F2937"/>
+                          </a:solidFill>
+                          <a:latin typeface="Calibri"/>
+                        </a:rPr>
+                        <a:t>Adaptador → SetIntent</a:t>
+                      </a:r>
+                    </a:p>
+                  </a:txBody>
+                  <a:tcPr marL="73152" marR="73152" marT="36576" marB="36576" anchor="ctr">
+                    <a:solidFill>
+                      <a:srgbClr val="E6F4F2"/>
+                    </a:solidFill>
+                  </a:tcPr>
+                </a:tc>
+              </a:tr>
+              <a:tr h="566928">
+                <a:tc>
+                  <a:txBody>
+                    <a:bodyPr wrap="square"/>
+                    <a:lstStyle/>
+                    <a:p>
+                      <a:r>
+                        <a:rPr sz="1200" b="0" i="0">
+                          <a:solidFill>
+                            <a:srgbClr val="1F2937"/>
+                          </a:solidFill>
+                          <a:latin typeface="Calibri"/>
+                        </a:rPr>
+                        <a:t>Módulo de UI</a:t>
+                      </a:r>
+                    </a:p>
+                  </a:txBody>
+                  <a:tcPr marL="73152" marR="73152" marT="36576" marB="36576" anchor="ctr">
+                    <a:solidFill>
+                      <a:srgbClr val="FFFFFF"/>
+                    </a:solidFill>
+                  </a:tcPr>
+                </a:tc>
+                <a:tc>
+                  <a:txBody>
+                    <a:bodyPr wrap="square"/>
+                    <a:lstStyle/>
+                    <a:p>
+                      <a:r>
+                        <a:rPr sz="1200" b="0" i="0">
+                          <a:solidFill>
+                            <a:srgbClr val="1F2937"/>
+                          </a:solidFill>
+                          <a:latin typeface="Calibri"/>
+                        </a:rPr>
+                        <a:t>StandaloneInputModule</a:t>
+                      </a:r>
+                    </a:p>
+                  </a:txBody>
+                  <a:tcPr marL="73152" marR="73152" marT="36576" marB="36576" anchor="ctr">
+                    <a:solidFill>
+                      <a:srgbClr val="FFFFFF"/>
+                    </a:solidFill>
+                  </a:tcPr>
+                </a:tc>
+                <a:tc>
+                  <a:txBody>
+                    <a:bodyPr wrap="square"/>
+                    <a:lstStyle/>
+                    <a:p>
+                      <a:r>
+                        <a:rPr sz="1200" b="0" i="0">
+                          <a:solidFill>
+                            <a:srgbClr val="1F2937"/>
+                          </a:solidFill>
+                          <a:latin typeface="Calibri"/>
+                        </a:rPr>
+                        <a:t>InputSystemUIInputModule</a:t>
+                      </a:r>
+                    </a:p>
+                  </a:txBody>
+                  <a:tcPr marL="73152" marR="73152" marT="36576" marB="36576" anchor="ctr">
+                    <a:solidFill>
+                      <a:srgbClr val="FFFFFF"/>
+                    </a:solidFill>
+                  </a:tcPr>
+                </a:tc>
+              </a:tr>
+              <a:tr h="566928">
+                <a:tc>
+                  <a:txBody>
+                    <a:bodyPr wrap="square"/>
+                    <a:lstStyle/>
+                    <a:p>
+                      <a:r>
+                        <a:rPr sz="1200" b="0" i="0">
+                          <a:solidFill>
+                            <a:srgbClr val="1F2937"/>
+                          </a:solidFill>
+                          <a:latin typeface="Calibri"/>
+                        </a:rPr>
+                        <a:t>Error "isGrounded"</a:t>
+                      </a:r>
+                    </a:p>
+                  </a:txBody>
+                  <a:tcPr marL="73152" marR="73152" marT="36576" marB="36576" anchor="ctr">
+                    <a:solidFill>
+                      <a:srgbClr val="E6F4F2"/>
+                    </a:solidFill>
+                  </a:tcPr>
+                </a:tc>
+                <a:tc>
+                  <a:txBody>
+                    <a:bodyPr wrap="square"/>
+                    <a:lstStyle/>
+                    <a:p>
+                      <a:r>
+                        <a:rPr sz="1200" b="0" i="0">
+                          <a:solidFill>
+                            <a:srgbClr val="1F2937"/>
+                          </a:solidFill>
+                          <a:latin typeface="Calibri"/>
+                        </a:rPr>
+                        <a:t>2447 por sesión</a:t>
+                      </a:r>
+                    </a:p>
+                  </a:txBody>
+                  <a:tcPr marL="73152" marR="73152" marT="36576" marB="36576" anchor="ctr">
+                    <a:solidFill>
+                      <a:srgbClr val="E6F4F2"/>
+                    </a:solidFill>
+                  </a:tcPr>
+                </a:tc>
+                <a:tc>
+                  <a:txBody>
+                    <a:bodyPr wrap="square"/>
+                    <a:lstStyle/>
+                    <a:p>
+                      <a:r>
+                        <a:rPr sz="1200" b="0" i="0">
+                          <a:solidFill>
+                            <a:srgbClr val="1F2937"/>
+                          </a:solidFill>
+                          <a:latin typeface="Calibri"/>
+                        </a:rPr>
+                        <a:t>0</a:t>
+                      </a:r>
+                    </a:p>
+                  </a:txBody>
+                  <a:tcPr marL="73152" marR="73152" marT="36576" marB="36576" anchor="ctr">
+                    <a:solidFill>
+                      <a:srgbClr val="E6F4F2"/>
+                    </a:solidFill>
+                  </a:tcPr>
+                </a:tc>
+              </a:tr>
+              <a:tr h="566928">
+                <a:tc>
+                  <a:txBody>
+                    <a:bodyPr wrap="square"/>
+                    <a:lstStyle/>
+                    <a:p>
+                      <a:r>
+                        <a:rPr sz="1200" b="0" i="0">
+                          <a:solidFill>
+                            <a:srgbClr val="1F2937"/>
+                          </a:solidFill>
+                          <a:latin typeface="Calibri"/>
+                        </a:rPr>
+                        <a:t>Build Android</a:t>
+                      </a:r>
+                    </a:p>
+                  </a:txBody>
+                  <a:tcPr marL="73152" marR="73152" marT="36576" marB="36576" anchor="ctr">
+                    <a:solidFill>
+                      <a:srgbClr val="FFFFFF"/>
+                    </a:solidFill>
+                  </a:tcPr>
+                </a:tc>
+                <a:tc>
+                  <a:txBody>
+                    <a:bodyPr wrap="square"/>
+                    <a:lstStyle/>
+                    <a:p>
+                      <a:r>
+                        <a:rPr sz="1200" b="0" i="0">
+                          <a:solidFill>
+                            <a:srgbClr val="1F2937"/>
+                          </a:solidFill>
+                          <a:latin typeface="Calibri"/>
+                        </a:rPr>
+                        <a:t>Falla (URP en modo compatibilidad)</a:t>
+                      </a:r>
+                    </a:p>
+                  </a:txBody>
+                  <a:tcPr marL="73152" marR="73152" marT="36576" marB="36576" anchor="ctr">
+                    <a:solidFill>
+                      <a:srgbClr val="FFFFFF"/>
+                    </a:solidFill>
+                  </a:tcPr>
+                </a:tc>
+                <a:tc>
+                  <a:txBody>
+                    <a:bodyPr wrap="square"/>
+                    <a:lstStyle/>
+                    <a:p>
+                      <a:r>
+                        <a:rPr sz="1200" b="0" i="0">
+                          <a:solidFill>
+                            <a:srgbClr val="1F2937"/>
+                          </a:solidFill>
+                          <a:latin typeface="Calibri"/>
+                        </a:rPr>
+                        <a:t>APK de 35,9 MB</a:t>
+                      </a:r>
+                    </a:p>
+                  </a:txBody>
+                  <a:tcPr marL="73152" marR="73152" marT="36576" marB="36576" anchor="ctr">
+                    <a:solidFill>
+                      <a:srgbClr val="FFFFFF"/>
+                    </a:solidFill>
+                  </a:tcPr>
+                </a:tc>
+              </a:tr>
+              <a:tr h="566928">
+                <a:tc>
+                  <a:txBody>
+                    <a:bodyPr wrap="square"/>
+                    <a:lstStyle/>
+                    <a:p>
+                      <a:r>
+                        <a:rPr sz="1200" b="0" i="0">
+                          <a:solidFill>
+                            <a:srgbClr val="1F2937"/>
+                          </a:solidFill>
+                          <a:latin typeface="Calibri"/>
+                        </a:rPr>
+                        <a:t>Tests automáticos</a:t>
+                      </a:r>
+                    </a:p>
+                  </a:txBody>
+                  <a:tcPr marL="73152" marR="73152" marT="36576" marB="36576" anchor="ctr">
+                    <a:solidFill>
+                      <a:srgbClr val="E6F4F2"/>
+                    </a:solidFill>
+                  </a:tcPr>
+                </a:tc>
+                <a:tc>
+                  <a:txBody>
+                    <a:bodyPr wrap="square"/>
+                    <a:lstStyle/>
+                    <a:p>
+                      <a:r>
+                        <a:rPr sz="1200" b="0" i="0">
+                          <a:solidFill>
+                            <a:srgbClr val="1F2937"/>
+                          </a:solidFill>
+                          <a:latin typeface="Calibri"/>
+                        </a:rPr>
+                        <a:t>Ninguno</a:t>
+                      </a:r>
+                    </a:p>
+                  </a:txBody>
+                  <a:tcPr marL="73152" marR="73152" marT="36576" marB="36576" anchor="ctr">
+                    <a:solidFill>
+                      <a:srgbClr val="E6F4F2"/>
+                    </a:solidFill>
+                  </a:tcPr>
+                </a:tc>
+                <a:tc>
+                  <a:txBody>
+                    <a:bodyPr wrap="square"/>
+                    <a:lstStyle/>
+                    <a:p>
+                      <a:r>
+                        <a:rPr sz="1200" b="0" i="0">
+                          <a:solidFill>
+                            <a:srgbClr val="1F2937"/>
+                          </a:solidFill>
+                          <a:latin typeface="Calibri"/>
+                        </a:rPr>
+                        <a:t>16: pasan 14, fallan 2</a:t>
+                      </a:r>
+                    </a:p>
+                  </a:txBody>
+                  <a:tcPr marL="73152" marR="73152" marT="36576" marB="36576" anchor="ctr">
+                    <a:solidFill>
+                      <a:srgbClr val="E6F4F2"/>
+                    </a:solidFill>
+                  </a:tcPr>
+                </a:tc>
+              </a:tr>
+            </a:tbl>
+          </a:graphicData>
+        </a:graphic>
+      </p:graphicFrame>
+    </p:spTree>
+  </p:cSld>
+  <p:clrMapOvr>
+    <a:masterClrMapping/>
+  </p:clrMapOvr>
+</p:sld>
+</file>
+
 <file path=ppt/slides/slide7.xml><?xml version="1.0" encoding="utf-8"?>
 <p:sld xmlns:a="http://schemas.openxmlformats.org/drawingml/2006/main" xmlns:p="http://schemas.openxmlformats.org/presentationml/2006/main" xmlns:r="http://schemas.openxmlformats.org/officeDocument/2006/relationships">
   <p:cSld>
@@ -51933,7 +54782,7 @@
                 </a:solidFill>
                 <a:latin typeface="Calibri"/>
               </a:rPr>
-              <a:t>7/63</a:t>
+              <a:t>7/65</a:t>
             </a:r>
           </a:p>
         </p:txBody>
@@ -51990,6 +54839,122 @@
         <p:spPr>
           <a:xfrm>
             <a:off x="502920" y="5577840"/>
+            <a:ext cx="109728" cy="457200"/>
+          </a:xfrm>
+          <a:prstGeom prst="rect">
+            <a:avLst/>
+          </a:prstGeom>
+          <a:solidFill>
+            <a:srgbClr val="DC2626"/>
+          </a:solidFill>
+          <a:ln>
+            <a:noFill/>
+          </a:ln>
+          <a:effectLst/>
+        </p:spPr>
+        <p:style>
+          <a:lnRef idx="1">
+            <a:schemeClr val="accent1"/>
+          </a:lnRef>
+          <a:fillRef idx="3">
+            <a:schemeClr val="accent1"/>
+          </a:fillRef>
+          <a:effectRef idx="2">
+            <a:schemeClr val="accent1"/>
+          </a:effectRef>
+          <a:fontRef idx="minor">
+            <a:schemeClr val="lt1"/>
+          </a:fontRef>
+        </p:style>
+        <p:txBody>
+          <a:bodyPr rtlCol="0" anchor="ctr"/>
+          <a:lstStyle/>
+          <a:p>
+            <a:pPr algn="ctr"/>
+          </a:p>
+        </p:txBody>
+      </p:sp>
+      <p:sp>
+        <p:nvSpPr>
+          <p:cNvPr id="10" name="Rectangle 9"/>
+          <p:cNvSpPr/>
+          <p:nvPr/>
+        </p:nvSpPr>
+        <p:spPr>
+          <a:xfrm>
+            <a:off x="612648" y="5577840"/>
+            <a:ext cx="11076127" cy="457200"/>
+          </a:xfrm>
+          <a:prstGeom prst="rect">
+            <a:avLst/>
+          </a:prstGeom>
+          <a:solidFill>
+            <a:srgbClr val="F3F4F6"/>
+          </a:solidFill>
+          <a:ln>
+            <a:noFill/>
+          </a:ln>
+          <a:effectLst/>
+        </p:spPr>
+        <p:style>
+          <a:lnRef idx="1">
+            <a:schemeClr val="accent1"/>
+          </a:lnRef>
+          <a:fillRef idx="3">
+            <a:schemeClr val="accent1"/>
+          </a:fillRef>
+          <a:effectRef idx="2">
+            <a:schemeClr val="accent1"/>
+          </a:effectRef>
+          <a:fontRef idx="minor">
+            <a:schemeClr val="lt1"/>
+          </a:fontRef>
+        </p:style>
+        <p:txBody>
+          <a:bodyPr rtlCol="0" anchor="ctr" wrap="square" lIns="137160"/>
+          <a:lstStyle/>
+          <a:p>
+            <a:pPr algn="l"/>
+            <a:r>
+              <a:rPr sz="1300" b="1" i="0">
+                <a:solidFill>
+                  <a:srgbClr val="DC2626"/>
+                </a:solidFill>
+                <a:latin typeface="Calibri"/>
+              </a:rPr>
+              <a:t>VIDEO  </a:t>
+            </a:r>
+            <a:r>
+              <a:rPr sz="1400" b="0" i="0">
+                <a:solidFill>
+                  <a:srgbClr val="1F2937"/>
+                </a:solidFill>
+                <a:latin typeface="Calibri"/>
+              </a:rPr>
+              <a:t>Consulta: </a:t>
+            </a:r>
+            <a:r>
+              <a:rPr sz="1400" b="1" i="0" u="sng">
+                <a:solidFill>
+                  <a:srgbClr val="DC2626"/>
+                </a:solidFill>
+                <a:latin typeface="Calibri"/>
+                <a:hlinkClick r:id="rId2"/>
+              </a:rPr>
+              <a:t>Academia Play, Historia de los videojuegos 1972–1983 (7 min)</a:t>
+            </a:r>
+          </a:p>
+        </p:txBody>
+      </p:sp>
+      <p:sp>
+        <p:nvSpPr>
+          <p:cNvPr id="11" name="Rectangle 10"/>
+          <p:cNvSpPr/>
+          <p:nvPr/>
+        </p:nvSpPr>
+        <p:spPr>
+          <a:xfrm>
+            <a:off x="502920" y="5029200"/>
             <a:ext cx="109728" cy="457200"/>
           </a:xfrm>
           <a:prstGeom prst="rect">
@@ -52027,13 +54992,13 @@
       </p:sp>
       <p:sp>
         <p:nvSpPr>
-          <p:cNvPr id="10" name="Rectangle 9"/>
+          <p:cNvPr id="12" name="Rectangle 11"/>
           <p:cNvSpPr/>
           <p:nvPr/>
         </p:nvSpPr>
         <p:spPr>
           <a:xfrm>
-            <a:off x="612648" y="5577840"/>
+            <a:off x="612648" y="5029200"/>
             <a:ext cx="11076127" cy="457200"/>
           </a:xfrm>
           <a:prstGeom prst="rect">
@@ -52089,13 +55054,13 @@
       </p:sp>
       <p:sp>
         <p:nvSpPr>
-          <p:cNvPr id="11" name="Rectangle 10"/>
+          <p:cNvPr id="13" name="Rectangle 12"/>
           <p:cNvSpPr/>
           <p:nvPr/>
         </p:nvSpPr>
         <p:spPr>
           <a:xfrm>
-            <a:off x="1325880" y="3181350"/>
+            <a:off x="1325880" y="2907030"/>
             <a:ext cx="9539935" cy="38100"/>
           </a:xfrm>
           <a:prstGeom prst="rect">
@@ -52133,13 +55098,13 @@
       </p:sp>
       <p:sp>
         <p:nvSpPr>
-          <p:cNvPr id="12" name="Rectangle 11"/>
+          <p:cNvPr id="14" name="Rectangle 13"/>
           <p:cNvSpPr/>
           <p:nvPr/>
         </p:nvSpPr>
         <p:spPr>
           <a:xfrm>
-            <a:off x="1499235" y="2880360"/>
+            <a:off x="1499235" y="2606040"/>
             <a:ext cx="19050" cy="320040"/>
           </a:xfrm>
           <a:prstGeom prst="rect">
@@ -52177,13 +55142,13 @@
       </p:sp>
       <p:sp>
         <p:nvSpPr>
-          <p:cNvPr id="13" name="Oval 12"/>
+          <p:cNvPr id="15" name="Oval 14"/>
           <p:cNvSpPr/>
           <p:nvPr/>
         </p:nvSpPr>
         <p:spPr>
           <a:xfrm>
-            <a:off x="1417320" y="3108960"/>
+            <a:off x="1417320" y="2834640"/>
             <a:ext cx="182880" cy="182880"/>
           </a:xfrm>
           <a:prstGeom prst="ellipse">
@@ -52221,13 +55186,13 @@
       </p:sp>
       <p:sp>
         <p:nvSpPr>
-          <p:cNvPr id="14" name="Rounded Rectangle 13"/>
+          <p:cNvPr id="16" name="Rounded Rectangle 15"/>
           <p:cNvSpPr/>
           <p:nvPr/>
         </p:nvSpPr>
         <p:spPr>
           <a:xfrm>
-            <a:off x="502920" y="2103120"/>
+            <a:off x="502920" y="1828800"/>
             <a:ext cx="2011680" cy="777240"/>
           </a:xfrm>
           <a:prstGeom prst="roundRect">
@@ -52297,13 +55262,13 @@
       </p:sp>
       <p:sp>
         <p:nvSpPr>
-          <p:cNvPr id="15" name="Rectangle 14"/>
+          <p:cNvPr id="17" name="Rectangle 16"/>
           <p:cNvSpPr/>
           <p:nvPr/>
         </p:nvSpPr>
         <p:spPr>
           <a:xfrm>
-            <a:off x="3028264" y="3200400"/>
+            <a:off x="3028264" y="2926080"/>
             <a:ext cx="19050" cy="320040"/>
           </a:xfrm>
           <a:prstGeom prst="rect">
@@ -52341,13 +55306,13 @@
       </p:sp>
       <p:sp>
         <p:nvSpPr>
-          <p:cNvPr id="16" name="Oval 15"/>
+          <p:cNvPr id="18" name="Oval 17"/>
           <p:cNvSpPr/>
           <p:nvPr/>
         </p:nvSpPr>
         <p:spPr>
           <a:xfrm>
-            <a:off x="2946349" y="3108960"/>
+            <a:off x="2946349" y="2834640"/>
             <a:ext cx="182880" cy="182880"/>
           </a:xfrm>
           <a:prstGeom prst="ellipse">
@@ -52385,13 +55350,13 @@
       </p:sp>
       <p:sp>
         <p:nvSpPr>
-          <p:cNvPr id="17" name="Rounded Rectangle 16"/>
+          <p:cNvPr id="19" name="Rounded Rectangle 18"/>
           <p:cNvSpPr/>
           <p:nvPr/>
         </p:nvSpPr>
         <p:spPr>
           <a:xfrm>
-            <a:off x="2031949" y="3520440"/>
+            <a:off x="2031949" y="3246120"/>
             <a:ext cx="2011680" cy="777240"/>
           </a:xfrm>
           <a:prstGeom prst="roundRect">
@@ -52461,13 +55426,13 @@
       </p:sp>
       <p:sp>
         <p:nvSpPr>
-          <p:cNvPr id="18" name="Rectangle 17"/>
+          <p:cNvPr id="20" name="Rectangle 19"/>
           <p:cNvSpPr/>
           <p:nvPr/>
         </p:nvSpPr>
         <p:spPr>
           <a:xfrm>
-            <a:off x="4557293" y="2880360"/>
+            <a:off x="4557293" y="2606040"/>
             <a:ext cx="19050" cy="320040"/>
           </a:xfrm>
           <a:prstGeom prst="rect">
@@ -52505,13 +55470,13 @@
       </p:sp>
       <p:sp>
         <p:nvSpPr>
-          <p:cNvPr id="19" name="Oval 18"/>
+          <p:cNvPr id="21" name="Oval 20"/>
           <p:cNvSpPr/>
           <p:nvPr/>
         </p:nvSpPr>
         <p:spPr>
           <a:xfrm>
-            <a:off x="4475378" y="3108960"/>
+            <a:off x="4475378" y="2834640"/>
             <a:ext cx="182880" cy="182880"/>
           </a:xfrm>
           <a:prstGeom prst="ellipse">
@@ -52549,13 +55514,13 @@
       </p:sp>
       <p:sp>
         <p:nvSpPr>
-          <p:cNvPr id="20" name="Rounded Rectangle 19"/>
+          <p:cNvPr id="22" name="Rounded Rectangle 21"/>
           <p:cNvSpPr/>
           <p:nvPr/>
         </p:nvSpPr>
         <p:spPr>
           <a:xfrm>
-            <a:off x="3560978" y="2103120"/>
+            <a:off x="3560978" y="1828800"/>
             <a:ext cx="2011680" cy="777240"/>
           </a:xfrm>
           <a:prstGeom prst="roundRect">
@@ -52625,13 +55590,13 @@
       </p:sp>
       <p:sp>
         <p:nvSpPr>
-          <p:cNvPr id="21" name="Rectangle 20"/>
+          <p:cNvPr id="23" name="Rectangle 22"/>
           <p:cNvSpPr/>
           <p:nvPr/>
         </p:nvSpPr>
         <p:spPr>
           <a:xfrm>
-            <a:off x="6086322" y="3200400"/>
+            <a:off x="6086322" y="2926080"/>
             <a:ext cx="19050" cy="320040"/>
           </a:xfrm>
           <a:prstGeom prst="rect">
@@ -52669,13 +55634,13 @@
       </p:sp>
       <p:sp>
         <p:nvSpPr>
-          <p:cNvPr id="22" name="Oval 21"/>
+          <p:cNvPr id="24" name="Oval 23"/>
           <p:cNvSpPr/>
           <p:nvPr/>
         </p:nvSpPr>
         <p:spPr>
           <a:xfrm>
-            <a:off x="6004407" y="3108960"/>
+            <a:off x="6004407" y="2834640"/>
             <a:ext cx="182880" cy="182880"/>
           </a:xfrm>
           <a:prstGeom prst="ellipse">
@@ -52713,13 +55678,13 @@
       </p:sp>
       <p:sp>
         <p:nvSpPr>
-          <p:cNvPr id="23" name="Rounded Rectangle 22"/>
+          <p:cNvPr id="25" name="Rounded Rectangle 24"/>
           <p:cNvSpPr/>
           <p:nvPr/>
         </p:nvSpPr>
         <p:spPr>
           <a:xfrm>
-            <a:off x="5090007" y="3520440"/>
+            <a:off x="5090007" y="3246120"/>
             <a:ext cx="2011680" cy="777240"/>
           </a:xfrm>
           <a:prstGeom prst="roundRect">
@@ -52789,13 +55754,13 @@
       </p:sp>
       <p:sp>
         <p:nvSpPr>
-          <p:cNvPr id="24" name="Rectangle 23"/>
+          <p:cNvPr id="26" name="Rectangle 25"/>
           <p:cNvSpPr/>
           <p:nvPr/>
         </p:nvSpPr>
         <p:spPr>
           <a:xfrm>
-            <a:off x="7615351" y="2880360"/>
+            <a:off x="7615351" y="2606040"/>
             <a:ext cx="19050" cy="320040"/>
           </a:xfrm>
           <a:prstGeom prst="rect">
@@ -52833,13 +55798,13 @@
       </p:sp>
       <p:sp>
         <p:nvSpPr>
-          <p:cNvPr id="25" name="Oval 24"/>
+          <p:cNvPr id="27" name="Oval 26"/>
           <p:cNvSpPr/>
           <p:nvPr/>
         </p:nvSpPr>
         <p:spPr>
           <a:xfrm>
-            <a:off x="7533436" y="3108960"/>
+            <a:off x="7533436" y="2834640"/>
             <a:ext cx="182880" cy="182880"/>
           </a:xfrm>
           <a:prstGeom prst="ellipse">
@@ -52877,13 +55842,13 @@
       </p:sp>
       <p:sp>
         <p:nvSpPr>
-          <p:cNvPr id="26" name="Rounded Rectangle 25"/>
+          <p:cNvPr id="28" name="Rounded Rectangle 27"/>
           <p:cNvSpPr/>
           <p:nvPr/>
         </p:nvSpPr>
         <p:spPr>
           <a:xfrm>
-            <a:off x="6619036" y="2103120"/>
+            <a:off x="6619036" y="1828800"/>
             <a:ext cx="2011680" cy="777240"/>
           </a:xfrm>
           <a:prstGeom prst="roundRect">
@@ -52953,13 +55918,13 @@
       </p:sp>
       <p:sp>
         <p:nvSpPr>
-          <p:cNvPr id="27" name="Rectangle 26"/>
+          <p:cNvPr id="29" name="Rectangle 28"/>
           <p:cNvSpPr/>
           <p:nvPr/>
         </p:nvSpPr>
         <p:spPr>
           <a:xfrm>
-            <a:off x="9144380" y="3200400"/>
+            <a:off x="9144380" y="2926080"/>
             <a:ext cx="19050" cy="320040"/>
           </a:xfrm>
           <a:prstGeom prst="rect">
@@ -52997,13 +55962,13 @@
       </p:sp>
       <p:sp>
         <p:nvSpPr>
-          <p:cNvPr id="28" name="Oval 27"/>
+          <p:cNvPr id="30" name="Oval 29"/>
           <p:cNvSpPr/>
           <p:nvPr/>
         </p:nvSpPr>
         <p:spPr>
           <a:xfrm>
-            <a:off x="9062465" y="3108960"/>
+            <a:off x="9062465" y="2834640"/>
             <a:ext cx="182880" cy="182880"/>
           </a:xfrm>
           <a:prstGeom prst="ellipse">
@@ -53041,13 +56006,13 @@
       </p:sp>
       <p:sp>
         <p:nvSpPr>
-          <p:cNvPr id="29" name="Rounded Rectangle 28"/>
+          <p:cNvPr id="31" name="Rounded Rectangle 30"/>
           <p:cNvSpPr/>
           <p:nvPr/>
         </p:nvSpPr>
         <p:spPr>
           <a:xfrm>
-            <a:off x="8148065" y="3520440"/>
+            <a:off x="8148065" y="3246120"/>
             <a:ext cx="2011680" cy="777240"/>
           </a:xfrm>
           <a:prstGeom prst="roundRect">
@@ -53117,13 +56082,13 @@
       </p:sp>
       <p:sp>
         <p:nvSpPr>
-          <p:cNvPr id="30" name="Rectangle 29"/>
+          <p:cNvPr id="32" name="Rectangle 31"/>
           <p:cNvSpPr/>
           <p:nvPr/>
         </p:nvSpPr>
         <p:spPr>
           <a:xfrm>
-            <a:off x="10673410" y="2880360"/>
+            <a:off x="10673410" y="2606040"/>
             <a:ext cx="19050" cy="320040"/>
           </a:xfrm>
           <a:prstGeom prst="rect">
@@ -53161,13 +56126,13 @@
       </p:sp>
       <p:sp>
         <p:nvSpPr>
-          <p:cNvPr id="31" name="Oval 30"/>
+          <p:cNvPr id="33" name="Oval 32"/>
           <p:cNvSpPr/>
           <p:nvPr/>
         </p:nvSpPr>
         <p:spPr>
           <a:xfrm>
-            <a:off x="10591495" y="3108960"/>
+            <a:off x="10591495" y="2834640"/>
             <a:ext cx="182880" cy="182880"/>
           </a:xfrm>
           <a:prstGeom prst="ellipse">
@@ -53205,13 +56170,13 @@
       </p:sp>
       <p:sp>
         <p:nvSpPr>
-          <p:cNvPr id="32" name="Rounded Rectangle 31"/>
+          <p:cNvPr id="34" name="Rounded Rectangle 33"/>
           <p:cNvSpPr/>
           <p:nvPr/>
         </p:nvSpPr>
         <p:spPr>
           <a:xfrm>
-            <a:off x="9677095" y="2103120"/>
+            <a:off x="9677095" y="1828800"/>
             <a:ext cx="2011680" cy="777240"/>
           </a:xfrm>
           <a:prstGeom prst="roundRect">
@@ -53281,13 +56246,13 @@
       </p:sp>
       <p:sp>
         <p:nvSpPr>
-          <p:cNvPr id="33" name="TextBox 32"/>
+          <p:cNvPr id="35" name="TextBox 34"/>
           <p:cNvSpPr txBox="1"/>
           <p:nvPr/>
         </p:nvSpPr>
         <p:spPr>
           <a:xfrm>
-            <a:off x="502920" y="5166360"/>
+            <a:off x="502920" y="4617720"/>
             <a:ext cx="11185855" cy="274320"/>
           </a:xfrm>
           <a:prstGeom prst="rect">
@@ -53590,7 +56555,7 @@
                 </a:solidFill>
                 <a:latin typeface="Calibri"/>
               </a:rPr>
-              <a:t>8/63</a:t>
+              <a:t>8/65</a:t>
             </a:r>
           </a:p>
         </p:txBody>
@@ -54143,7 +57108,7 @@
                 </a:solidFill>
                 <a:latin typeface="Calibri"/>
               </a:rPr>
-              <a:t>9/63</a:t>
+              <a:t>9/65</a:t>
             </a:r>
           </a:p>
         </p:txBody>
